--- a/Database_Knowledge_Assistant.pptx
+++ b/Database_Knowledge_Assistant.pptx
@@ -4,6 +4,9 @@
   <p:sldMasterIdLst>
     <p:sldMasterId id="2147483648" r:id="rId1"/>
   </p:sldMasterIdLst>
+  <p:notesMasterIdLst>
+    <p:notesMasterId r:id="rId12"/>
+  </p:notesMasterIdLst>
   <p:sldIdLst>
     <p:sldId id="256" r:id="rId2"/>
     <p:sldId id="257" r:id="rId3"/>
@@ -16,10 +19,7 @@
     <p:sldId id="264" r:id="rId10"/>
     <p:sldId id="265" r:id="rId11"/>
   </p:sldIdLst>
-  <p:notesMasterIdLst>
-    <p:notesMasterId r:id="rId12"/>
-  </p:notesMasterIdLst>
-  <p:sldSz cx="9144000" cy="5143500"/>
+  <p:sldSz cx="9144000" cy="5143500" type="screen16x9"/>
   <p:notesSz cx="5143500" cy="9144000"/>
   <p:defaultTextStyle>
     <a:lvl1pPr marL="0" algn="l" defTabSz="914400" rtl="0" eaLnBrk="1" latinLnBrk="0" hangingPunct="1">
@@ -116,10 +116,27 @@
 </p:presentation>
 </file>
 
+<file path=ppt/revisionInfo.xml><?xml version="1.0" encoding="utf-8"?>
+<p1510:revInfo xmlns:a="http://schemas.openxmlformats.org/drawingml/2006/main" xmlns:r="http://schemas.openxmlformats.org/officeDocument/2006/relationships" xmlns:p1510="http://schemas.microsoft.com/office/powerpoint/2015/10/main">
+  <p1510:revLst>
+    <p1510:client id="{0B6BA4F2-0F9A-9D8D-D3B8-CF71EFE02443}" v="20" dt="2026-08-07T02:41:50.105"/>
+    <p1510:client id="{772544C5-617D-9FFE-C742-C96027D8E4D5}" v="64" dt="2026-08-06T11:03:00.612"/>
+    <p1510:client id="{872AF543-CD26-7E44-98BB-AD7DA3A7233A}" v="78" dt="2026-08-06T10:52:31.689"/>
+    <p1510:client id="{A2219ED8-CAD9-DEF2-024C-9A4F4E0A7D3A}" v="14" dt="2026-08-06T08:25:03.845"/>
+    <p1510:client id="{BC368929-4023-5F79-84DC-2A94AD34BAA3}" v="9" dt="2026-08-07T01:11:39.830"/>
+    <p1510:client id="{C7E0B7C6-DE16-4E50-A0A0-3EDD40FC70B7}" v="36" dt="2026-08-07T01:12:37.426"/>
+    <p1510:client id="{D251B12D-48D4-589F-3676-D034055EE778}" v="97" dt="2026-08-06T08:19:42.558"/>
+    <p1510:client id="{EBA45739-FCC1-57F2-0DCA-C8A707E12DAD}" v="334" dt="2026-08-07T03:22:57.834"/>
+  </p1510:revLst>
+</p1510:revInfo>
+</file>
+
 <file path=ppt/charts/chart1.xml><?xml version="1.0" encoding="utf-8"?>
-<c:chartSpace xmlns:c="http://schemas.openxmlformats.org/drawingml/2006/chart" xmlns:a="http://schemas.openxmlformats.org/drawingml/2006/main" xmlns:r="http://schemas.openxmlformats.org/officeDocument/2006/relationships">
+<c:chartSpace xmlns:c="http://schemas.openxmlformats.org/drawingml/2006/chart" xmlns:a="http://schemas.openxmlformats.org/drawingml/2006/main" xmlns:r="http://schemas.openxmlformats.org/officeDocument/2006/relationships" xmlns:c16r2="http://schemas.microsoft.com/office/drawing/2015/06/chart">
   <c:date1904 val="0"/>
+  <c:lang val="en-US"/>
   <c:roundedCorners val="1"/>
+  <c:style val="2"/>
   <c:chart>
     <c:autoTitleDeleted val="1"/>
     <c:plotArea>
@@ -149,40 +166,15 @@
             <a:effectLst/>
           </c:spPr>
           <c:invertIfNegative val="0"/>
-          <c:dLbls>
-            <c:numFmt formatCode="0.00" sourceLinked="0"/>
-            <c:txPr>
-              <a:bodyPr/>
-              <a:lstStyle/>
-              <a:p>
-                <a:pPr>
-                  <a:defRPr b="0" i="0" strike="noStrike" sz="1000" u="none">
-                    <a:solidFill>
-                      <a:srgbClr val="1D252D"/>
-                    </a:solidFill>
-                    <a:latin typeface="Arial"/>
-                  </a:defRPr>
-                </a:pPr>
-              </a:p>
-            </c:txPr>
-            <c:showLegendKey val="0"/>
-            <c:showVal val="1"/>
-            <c:showCatName val="0"/>
-            <c:showSerName val="0"/>
-            <c:showPercent val="0"/>
-            <c:showBubbleSize val="0"/>
-            <c:showLeaderLines val="0"/>
-          </c:dLbls>
           <c:dPt>
             <c:idx val="0"/>
             <c:invertIfNegative val="0"/>
             <c:bubble3D val="0"/>
-            <c:spPr>
-              <a:solidFill>
-                <a:srgbClr val="FD5000"/>
-              </a:solidFill>
-              <a:effectLst/>
-            </c:spPr>
+            <c:extLst>
+              <c:ext xmlns:c16="http://schemas.microsoft.com/office/drawing/2014/chart" uri="{C3380CC4-5D6E-409C-BE32-E72D297353CC}">
+                <c16:uniqueId val="{00000001-603C-4171-AD67-DAA79A64BBC8}"/>
+              </c:ext>
+            </c:extLst>
           </c:dPt>
           <c:dPt>
             <c:idx val="1"/>
@@ -194,6 +186,11 @@
               </a:solidFill>
               <a:effectLst/>
             </c:spPr>
+            <c:extLst>
+              <c:ext xmlns:c16="http://schemas.microsoft.com/office/drawing/2014/chart" uri="{C3380CC4-5D6E-409C-BE32-E72D297353CC}">
+                <c16:uniqueId val="{00000003-603C-4171-AD67-DAA79A64BBC8}"/>
+              </c:ext>
+            </c:extLst>
           </c:dPt>
           <c:dPt>
             <c:idx val="2"/>
@@ -205,6 +202,11 @@
               </a:solidFill>
               <a:effectLst/>
             </c:spPr>
+            <c:extLst>
+              <c:ext xmlns:c16="http://schemas.microsoft.com/office/drawing/2014/chart" uri="{C3380CC4-5D6E-409C-BE32-E72D297353CC}">
+                <c16:uniqueId val="{00000005-603C-4171-AD67-DAA79A64BBC8}"/>
+              </c:ext>
+            </c:extLst>
           </c:dPt>
           <c:dPt>
             <c:idx val="3"/>
@@ -216,6 +218,11 @@
               </a:solidFill>
               <a:effectLst/>
             </c:spPr>
+            <c:extLst>
+              <c:ext xmlns:c16="http://schemas.microsoft.com/office/drawing/2014/chart" uri="{C3380CC4-5D6E-409C-BE32-E72D297353CC}">
+                <c16:uniqueId val="{00000007-603C-4171-AD67-DAA79A64BBC8}"/>
+              </c:ext>
+            </c:extLst>
           </c:dPt>
           <c:dPt>
             <c:idx val="4"/>
@@ -227,31 +234,71 @@
               </a:solidFill>
               <a:effectLst/>
             </c:spPr>
+            <c:extLst>
+              <c:ext xmlns:c16="http://schemas.microsoft.com/office/drawing/2014/chart" uri="{C3380CC4-5D6E-409C-BE32-E72D297353CC}">
+                <c16:uniqueId val="{00000009-603C-4171-AD67-DAA79A64BBC8}"/>
+              </c:ext>
+            </c:extLst>
           </c:dPt>
+          <c:dLbls>
+            <c:numFmt formatCode="0.00" sourceLinked="0"/>
+            <c:spPr>
+              <a:noFill/>
+              <a:ln>
+                <a:noFill/>
+              </a:ln>
+              <a:effectLst/>
+            </c:spPr>
+            <c:txPr>
+              <a:bodyPr/>
+              <a:lstStyle/>
+              <a:p>
+                <a:pPr>
+                  <a:defRPr sz="1000" b="0" i="0" u="none" strike="noStrike">
+                    <a:solidFill>
+                      <a:srgbClr val="1D252D"/>
+                    </a:solidFill>
+                    <a:latin typeface="Arial"/>
+                  </a:defRPr>
+                </a:pPr>
+                <a:endParaRPr lang="en-US"/>
+              </a:p>
+            </c:txPr>
+            <c:showLegendKey val="0"/>
+            <c:showVal val="1"/>
+            <c:showCatName val="0"/>
+            <c:showSerName val="0"/>
+            <c:showPercent val="0"/>
+            <c:showBubbleSize val="0"/>
+            <c:showLeaderLines val="0"/>
+            <c:extLst>
+              <c:ext xmlns:c15="http://schemas.microsoft.com/office/drawing/2012/chart" uri="{CE6537A1-D6FC-4f65-9D91-7224C49458BB}">
+                <c15:showLeaderLines val="0"/>
+              </c:ext>
+            </c:extLst>
+          </c:dLbls>
           <c:cat>
-            <c:multiLvlStrRef>
+            <c:strRef>
               <c:f>Sheet1!$A$2:$A$6</c:f>
-              <c:multiLvlStrCache>
+              <c:strCache>
                 <c:ptCount val="5"/>
-                <c:lvl>
-                  <c:pt idx="0">
-                    <c:v>metadata_aware</c:v>
-                  </c:pt>
-                  <c:pt idx="1">
-                    <c:v>fixed</c:v>
-                  </c:pt>
-                  <c:pt idx="2">
-                    <c:v>recursive</c:v>
-                  </c:pt>
-                  <c:pt idx="3">
-                    <c:v>hybrid RRF</c:v>
-                  </c:pt>
-                  <c:pt idx="4">
-                    <c:v>BM25</c:v>
-                  </c:pt>
-                </c:lvl>
-              </c:multiLvlStrCache>
-            </c:multiLvlStrRef>
+                <c:pt idx="0">
+                  <c:v>metadata_aware</c:v>
+                </c:pt>
+                <c:pt idx="1">
+                  <c:v>fixed</c:v>
+                </c:pt>
+                <c:pt idx="2">
+                  <c:v>recursive</c:v>
+                </c:pt>
+                <c:pt idx="3">
+                  <c:v>hybrid RRF</c:v>
+                </c:pt>
+                <c:pt idx="4">
+                  <c:v>BM25</c:v>
+                </c:pt>
+              </c:strCache>
+            </c:strRef>
           </c:cat>
           <c:val>
             <c:numRef>
@@ -277,36 +324,23 @@
               </c:numCache>
             </c:numRef>
           </c:val>
+          <c:extLst>
+            <c:ext xmlns:c16="http://schemas.microsoft.com/office/drawing/2014/chart" uri="{C3380CC4-5D6E-409C-BE32-E72D297353CC}">
+              <c16:uniqueId val="{0000000A-603C-4171-AD67-DAA79A64BBC8}"/>
+            </c:ext>
+          </c:extLst>
         </c:ser>
         <c:dLbls>
-          <c:numFmt formatCode="0.00" sourceLinked="0"/>
-          <c:txPr>
-            <a:bodyPr/>
-            <a:lstStyle/>
-            <a:p>
-              <a:pPr>
-                <a:defRPr b="0" i="0" strike="noStrike" sz="1000" u="none">
-                  <a:solidFill>
-                    <a:srgbClr val="1D252D"/>
-                  </a:solidFill>
-                  <a:latin typeface="Arial"/>
-                </a:defRPr>
-              </a:pPr>
-            </a:p>
-          </c:txPr>
           <c:showLegendKey val="0"/>
           <c:showVal val="1"/>
           <c:showCatName val="0"/>
           <c:showSerName val="0"/>
           <c:showPercent val="0"/>
           <c:showBubbleSize val="0"/>
-          <c:showLeaderLines val="0"/>
         </c:dLbls>
         <c:gapWidth val="150"/>
-        <c:overlap val="0"/>
         <c:axId val="2094734554"/>
         <c:axId val="2094734552"/>
-        <c:axId val="2094734556"/>
       </c:barChart>
       <c:catAx>
         <c:axId val="2094734554"/>
@@ -347,6 +381,7 @@
         <c:crosses val="autoZero"/>
         <c:auto val="1"/>
         <c:lblAlgn val="ctr"/>
+        <c:lblOffset val="100"/>
         <c:noMultiLvlLbl val="1"/>
       </c:catAx>
       <c:valAx>
@@ -410,6 +445,7 @@
     </c:plotArea>
     <c:plotVisOnly val="1"/>
     <c:dispBlanksAs val="span"/>
+    <c:showDLblsOverMax val="1"/>
   </c:chart>
   <c:spPr>
     <a:noFill/>
@@ -459,7 +495,7 @@
         <p:spPr>
           <a:xfrm>
             <a:off x="0" y="0"/>
-            <a:ext cx="2971800" cy="458788"/>
+            <a:ext cx="2228850" cy="458788"/>
           </a:xfrm>
           <a:prstGeom prst="rect">
             <a:avLst/>
@@ -489,8 +525,8 @@
         </p:nvSpPr>
         <p:spPr>
           <a:xfrm>
-            <a:off x="3884613" y="0"/>
-            <a:ext cx="2971800" cy="458788"/>
+            <a:off x="2913063" y="0"/>
+            <a:ext cx="2228850" cy="458788"/>
           </a:xfrm>
           <a:prstGeom prst="rect">
             <a:avLst/>
@@ -504,9 +540,8 @@
             </a:lvl1pPr>
           </a:lstStyle>
           <a:p>
-            <a:fld id="{5282F153-3F37-0F45-9E97-73ACFA13230C}" type="datetimeFigureOut">
-              <a:rPr lang="en-US"/>
-              <a:t>7/23/19</a:t>
+            <a:fld id="{5A8FEB21-6965-4F88-AE09-A1B9FC2E31F3}" type="datetimeFigureOut">
+              <a:t>8/6/2026</a:t>
             </a:fld>
             <a:endParaRPr lang="en-US"/>
           </a:p>
@@ -524,7 +559,7 @@
         </p:nvSpPr>
         <p:spPr>
           <a:xfrm>
-            <a:off x="685800" y="1143000"/>
+            <a:off x="-171450" y="1143000"/>
             <a:ext cx="5486400" cy="3086100"/>
           </a:xfrm>
           <a:prstGeom prst="rect">
@@ -557,8 +592,8 @@
         </p:nvSpPr>
         <p:spPr>
           <a:xfrm>
-            <a:off x="685800" y="4400550"/>
-            <a:ext cx="5486400" cy="3600450"/>
+            <a:off x="514350" y="4400550"/>
+            <a:ext cx="4114800" cy="3600450"/>
           </a:xfrm>
           <a:prstGeom prst="rect">
             <a:avLst/>
@@ -617,7 +652,7 @@
         <p:spPr>
           <a:xfrm>
             <a:off x="0" y="8685213"/>
-            <a:ext cx="2971800" cy="458787"/>
+            <a:ext cx="2228850" cy="458787"/>
           </a:xfrm>
           <a:prstGeom prst="rect">
             <a:avLst/>
@@ -647,8 +682,8 @@
         </p:nvSpPr>
         <p:spPr>
           <a:xfrm>
-            <a:off x="3884613" y="8685213"/>
-            <a:ext cx="2971800" cy="458787"/>
+            <a:off x="2913063" y="8685213"/>
+            <a:ext cx="2228850" cy="458787"/>
           </a:xfrm>
           <a:prstGeom prst="rect">
             <a:avLst/>
@@ -662,8 +697,7 @@
             </a:lvl1pPr>
           </a:lstStyle>
           <a:p>
-            <a:fld id="{CE5E9CC1-C706-0F49-92D6-E571CC5EEA8F}" type="slidenum">
-              <a:rPr lang="en-US"/>
+            <a:fld id="{180B7108-CC0A-463C-914D-8CE4064AE64C}" type="slidenum">
               <a:t>‹#›</a:t>
             </a:fld>
             <a:endParaRPr lang="en-US"/>
@@ -673,7 +707,7 @@
     </p:spTree>
     <p:extLst>
       <p:ext uri="{BB962C8B-B14F-4D97-AF65-F5344CB8AC3E}">
-        <p14:creationId xmlns:p14="http://schemas.microsoft.com/office/powerpoint/2010/main" val="1024086991"/>
+        <p14:creationId xmlns:p14="http://schemas.microsoft.com/office/powerpoint/2010/main" val="2228102104"/>
       </p:ext>
     </p:extLst>
   </p:cSld>
@@ -818,10 +852,9 @@
           <a:lstStyle/>
           <a:p>
             <a:r>
-              <a:rPr lang="en-US" dirty="0"/>
+              <a:rPr lang="en-US"/>
               <a:t>Database Knowledge Assistant — a grounded QA system for factory operations. Built on the Capstone Level 2 Factory Knowledge kit and extended with a text-to-SQL agent, six LLM providers, and a measured evaluation harness. Headline: 9 of 15 categories against a minimum of 5.</a:t>
             </a:r>
-            <a:endParaRPr lang="en-US" dirty="0"/>
           </a:p>
         </p:txBody>
       </p:sp>
@@ -906,10 +939,9 @@
           <a:lstStyle/>
           <a:p>
             <a:r>
-              <a:rPr lang="en-US" dirty="0"/>
+              <a:rPr lang="en-US"/>
               <a:t>Close on the live demo. Three questions that show three different behaviours: one answered from documents with a citation, one computed with SQL shown, and one refused because the answer does not exist. That third one is the whole thesis — a system that refuses is more useful than one that guesses. Remember to put the GitHub URL on this slide.</a:t>
             </a:r>
-            <a:endParaRPr lang="en-US" dirty="0"/>
           </a:p>
         </p:txBody>
       </p:sp>
@@ -994,10 +1026,9 @@
           <a:lstStyle/>
           <a:p>
             <a:r>
-              <a:rPr lang="en-US" dirty="0"/>
-              <a:t>Lead with this: the trainer asked us not to simply follow the provided example. The kit gives you RAG over documents. Our DBA-team member brought real SQL Server session telemetry and the questions that go with it - and those questions cannot be answered by retrieval at all. 'Which database used the most CPU' requires aggregating 2,372 rows — retrieval physically cannot do that. So we route: documents to RAG, telemetry to text-to-SQL. Each answer type gets the tool that can actually produce it.</a:t>
-            </a:r>
-            <a:endParaRPr lang="en-US" dirty="0"/>
+              <a:rPr lang="en-US"/>
+              <a:t>The key design insight. RAG is right for documented facts. But 'which database used the most CPU' requires aggregating 2,372 rows — retrieval physically cannot do that. So we route: documents to RAG, telemetry to text-to-SQL. Each answer type gets the tool that can actually produce it.</a:t>
+            </a:r>
           </a:p>
         </p:txBody>
       </p:sp>
@@ -1082,10 +1113,9 @@
           <a:lstStyle/>
           <a:p>
             <a:r>
-              <a:rPr lang="en-US" dirty="0"/>
+              <a:rPr lang="en-US"/>
               <a:t>A question hits the router, which picks the engine. RAG path: one of three specialists, each with its own isolated vector collection. SQL path: the telemetry agent. The critical detail is the guardrail — it is deterministic Python that runs BEFORE the LLM is called. If no chunk clears the score floor, we refuse. The model never gets the chance to invent.</a:t>
             </a:r>
-            <a:endParaRPr lang="en-US" dirty="0"/>
           </a:p>
         </p:txBody>
       </p:sp>
@@ -1170,10 +1200,17 @@
           <a:lstStyle/>
           <a:p>
             <a:r>
-              <a:rPr lang="en-US" dirty="0"/>
-              <a:t>Every design choice here is backed by a number. We built a 17-case golden set and benchmarked all four chunking strategies against all three retrievers. metadata_aware plus vector won at 0.93 MRR. Note the second finding: hybrid RRF is the textbook recommendation and it scored worse than plain vector on our corpus. We kept the result rather than hiding it.</a:t>
-            </a:r>
-            <a:endParaRPr lang="en-US" dirty="0"/>
+              <a:rPr lang="en-US"/>
+              <a:t>Every design choice here is backed by a number. We built a 17-case golden set and benchmarked all four chunking strategies against all three retrievers. </a:t>
+            </a:r>
+            <a:r>
+              <a:rPr lang="en-US" err="1"/>
+              <a:t>metadata_aware</a:t>
+            </a:r>
+            <a:r>
+              <a:rPr lang="en-US"/>
+              <a:t> plus vector won at 0.93 MRR. Note the second finding: hybrid RRF is the textbook recommendation and it scored worse than plain vector on our corpus. We kept the result rather than hiding it.</a:t>
+            </a:r>
           </a:p>
         </p:txBody>
       </p:sp>
@@ -1258,10 +1295,9 @@
           <a:lstStyle/>
           <a:p>
             <a:r>
-              <a:rPr lang="en-US" dirty="0"/>
+              <a:rPr lang="en-US"/>
               <a:t>This is the slide to linger on. We measured what grounded and adversarial questions actually score. The floor at 0.68 sits just above where fake questions top out. But be honest: the ranges overlap, so no threshold is perfect. Any floor trades false refusals against false answers. Demo: ask about alarm code Z-999, which does not exist, and watch it refuse.</a:t>
             </a:r>
-            <a:endParaRPr lang="en-US" dirty="0"/>
           </a:p>
         </p:txBody>
       </p:sp>
@@ -1346,10 +1382,9 @@
           <a:lstStyle/>
           <a:p>
             <a:r>
-              <a:rPr lang="en-US" dirty="0"/>
+              <a:rPr lang="en-US"/>
               <a:t>The telemetry agent. Natural language in, SQL out, and crucially the SQL is shown with every answer so any number can be verified. Read-only whitelist. And a real finding from testing: the small local model qwen2.5:3b fails one case by hallucinating a WHERE status='running' filter — right database, wrong number. That is why we route SQL to a stronger model and keep local models for RAG.</a:t>
             </a:r>
-            <a:endParaRPr lang="en-US" dirty="0"/>
           </a:p>
         </p:txBody>
       </p:sp>
@@ -1434,10 +1469,9 @@
           <a:lstStyle/>
           <a:p>
             <a:r>
-              <a:rPr lang="en-US" dirty="0"/>
+              <a:rPr lang="en-US"/>
               <a:t>Six providers behind one interface. The two highlighted are local — the system runs fully offline, which matters because factory documentation is confidential. Engineering detail worth mentioning: we fetch model lists live from each provider. A hardcoded list caused an HTTP 400 because it named models the account was not entitled to. Live discovery found 38 on Copilot and 73 on OpenAI.</a:t>
             </a:r>
-            <a:endParaRPr lang="en-US" dirty="0"/>
           </a:p>
         </p:txBody>
       </p:sp>
@@ -1522,10 +1556,9 @@
           <a:lstStyle/>
           <a:p>
             <a:r>
-              <a:rPr lang="en-US" dirty="0"/>
+              <a:rPr lang="en-US"/>
               <a:t>Nine of fifteen categories against a minimum of five. And one deliberate omission, stated up front: we do not claim Category 4. There is no LangGraph, no planning loop, no agent that takes actions. The router selects a persona. We would rather build the grounding properly and say so than bolt on a state machine we cannot defend.</a:t>
             </a:r>
-            <a:endParaRPr lang="en-US" dirty="0"/>
           </a:p>
         </p:txBody>
       </p:sp>
@@ -1610,10 +1643,9 @@
           <a:lstStyle/>
           <a:p>
             <a:r>
-              <a:rPr lang="en-US" dirty="0"/>
+              <a:rPr lang="en-US"/>
               <a:t>PLACEHOLDER — fill in each member's feature before presenting. Ten feature areas are listed in the README: RAG core, chunking, retrievers, evaluation harness, text-to-SQL agent, provider routing, UI and branding, session persistence, test suites, deployment. Whoever owns an area must be able to open those files and explain them.</a:t>
             </a:r>
-            <a:endParaRPr lang="en-US" dirty="0"/>
           </a:p>
         </p:txBody>
       </p:sp>
@@ -1686,6 +1718,11 @@
 <file path=ppt/slideMasters/slideMaster1.xml><?xml version="1.0" encoding="utf-8"?>
 <p:sldMaster xmlns:a="http://schemas.openxmlformats.org/drawingml/2006/main" xmlns:r="http://schemas.openxmlformats.org/officeDocument/2006/relationships" xmlns:p="http://schemas.openxmlformats.org/presentationml/2006/main">
   <p:cSld>
+    <p:bg>
+      <p:bgRef idx="1001">
+        <a:schemeClr val="bg1"/>
+      </p:bgRef>
+    </p:bg>
     <p:spTree>
       <p:nvGrpSpPr>
         <p:cNvPr id="1" name=""/>
@@ -1968,6 +2005,7 @@
         <a:solidFill>
           <a:srgbClr val="1D252D"/>
         </a:solidFill>
+        <a:effectLst/>
       </p:bgPr>
     </p:bg>
     <p:spTree>
@@ -1986,14 +2024,14 @@
       </p:grpSpPr>
       <p:pic>
         <p:nvPicPr>
-          <p:cNvPr id="2" name="Image 0" descr="C:\Users\Y0012TUB\Desktop\PLAYGROUNDS\5_Projects\AIMP_factory_knowledge\logo_sidebar.png">    </p:cNvPr>
+          <p:cNvPr id="2" name="Image 0" descr="C:\Users\Y0012TUB\Desktop\PLAYGROUNDS\5_Projects\AIMP_factory_knowledge\logo_sidebar.png"/>
           <p:cNvPicPr>
             <a:picLocks noChangeAspect="1"/>
           </p:cNvPicPr>
           <p:nvPr/>
         </p:nvPicPr>
         <p:blipFill>
-          <a:blip r:embed="rId1"/>
+          <a:blip r:embed="rId3"/>
           <a:stretch>
             <a:fillRect/>
           </a:stretch>
@@ -2016,57 +2054,30 @@
         </p:nvSpPr>
         <p:spPr>
           <a:xfrm>
-            <a:off x="502920" y="1371600"/>
-            <a:ext cx="6035040" cy="1554480"/>
-          </a:xfrm>
-          <a:prstGeom prst="rect">
-            <a:avLst/>
-          </a:prstGeom>
-          <a:noFill/>
-          <a:ln/>
-        </p:spPr>
-        <p:txBody>
-          <a:bodyPr wrap="square" lIns="0" tIns="0" rIns="0" bIns="0" rtlCol="0" anchor="ctr"/>
-          <a:lstStyle/>
-          <a:p>
-            <a:pPr indent="0" marL="0">
-              <a:lnSpc>
-                <a:spcPts val="4600"/>
-              </a:lnSpc>
-              <a:buNone/>
-            </a:pPr>
-            <a:r>
-              <a:rPr lang="en-US" sz="4200" b="1" dirty="0">
+            <a:off x="502920" y="1392766"/>
+            <a:ext cx="6811150" cy="1568591"/>
+          </a:xfrm>
+          <a:prstGeom prst="rect">
+            <a:avLst/>
+          </a:prstGeom>
+          <a:noFill/>
+          <a:ln/>
+        </p:spPr>
+        <p:txBody>
+          <a:bodyPr wrap="square" lIns="0" tIns="0" rIns="0" bIns="0" rtlCol="0" anchor="ctr"/>
+          <a:lstStyle/>
+          <a:p>
+            <a:r>
+              <a:rPr lang="en-US" sz="4200" b="1">
                 <a:solidFill>
                   <a:srgbClr val="FFFFFF"/>
                 </a:solidFill>
-                <a:latin typeface="Arial" pitchFamily="34" charset="0"/>
-                <a:ea typeface="Arial" pitchFamily="34" charset="-122"/>
-                <a:cs typeface="Arial" pitchFamily="34" charset="-120"/>
-              </a:rPr>
-              <a:t>Database Knowledge</a:t>
-            </a:r>
-            <a:endParaRPr lang="en-US" sz="4200" dirty="0"/>
-          </a:p>
-          <a:p>
-            <a:pPr indent="0" marL="0">
-              <a:lnSpc>
-                <a:spcPts val="4600"/>
-              </a:lnSpc>
-              <a:buNone/>
-            </a:pPr>
-            <a:r>
-              <a:rPr lang="en-US" sz="4200" b="1" dirty="0">
-                <a:solidFill>
-                  <a:srgbClr val="FFFFFF"/>
-                </a:solidFill>
-                <a:latin typeface="Arial" pitchFamily="34" charset="0"/>
-                <a:ea typeface="Arial" pitchFamily="34" charset="-122"/>
-                <a:cs typeface="Arial" pitchFamily="34" charset="-120"/>
-              </a:rPr>
-              <a:t>Assistant</a:t>
-            </a:r>
-            <a:endParaRPr lang="en-US" sz="4200" dirty="0"/>
+                <a:latin typeface="Arial"/>
+                <a:cs typeface="Arial"/>
+              </a:rPr>
+              <a:t>Manufacturing Knowledge &amp; Data Assistant</a:t>
+            </a:r>
+            <a:endParaRPr lang="en-US"/>
           </a:p>
         </p:txBody>
       </p:sp>
@@ -2078,51 +2089,66 @@
         </p:nvSpPr>
         <p:spPr>
           <a:xfrm>
-            <a:off x="502920" y="2880360"/>
-            <a:ext cx="5852160" cy="685800"/>
-          </a:xfrm>
-          <a:prstGeom prst="rect">
-            <a:avLst/>
-          </a:prstGeom>
-          <a:noFill/>
-          <a:ln/>
-        </p:spPr>
-        <p:txBody>
-          <a:bodyPr wrap="square" lIns="0" tIns="0" rIns="0" bIns="0" rtlCol="0" anchor="ctr"/>
-          <a:lstStyle/>
-          <a:p>
-            <a:pPr indent="0" marL="0">
-              <a:buNone/>
-            </a:pPr>
-            <a:r>
-              <a:rPr lang="en-US" sz="1500" dirty="0">
+            <a:off x="502920" y="2964281"/>
+            <a:ext cx="5822082" cy="691514"/>
+          </a:xfrm>
+          <a:prstGeom prst="rect">
+            <a:avLst/>
+          </a:prstGeom>
+          <a:noFill/>
+          <a:ln/>
+        </p:spPr>
+        <p:txBody>
+          <a:bodyPr wrap="square" lIns="0" tIns="0" rIns="0" bIns="0" rtlCol="0" anchor="ctr"/>
+          <a:lstStyle/>
+          <a:p>
+            <a:r>
+              <a:rPr lang="en-US" sz="1500">
                 <a:solidFill>
                   <a:srgbClr val="B9C0CA"/>
                 </a:solidFill>
-                <a:latin typeface="Arial" pitchFamily="34" charset="0"/>
-                <a:ea typeface="Arial" pitchFamily="34" charset="-122"/>
-                <a:cs typeface="Arial" pitchFamily="34" charset="-120"/>
-              </a:rPr>
-              <a:t>Database telemetry and operational docs — with citations,</a:t>
-            </a:r>
-            <a:endParaRPr lang="en-US" sz="1500" dirty="0"/>
-          </a:p>
-          <a:p>
-            <a:pPr indent="0" marL="0">
-              <a:buNone/>
-            </a:pPr>
-            <a:r>
-              <a:rPr lang="en-US" sz="1500" dirty="0">
+                <a:latin typeface="Arial"/>
+                <a:cs typeface="Arial"/>
+              </a:rPr>
+              <a:t>Cited factory document answers. </a:t>
+            </a:r>
+            <a:endParaRPr lang="en-US">
+              <a:solidFill>
+                <a:srgbClr val="000000"/>
+              </a:solidFill>
+              <a:latin typeface="Calibri" panose="020F0502020204030204"/>
+              <a:ea typeface="Calibri" panose="020F0502020204030204"/>
+              <a:cs typeface="Calibri" panose="020F0502020204030204"/>
+            </a:endParaRPr>
+          </a:p>
+          <a:p>
+            <a:r>
+              <a:rPr lang="en-US" sz="1500">
                 <a:solidFill>
                   <a:srgbClr val="B9C0CA"/>
                 </a:solidFill>
-                <a:latin typeface="Arial" pitchFamily="34" charset="0"/>
-                <a:ea typeface="Arial" pitchFamily="34" charset="-122"/>
-                <a:cs typeface="Arial" pitchFamily="34" charset="-120"/>
-              </a:rPr>
-              <a:t>verifiable SQL, and the honesty to refuse</a:t>
-            </a:r>
-            <a:endParaRPr lang="en-US" sz="1500" dirty="0"/>
+                <a:latin typeface="Arial"/>
+                <a:cs typeface="Arial"/>
+              </a:rPr>
+              <a:t>Verifiable telemetry data calculations. </a:t>
+            </a:r>
+          </a:p>
+          <a:p>
+            <a:r>
+              <a:rPr lang="en-US" sz="1500">
+                <a:solidFill>
+                  <a:srgbClr val="B9C0CA"/>
+                </a:solidFill>
+                <a:latin typeface="Arial"/>
+                <a:ea typeface="Calibri"/>
+                <a:cs typeface="Arial"/>
+              </a:rPr>
+              <a:t>Safe abstention.</a:t>
+            </a:r>
+            <a:endParaRPr lang="en-US">
+              <a:ea typeface="Calibri"/>
+              <a:cs typeface="Calibri"/>
+            </a:endParaRPr>
           </a:p>
         </p:txBody>
       </p:sp>
@@ -2147,11 +2173,11 @@
           <a:bodyPr wrap="square" lIns="0" tIns="0" rIns="0" bIns="0" rtlCol="0" anchor="ctr"/>
           <a:lstStyle/>
           <a:p>
-            <a:pPr indent="0" marL="0">
-              <a:buNone/>
-            </a:pPr>
-            <a:r>
-              <a:rPr lang="en-US" sz="1100" dirty="0">
+            <a:pPr marL="0" indent="0">
+              <a:buNone/>
+            </a:pPr>
+            <a:r>
+              <a:rPr lang="en-US" sz="1100">
                 <a:solidFill>
                   <a:srgbClr val="8A97A3"/>
                 </a:solidFill>
@@ -2161,7 +2187,7 @@
               </a:rPr>
               <a:t>Capstone Level 2  ·  AIMP  ·  ams OSRAM Backend Penang</a:t>
             </a:r>
-            <a:endParaRPr lang="en-US" sz="1100" dirty="0"/>
+            <a:endParaRPr lang="en-US" sz="1100"/>
           </a:p>
         </p:txBody>
       </p:sp>
@@ -2186,21 +2212,20 @@
           <a:bodyPr wrap="square" lIns="0" tIns="0" rIns="0" bIns="0" rtlCol="0" anchor="ctr"/>
           <a:lstStyle/>
           <a:p>
-            <a:pPr algn="r" indent="0" marL="0">
-              <a:buNone/>
-            </a:pPr>
-            <a:r>
-              <a:rPr lang="en-US" sz="3400" b="1" dirty="0">
+            <a:pPr marL="0" indent="0" algn="r">
+              <a:buNone/>
+            </a:pPr>
+            <a:r>
+              <a:rPr lang="en-US" sz="3400" b="1">
                 <a:solidFill>
                   <a:srgbClr val="FD5000"/>
                 </a:solidFill>
-                <a:latin typeface="Arial" pitchFamily="34" charset="0"/>
-                <a:ea typeface="Arial" pitchFamily="34" charset="-122"/>
-                <a:cs typeface="Arial" pitchFamily="34" charset="-120"/>
-              </a:rPr>
-              <a:t>9</a:t>
-            </a:r>
-            <a:endParaRPr lang="en-US" sz="3400" dirty="0"/>
+                <a:latin typeface="Arial"/>
+                <a:cs typeface="Arial"/>
+              </a:rPr>
+              <a:t>9/15</a:t>
+            </a:r>
+            <a:endParaRPr lang="en-US" sz="3400"/>
           </a:p>
         </p:txBody>
       </p:sp>
@@ -2225,21 +2250,18 @@
           <a:bodyPr wrap="square" lIns="0" tIns="0" rIns="0" bIns="0" rtlCol="0" anchor="ctr"/>
           <a:lstStyle/>
           <a:p>
-            <a:pPr algn="r" indent="0" marL="0">
-              <a:buNone/>
-            </a:pPr>
-            <a:r>
-              <a:rPr lang="en-US" sz="1100" dirty="0">
+            <a:pPr algn="r"/>
+            <a:r>
+              <a:rPr lang="en-US" sz="1100">
                 <a:solidFill>
                   <a:srgbClr val="8C95A1"/>
                 </a:solidFill>
-                <a:latin typeface="Arial" pitchFamily="34" charset="0"/>
-                <a:ea typeface="Arial" pitchFamily="34" charset="-122"/>
-                <a:cs typeface="Arial" pitchFamily="34" charset="-120"/>
-              </a:rPr>
-              <a:t>categories met</a:t>
-            </a:r>
-            <a:endParaRPr lang="en-US" sz="1100" dirty="0"/>
+                <a:latin typeface="Arial"/>
+                <a:cs typeface="Arial"/>
+              </a:rPr>
+              <a:t>requirements met</a:t>
+            </a:r>
+            <a:endParaRPr lang="en-US" sz="1100"/>
           </a:p>
         </p:txBody>
       </p:sp>
@@ -2264,11 +2286,11 @@
           <a:bodyPr wrap="square" lIns="0" tIns="0" rIns="0" bIns="0" rtlCol="0" anchor="ctr"/>
           <a:lstStyle/>
           <a:p>
-            <a:pPr algn="r" indent="0" marL="0">
-              <a:buNone/>
-            </a:pPr>
-            <a:r>
-              <a:rPr lang="en-US" sz="3400" b="1" dirty="0">
+            <a:pPr marL="0" indent="0" algn="r">
+              <a:buNone/>
+            </a:pPr>
+            <a:r>
+              <a:rPr lang="en-US" sz="3400" b="1">
                 <a:solidFill>
                   <a:srgbClr val="FD5000"/>
                 </a:solidFill>
@@ -2278,7 +2300,7 @@
               </a:rPr>
               <a:t>0.93</a:t>
             </a:r>
-            <a:endParaRPr lang="en-US" sz="3400" dirty="0"/>
+            <a:endParaRPr lang="en-US" sz="3400"/>
           </a:p>
         </p:txBody>
       </p:sp>
@@ -2303,21 +2325,24 @@
           <a:bodyPr wrap="square" lIns="0" tIns="0" rIns="0" bIns="0" rtlCol="0" anchor="ctr"/>
           <a:lstStyle/>
           <a:p>
-            <a:pPr algn="r" indent="0" marL="0">
-              <a:buNone/>
-            </a:pPr>
-            <a:r>
-              <a:rPr lang="en-US" sz="1100" dirty="0">
+            <a:pPr marL="0" indent="0" algn="r">
+              <a:buNone/>
+            </a:pPr>
+            <a:r>
+              <a:rPr lang="en-US" sz="1100">
                 <a:solidFill>
                   <a:srgbClr val="8C95A1"/>
                 </a:solidFill>
-                <a:latin typeface="Arial" pitchFamily="34" charset="0"/>
-                <a:ea typeface="Arial" pitchFamily="34" charset="-122"/>
-                <a:cs typeface="Arial" pitchFamily="34" charset="-120"/>
-              </a:rPr>
-              <a:t>retrieval MRR</a:t>
-            </a:r>
-            <a:endParaRPr lang="en-US" sz="1100" dirty="0"/>
+                <a:latin typeface="Arial"/>
+                <a:ea typeface="Arial" pitchFamily="34" charset="-122"/>
+                <a:cs typeface="Arial"/>
+              </a:rPr>
+              <a:t>best-config MRR</a:t>
+            </a:r>
+            <a:endParaRPr lang="en-US" sz="1100">
+              <a:latin typeface="Arial"/>
+              <a:cs typeface="Arial"/>
+            </a:endParaRPr>
           </a:p>
         </p:txBody>
       </p:sp>
@@ -2342,11 +2367,11 @@
           <a:bodyPr wrap="square" lIns="0" tIns="0" rIns="0" bIns="0" rtlCol="0" anchor="ctr"/>
           <a:lstStyle/>
           <a:p>
-            <a:pPr algn="r" indent="0" marL="0">
-              <a:buNone/>
-            </a:pPr>
-            <a:r>
-              <a:rPr lang="en-US" sz="3400" b="1" dirty="0">
+            <a:pPr marL="0" indent="0" algn="r">
+              <a:buNone/>
+            </a:pPr>
+            <a:r>
+              <a:rPr lang="en-US" sz="3400" b="1">
                 <a:solidFill>
                   <a:srgbClr val="FD5000"/>
                 </a:solidFill>
@@ -2356,7 +2381,7 @@
               </a:rPr>
               <a:t>44/44</a:t>
             </a:r>
-            <a:endParaRPr lang="en-US" sz="3400" dirty="0"/>
+            <a:endParaRPr lang="en-US" sz="3400"/>
           </a:p>
         </p:txBody>
       </p:sp>
@@ -2368,34 +2393,31 @@
         </p:nvSpPr>
         <p:spPr>
           <a:xfrm>
-            <a:off x="6720840" y="3538728"/>
-            <a:ext cx="1920240" cy="237744"/>
-          </a:xfrm>
-          <a:prstGeom prst="rect">
-            <a:avLst/>
-          </a:prstGeom>
-          <a:noFill/>
-          <a:ln/>
-        </p:spPr>
-        <p:txBody>
-          <a:bodyPr wrap="square" lIns="0" tIns="0" rIns="0" bIns="0" rtlCol="0" anchor="ctr"/>
-          <a:lstStyle/>
-          <a:p>
-            <a:pPr algn="r" indent="0" marL="0">
-              <a:buNone/>
-            </a:pPr>
-            <a:r>
-              <a:rPr lang="en-US" sz="1100" dirty="0">
+            <a:off x="6318674" y="3531673"/>
+            <a:ext cx="2322406" cy="258910"/>
+          </a:xfrm>
+          <a:prstGeom prst="rect">
+            <a:avLst/>
+          </a:prstGeom>
+          <a:noFill/>
+          <a:ln/>
+        </p:spPr>
+        <p:txBody>
+          <a:bodyPr wrap="square" lIns="0" tIns="0" rIns="0" bIns="0" rtlCol="0" anchor="ctr"/>
+          <a:lstStyle/>
+          <a:p>
+            <a:pPr algn="r"/>
+            <a:r>
+              <a:rPr lang="en-US" sz="1100">
                 <a:solidFill>
                   <a:srgbClr val="8C95A1"/>
                 </a:solidFill>
-                <a:latin typeface="Arial" pitchFamily="34" charset="0"/>
-                <a:ea typeface="Arial" pitchFamily="34" charset="-122"/>
-                <a:cs typeface="Arial" pitchFamily="34" charset="-120"/>
-              </a:rPr>
-              <a:t>tests passing</a:t>
-            </a:r>
-            <a:endParaRPr lang="en-US" sz="1100" dirty="0"/>
+                <a:latin typeface="Arial"/>
+                <a:cs typeface="Arial"/>
+              </a:rPr>
+              <a:t>deterministic SQL tests passed</a:t>
+            </a:r>
+            <a:endParaRPr lang="en-US"/>
           </a:p>
         </p:txBody>
       </p:sp>
@@ -2415,6 +2437,7 @@
         <a:solidFill>
           <a:srgbClr val="1D252D"/>
         </a:solidFill>
+        <a:effectLst/>
       </p:bgPr>
     </p:bg>
     <p:spTree>
@@ -2452,11 +2475,11 @@
           <a:bodyPr wrap="square" lIns="0" tIns="0" rIns="0" bIns="0" rtlCol="0" anchor="ctr"/>
           <a:lstStyle/>
           <a:p>
-            <a:pPr indent="0" marL="0">
-              <a:buNone/>
-            </a:pPr>
-            <a:r>
-              <a:rPr lang="en-US" sz="1100" b="1" spc="200" kern="0" dirty="0">
+            <a:pPr marL="0" indent="0">
+              <a:buNone/>
+            </a:pPr>
+            <a:r>
+              <a:rPr lang="en-US" sz="1100" b="1" kern="0" spc="200">
                 <a:solidFill>
                   <a:srgbClr val="FD5000"/>
                 </a:solidFill>
@@ -2466,7 +2489,7 @@
               </a:rPr>
               <a:t>DEMO</a:t>
             </a:r>
-            <a:endParaRPr lang="en-US" sz="1100" dirty="0"/>
+            <a:endParaRPr lang="en-US" sz="1100"/>
           </a:p>
         </p:txBody>
       </p:sp>
@@ -2491,14 +2514,14 @@
           <a:bodyPr wrap="square" lIns="0" tIns="0" rIns="0" bIns="0" rtlCol="0" anchor="ctr"/>
           <a:lstStyle/>
           <a:p>
-            <a:pPr indent="0" marL="0">
+            <a:pPr marL="0" indent="0">
               <a:lnSpc>
                 <a:spcPts val="3800"/>
               </a:lnSpc>
               <a:buNone/>
             </a:pPr>
             <a:r>
-              <a:rPr lang="en-US" sz="3400" b="1" dirty="0">
+              <a:rPr lang="en-US" sz="3400" b="1">
                 <a:solidFill>
                   <a:srgbClr val="FFFFFF"/>
                 </a:solidFill>
@@ -2508,17 +2531,17 @@
               </a:rPr>
               <a:t>Three questions,</a:t>
             </a:r>
-            <a:endParaRPr lang="en-US" sz="3400" dirty="0"/>
-          </a:p>
-          <a:p>
-            <a:pPr indent="0" marL="0">
+            <a:endParaRPr lang="en-US" sz="3400"/>
+          </a:p>
+          <a:p>
+            <a:pPr marL="0" indent="0">
               <a:lnSpc>
                 <a:spcPts val="3800"/>
               </a:lnSpc>
               <a:buNone/>
             </a:pPr>
             <a:r>
-              <a:rPr lang="en-US" sz="3400" b="1" dirty="0">
+              <a:rPr lang="en-US" sz="3400" b="1">
                 <a:solidFill>
                   <a:srgbClr val="FFFFFF"/>
                 </a:solidFill>
@@ -2528,7 +2551,7 @@
               </a:rPr>
               <a:t>three behaviours</a:t>
             </a:r>
-            <a:endParaRPr lang="en-US" sz="3400" dirty="0"/>
+            <a:endParaRPr lang="en-US" sz="3400"/>
           </a:p>
         </p:txBody>
       </p:sp>
@@ -2551,6 +2574,13 @@
           </a:solidFill>
           <a:ln/>
         </p:spPr>
+        <p:txBody>
+          <a:bodyPr/>
+          <a:lstStyle/>
+          <a:p>
+            <a:endParaRPr lang="en-US"/>
+          </a:p>
+        </p:txBody>
       </p:sp>
       <p:sp>
         <p:nvSpPr>
@@ -2573,11 +2603,11 @@
           <a:bodyPr wrap="square" lIns="0" tIns="0" rIns="0" bIns="0" rtlCol="0" anchor="ctr"/>
           <a:lstStyle/>
           <a:p>
-            <a:pPr algn="ctr" indent="0" marL="0">
-              <a:buNone/>
-            </a:pPr>
-            <a:r>
-              <a:rPr lang="en-US" sz="1300" b="1" dirty="0">
+            <a:pPr marL="0" indent="0" algn="ctr">
+              <a:buNone/>
+            </a:pPr>
+            <a:r>
+              <a:rPr lang="en-US" sz="1300" b="1">
                 <a:solidFill>
                   <a:srgbClr val="FFFFFF"/>
                 </a:solidFill>
@@ -2587,7 +2617,7 @@
               </a:rPr>
               <a:t>1</a:t>
             </a:r>
-            <a:endParaRPr lang="en-US" sz="1300" dirty="0"/>
+            <a:endParaRPr lang="en-US" sz="1300"/>
           </a:p>
         </p:txBody>
       </p:sp>
@@ -2612,11 +2642,11 @@
           <a:bodyPr wrap="square" lIns="0" tIns="0" rIns="0" bIns="0" rtlCol="0" anchor="ctr"/>
           <a:lstStyle/>
           <a:p>
-            <a:pPr indent="0" marL="0">
-              <a:buNone/>
-            </a:pPr>
-            <a:r>
-              <a:rPr lang="en-US" sz="1100" b="1" dirty="0">
+            <a:pPr marL="0" indent="0">
+              <a:buNone/>
+            </a:pPr>
+            <a:r>
+              <a:rPr lang="en-US" sz="1100" b="1">
                 <a:solidFill>
                   <a:srgbClr val="FD5000"/>
                 </a:solidFill>
@@ -2626,7 +2656,7 @@
               </a:rPr>
               <a:t>Documented</a:t>
             </a:r>
-            <a:endParaRPr lang="en-US" sz="1100" dirty="0"/>
+            <a:endParaRPr lang="en-US" sz="1100"/>
           </a:p>
         </p:txBody>
       </p:sp>
@@ -2651,11 +2681,11 @@
           <a:bodyPr wrap="square" lIns="0" tIns="0" rIns="0" bIns="0" rtlCol="0" anchor="ctr"/>
           <a:lstStyle/>
           <a:p>
-            <a:pPr indent="0" marL="0">
-              <a:buNone/>
-            </a:pPr>
-            <a:r>
-              <a:rPr lang="en-US" sz="1200" dirty="0">
+            <a:pPr marL="0" indent="0">
+              <a:buNone/>
+            </a:pPr>
+            <a:r>
+              <a:rPr lang="en-US" sz="1200">
                 <a:solidFill>
                   <a:srgbClr val="FFFFFF"/>
                 </a:solidFill>
@@ -2665,7 +2695,7 @@
               </a:rPr>
               <a:t>“What does alarm code E-204 mean?”</a:t>
             </a:r>
-            <a:endParaRPr lang="en-US" sz="1200" dirty="0"/>
+            <a:endParaRPr lang="en-US" sz="1200"/>
           </a:p>
         </p:txBody>
       </p:sp>
@@ -2690,11 +2720,11 @@
           <a:bodyPr wrap="square" lIns="0" tIns="0" rIns="0" bIns="0" rtlCol="0" anchor="ctr"/>
           <a:lstStyle/>
           <a:p>
-            <a:pPr indent="0" marL="0">
-              <a:buNone/>
-            </a:pPr>
-            <a:r>
-              <a:rPr lang="en-US" sz="1100" i="1" dirty="0">
+            <a:pPr marL="0" indent="0">
+              <a:buNone/>
+            </a:pPr>
+            <a:r>
+              <a:rPr lang="en-US" sz="1100" i="1">
                 <a:solidFill>
                   <a:srgbClr val="8C95A1"/>
                 </a:solidFill>
@@ -2704,7 +2734,7 @@
               </a:rPr>
               <a:t>answers with a citation</a:t>
             </a:r>
-            <a:endParaRPr lang="en-US" sz="1100" dirty="0"/>
+            <a:endParaRPr lang="en-US" sz="1100"/>
           </a:p>
         </p:txBody>
       </p:sp>
@@ -2727,6 +2757,13 @@
           </a:solidFill>
           <a:ln/>
         </p:spPr>
+        <p:txBody>
+          <a:bodyPr/>
+          <a:lstStyle/>
+          <a:p>
+            <a:endParaRPr lang="en-US"/>
+          </a:p>
+        </p:txBody>
       </p:sp>
       <p:sp>
         <p:nvSpPr>
@@ -2749,11 +2786,11 @@
           <a:bodyPr wrap="square" lIns="0" tIns="0" rIns="0" bIns="0" rtlCol="0" anchor="ctr"/>
           <a:lstStyle/>
           <a:p>
-            <a:pPr algn="ctr" indent="0" marL="0">
-              <a:buNone/>
-            </a:pPr>
-            <a:r>
-              <a:rPr lang="en-US" sz="1300" b="1" dirty="0">
+            <a:pPr marL="0" indent="0" algn="ctr">
+              <a:buNone/>
+            </a:pPr>
+            <a:r>
+              <a:rPr lang="en-US" sz="1300" b="1">
                 <a:solidFill>
                   <a:srgbClr val="FFFFFF"/>
                 </a:solidFill>
@@ -2763,7 +2800,7 @@
               </a:rPr>
               <a:t>2</a:t>
             </a:r>
-            <a:endParaRPr lang="en-US" sz="1300" dirty="0"/>
+            <a:endParaRPr lang="en-US" sz="1300"/>
           </a:p>
         </p:txBody>
       </p:sp>
@@ -2788,11 +2825,11 @@
           <a:bodyPr wrap="square" lIns="0" tIns="0" rIns="0" bIns="0" rtlCol="0" anchor="ctr"/>
           <a:lstStyle/>
           <a:p>
-            <a:pPr indent="0" marL="0">
-              <a:buNone/>
-            </a:pPr>
-            <a:r>
-              <a:rPr lang="en-US" sz="1100" b="1" dirty="0">
+            <a:pPr marL="0" indent="0">
+              <a:buNone/>
+            </a:pPr>
+            <a:r>
+              <a:rPr lang="en-US" sz="1100" b="1">
                 <a:solidFill>
                   <a:srgbClr val="FD5000"/>
                 </a:solidFill>
@@ -2802,7 +2839,7 @@
               </a:rPr>
               <a:t>Computed</a:t>
             </a:r>
-            <a:endParaRPr lang="en-US" sz="1100" dirty="0"/>
+            <a:endParaRPr lang="en-US" sz="1100"/>
           </a:p>
         </p:txBody>
       </p:sp>
@@ -2827,11 +2864,11 @@
           <a:bodyPr wrap="square" lIns="0" tIns="0" rIns="0" bIns="0" rtlCol="0" anchor="ctr"/>
           <a:lstStyle/>
           <a:p>
-            <a:pPr indent="0" marL="0">
-              <a:buNone/>
-            </a:pPr>
-            <a:r>
-              <a:rPr lang="en-US" sz="1200" dirty="0">
+            <a:pPr marL="0" indent="0">
+              <a:buNone/>
+            </a:pPr>
+            <a:r>
+              <a:rPr lang="en-US" sz="1200">
                 <a:solidFill>
                   <a:srgbClr val="FFFFFF"/>
                 </a:solidFill>
@@ -2841,7 +2878,7 @@
               </a:rPr>
               <a:t>“Which database used the most CPU?”</a:t>
             </a:r>
-            <a:endParaRPr lang="en-US" sz="1200" dirty="0"/>
+            <a:endParaRPr lang="en-US" sz="1200"/>
           </a:p>
         </p:txBody>
       </p:sp>
@@ -2866,11 +2903,11 @@
           <a:bodyPr wrap="square" lIns="0" tIns="0" rIns="0" bIns="0" rtlCol="0" anchor="ctr"/>
           <a:lstStyle/>
           <a:p>
-            <a:pPr indent="0" marL="0">
-              <a:buNone/>
-            </a:pPr>
-            <a:r>
-              <a:rPr lang="en-US" sz="1100" i="1" dirty="0">
+            <a:pPr marL="0" indent="0">
+              <a:buNone/>
+            </a:pPr>
+            <a:r>
+              <a:rPr lang="en-US" sz="1100" i="1">
                 <a:solidFill>
                   <a:srgbClr val="8C95A1"/>
                 </a:solidFill>
@@ -2880,7 +2917,7 @@
               </a:rPr>
               <a:t>answers with its SQL</a:t>
             </a:r>
-            <a:endParaRPr lang="en-US" sz="1100" dirty="0"/>
+            <a:endParaRPr lang="en-US" sz="1100"/>
           </a:p>
         </p:txBody>
       </p:sp>
@@ -2903,6 +2940,13 @@
           </a:solidFill>
           <a:ln/>
         </p:spPr>
+        <p:txBody>
+          <a:bodyPr/>
+          <a:lstStyle/>
+          <a:p>
+            <a:endParaRPr lang="en-US"/>
+          </a:p>
+        </p:txBody>
       </p:sp>
       <p:sp>
         <p:nvSpPr>
@@ -2925,11 +2969,11 @@
           <a:bodyPr wrap="square" lIns="0" tIns="0" rIns="0" bIns="0" rtlCol="0" anchor="ctr"/>
           <a:lstStyle/>
           <a:p>
-            <a:pPr algn="ctr" indent="0" marL="0">
-              <a:buNone/>
-            </a:pPr>
-            <a:r>
-              <a:rPr lang="en-US" sz="1300" b="1" dirty="0">
+            <a:pPr marL="0" indent="0" algn="ctr">
+              <a:buNone/>
+            </a:pPr>
+            <a:r>
+              <a:rPr lang="en-US" sz="1300" b="1">
                 <a:solidFill>
                   <a:srgbClr val="FFFFFF"/>
                 </a:solidFill>
@@ -2939,7 +2983,7 @@
               </a:rPr>
               <a:t>3</a:t>
             </a:r>
-            <a:endParaRPr lang="en-US" sz="1300" dirty="0"/>
+            <a:endParaRPr lang="en-US" sz="1300"/>
           </a:p>
         </p:txBody>
       </p:sp>
@@ -2964,11 +3008,11 @@
           <a:bodyPr wrap="square" lIns="0" tIns="0" rIns="0" bIns="0" rtlCol="0" anchor="ctr"/>
           <a:lstStyle/>
           <a:p>
-            <a:pPr indent="0" marL="0">
-              <a:buNone/>
-            </a:pPr>
-            <a:r>
-              <a:rPr lang="en-US" sz="1100" b="1" dirty="0">
+            <a:pPr marL="0" indent="0">
+              <a:buNone/>
+            </a:pPr>
+            <a:r>
+              <a:rPr lang="en-US" sz="1100" b="1">
                 <a:solidFill>
                   <a:srgbClr val="FD5000"/>
                 </a:solidFill>
@@ -2978,7 +3022,7 @@
               </a:rPr>
               <a:t>Unknowable</a:t>
             </a:r>
-            <a:endParaRPr lang="en-US" sz="1100" dirty="0"/>
+            <a:endParaRPr lang="en-US" sz="1100"/>
           </a:p>
         </p:txBody>
       </p:sp>
@@ -3003,11 +3047,11 @@
           <a:bodyPr wrap="square" lIns="0" tIns="0" rIns="0" bIns="0" rtlCol="0" anchor="ctr"/>
           <a:lstStyle/>
           <a:p>
-            <a:pPr indent="0" marL="0">
-              <a:buNone/>
-            </a:pPr>
-            <a:r>
-              <a:rPr lang="en-US" sz="1200" dirty="0">
+            <a:pPr marL="0" indent="0">
+              <a:buNone/>
+            </a:pPr>
+            <a:r>
+              <a:rPr lang="en-US" sz="1200">
                 <a:solidFill>
                   <a:srgbClr val="FFFFFF"/>
                 </a:solidFill>
@@ -3017,7 +3061,7 @@
               </a:rPr>
               <a:t>“What does alarm code Z-999 mean?”</a:t>
             </a:r>
-            <a:endParaRPr lang="en-US" sz="1200" dirty="0"/>
+            <a:endParaRPr lang="en-US" sz="1200"/>
           </a:p>
         </p:txBody>
       </p:sp>
@@ -3042,11 +3086,11 @@
           <a:bodyPr wrap="square" lIns="0" tIns="0" rIns="0" bIns="0" rtlCol="0" anchor="ctr"/>
           <a:lstStyle/>
           <a:p>
-            <a:pPr indent="0" marL="0">
-              <a:buNone/>
-            </a:pPr>
-            <a:r>
-              <a:rPr lang="en-US" sz="1100" i="1" dirty="0">
+            <a:pPr marL="0" indent="0">
+              <a:buNone/>
+            </a:pPr>
+            <a:r>
+              <a:rPr lang="en-US" sz="1100" i="1">
                 <a:solidFill>
                   <a:srgbClr val="8C95A1"/>
                 </a:solidFill>
@@ -3056,7 +3100,7 @@
               </a:rPr>
               <a:t>refuses</a:t>
             </a:r>
-            <a:endParaRPr lang="en-US" sz="1100" dirty="0"/>
+            <a:endParaRPr lang="en-US" sz="1100"/>
           </a:p>
         </p:txBody>
       </p:sp>
@@ -3086,6 +3130,13 @@
             <a:prstDash val="solid"/>
           </a:ln>
         </p:spPr>
+        <p:txBody>
+          <a:bodyPr/>
+          <a:lstStyle/>
+          <a:p>
+            <a:endParaRPr lang="en-US"/>
+          </a:p>
+        </p:txBody>
       </p:sp>
       <p:sp>
         <p:nvSpPr>
@@ -3108,11 +3159,11 @@
           <a:bodyPr wrap="square" lIns="0" tIns="0" rIns="0" bIns="0" rtlCol="0" anchor="ctr"/>
           <a:lstStyle/>
           <a:p>
-            <a:pPr algn="ctr" indent="0" marL="0">
-              <a:buNone/>
-            </a:pPr>
-            <a:r>
-              <a:rPr lang="en-US" sz="1100" b="1" dirty="0">
+            <a:pPr marL="0" indent="0" algn="ctr">
+              <a:buNone/>
+            </a:pPr>
+            <a:r>
+              <a:rPr lang="en-US" sz="1100" b="1">
                 <a:solidFill>
                   <a:srgbClr val="FD5000"/>
                 </a:solidFill>
@@ -3122,7 +3173,7 @@
               </a:rPr>
               <a:t>The point</a:t>
             </a:r>
-            <a:endParaRPr lang="en-US" sz="1100" dirty="0"/>
+            <a:endParaRPr lang="en-US" sz="1100"/>
           </a:p>
         </p:txBody>
       </p:sp>
@@ -3147,11 +3198,11 @@
           <a:bodyPr wrap="square" lIns="0" tIns="0" rIns="0" bIns="0" rtlCol="0" anchor="ctr"/>
           <a:lstStyle/>
           <a:p>
-            <a:pPr algn="ctr" indent="0" marL="0">
-              <a:buNone/>
-            </a:pPr>
-            <a:r>
-              <a:rPr lang="en-US" sz="1300" dirty="0">
+            <a:pPr marL="0" indent="0" algn="ctr">
+              <a:buNone/>
+            </a:pPr>
+            <a:r>
+              <a:rPr lang="en-US" sz="1300">
                 <a:solidFill>
                   <a:srgbClr val="FFFFFF"/>
                 </a:solidFill>
@@ -3161,14 +3212,14 @@
               </a:rPr>
               <a:t>A system that</a:t>
             </a:r>
-            <a:endParaRPr lang="en-US" sz="1300" dirty="0"/>
-          </a:p>
-          <a:p>
-            <a:pPr algn="ctr" indent="0" marL="0">
-              <a:buNone/>
-            </a:pPr>
-            <a:r>
-              <a:rPr lang="en-US" sz="1300" dirty="0">
+            <a:endParaRPr lang="en-US" sz="1300"/>
+          </a:p>
+          <a:p>
+            <a:pPr marL="0" indent="0" algn="ctr">
+              <a:buNone/>
+            </a:pPr>
+            <a:r>
+              <a:rPr lang="en-US" sz="1300">
                 <a:solidFill>
                   <a:srgbClr val="FFFFFF"/>
                 </a:solidFill>
@@ -3178,14 +3229,14 @@
               </a:rPr>
               <a:t>refuses is more</a:t>
             </a:r>
-            <a:endParaRPr lang="en-US" sz="1300" dirty="0"/>
-          </a:p>
-          <a:p>
-            <a:pPr algn="ctr" indent="0" marL="0">
-              <a:buNone/>
-            </a:pPr>
-            <a:r>
-              <a:rPr lang="en-US" sz="1300" dirty="0">
+            <a:endParaRPr lang="en-US" sz="1300"/>
+          </a:p>
+          <a:p>
+            <a:pPr marL="0" indent="0" algn="ctr">
+              <a:buNone/>
+            </a:pPr>
+            <a:r>
+              <a:rPr lang="en-US" sz="1300">
                 <a:solidFill>
                   <a:srgbClr val="FFFFFF"/>
                 </a:solidFill>
@@ -3195,14 +3246,14 @@
               </a:rPr>
               <a:t>useful than one</a:t>
             </a:r>
-            <a:endParaRPr lang="en-US" sz="1300" dirty="0"/>
-          </a:p>
-          <a:p>
-            <a:pPr algn="ctr" indent="0" marL="0">
-              <a:buNone/>
-            </a:pPr>
-            <a:r>
-              <a:rPr lang="en-US" sz="1300" dirty="0">
+            <a:endParaRPr lang="en-US" sz="1300"/>
+          </a:p>
+          <a:p>
+            <a:pPr marL="0" indent="0" algn="ctr">
+              <a:buNone/>
+            </a:pPr>
+            <a:r>
+              <a:rPr lang="en-US" sz="1300">
                 <a:solidFill>
                   <a:srgbClr val="FFFFFF"/>
                 </a:solidFill>
@@ -3212,7 +3263,7 @@
               </a:rPr>
               <a:t>that guesses.</a:t>
             </a:r>
-            <a:endParaRPr lang="en-US" sz="1300" dirty="0"/>
+            <a:endParaRPr lang="en-US" sz="1300"/>
           </a:p>
         </p:txBody>
       </p:sp>
@@ -3237,21 +3288,22 @@
           <a:bodyPr wrap="square" lIns="0" tIns="0" rIns="0" bIns="0" rtlCol="0" anchor="ctr"/>
           <a:lstStyle/>
           <a:p>
-            <a:pPr indent="0" marL="0">
-              <a:buNone/>
-            </a:pPr>
-            <a:r>
-              <a:rPr lang="en-US" sz="1050" dirty="0">
+            <a:r>
+              <a:rPr lang="en-US" sz="1050">
                 <a:solidFill>
                   <a:srgbClr val="46555F"/>
                 </a:solidFill>
-                <a:latin typeface="Arial" pitchFamily="34" charset="0"/>
-                <a:ea typeface="Arial" pitchFamily="34" charset="-122"/>
-                <a:cs typeface="Arial" pitchFamily="34" charset="-120"/>
-              </a:rPr>
-              <a:t>github.com/  —  add repository URL before presenting</a:t>
-            </a:r>
-            <a:endParaRPr lang="en-US" sz="1050" dirty="0"/>
+                <a:latin typeface="Arial"/>
+                <a:ea typeface="+mn-lt"/>
+                <a:cs typeface="Arial"/>
+                <a:hlinkClick r:id="rId3"/>
+              </a:rPr>
+              <a:t>Repository URL</a:t>
+            </a:r>
+            <a:endParaRPr lang="en-US" sz="1050">
+              <a:ea typeface="Calibri"/>
+              <a:cs typeface="Calibri"/>
+            </a:endParaRPr>
           </a:p>
         </p:txBody>
       </p:sp>
@@ -3301,11 +3353,11 @@
           <a:bodyPr wrap="square" lIns="0" tIns="0" rIns="0" bIns="0" rtlCol="0" anchor="ctr"/>
           <a:lstStyle/>
           <a:p>
-            <a:pPr indent="0" marL="0">
-              <a:buNone/>
-            </a:pPr>
-            <a:r>
-              <a:rPr lang="en-US" sz="1100" b="1" spc="200" kern="0" dirty="0">
+            <a:pPr marL="0" indent="0">
+              <a:buNone/>
+            </a:pPr>
+            <a:r>
+              <a:rPr lang="en-US" sz="1100" b="1" kern="0" spc="200">
                 <a:solidFill>
                   <a:srgbClr val="FD5000"/>
                 </a:solidFill>
@@ -3313,9 +3365,9 @@
                 <a:ea typeface="Arial" pitchFamily="34" charset="-122"/>
                 <a:cs typeface="Arial" pitchFamily="34" charset="-120"/>
               </a:rPr>
-              <a:t>WHAT WE BUILT</a:t>
-            </a:r>
-            <a:endParaRPr lang="en-US" sz="1100" dirty="0"/>
+              <a:t>THE PROBLEM</a:t>
+            </a:r>
+            <a:endParaRPr lang="en-US" sz="1100"/>
           </a:p>
         </p:txBody>
       </p:sp>
@@ -3340,11 +3392,11 @@
           <a:bodyPr wrap="square" lIns="0" tIns="0" rIns="0" bIns="0" rtlCol="0" anchor="ctr"/>
           <a:lstStyle/>
           <a:p>
-            <a:pPr indent="0" marL="0">
-              <a:buNone/>
-            </a:pPr>
-            <a:r>
-              <a:rPr lang="en-US" sz="3000" b="1" dirty="0">
+            <a:pPr marL="0" indent="0">
+              <a:buNone/>
+            </a:pPr>
+            <a:r>
+              <a:rPr lang="en-US" sz="3000" b="1">
                 <a:solidFill>
                   <a:srgbClr val="1D252D"/>
                 </a:solidFill>
@@ -3352,9 +3404,9 @@
                 <a:ea typeface="Arial" pitchFamily="34" charset="-122"/>
                 <a:cs typeface="Arial" pitchFamily="34" charset="-120"/>
               </a:rPr>
-              <a:t>We added a second engine</a:t>
-            </a:r>
-            <a:endParaRPr lang="en-US" sz="3000" dirty="0"/>
+              <a:t>Two questions, two engines</a:t>
+            </a:r>
+            <a:endParaRPr lang="en-US" sz="3000"/>
           </a:p>
         </p:txBody>
       </p:sp>
@@ -3379,21 +3431,17 @@
           <a:bodyPr wrap="square" lIns="0" tIns="0" rIns="0" bIns="0" rtlCol="0" anchor="ctr"/>
           <a:lstStyle/>
           <a:p>
-            <a:pPr indent="0" marL="0">
-              <a:buNone/>
-            </a:pPr>
-            <a:r>
-              <a:rPr lang="en-US" sz="1300" dirty="0">
+            <a:r>
+              <a:rPr lang="en-US" sz="1300">
                 <a:solidFill>
                   <a:srgbClr val="46555F"/>
                 </a:solidFill>
-                <a:latin typeface="Arial" pitchFamily="34" charset="0"/>
-                <a:ea typeface="Arial" pitchFamily="34" charset="-122"/>
-                <a:cs typeface="Arial" pitchFamily="34" charset="-120"/>
-              </a:rPr>
-              <a:t>The starter kit does RAG over documents. Our DBA teammate brought real session telemetry — and questions RAG physically cannot answer.</a:t>
-            </a:r>
-            <a:endParaRPr lang="en-US" sz="1300" dirty="0"/>
+                <a:latin typeface="Arial"/>
+                <a:cs typeface="Arial"/>
+              </a:rPr>
+              <a:t>A technician may ask two fundamentally different kinds of questions: </a:t>
+            </a:r>
+            <a:endParaRPr lang="en-US"/>
           </a:p>
         </p:txBody>
       </p:sp>
@@ -3406,6 +3454,160 @@
         <p:spPr>
           <a:xfrm>
             <a:off x="502920" y="1691640"/>
+            <a:ext cx="3931920" cy="2514600"/>
+          </a:xfrm>
+          <a:prstGeom prst="roundRect">
+            <a:avLst>
+              <a:gd name="adj" fmla="val 2182"/>
+            </a:avLst>
+          </a:prstGeom>
+          <a:solidFill>
+            <a:srgbClr val="FDF6F1"/>
+          </a:solidFill>
+          <a:ln w="12700">
+            <a:solidFill>
+              <a:srgbClr val="FDF6F1"/>
+            </a:solidFill>
+            <a:prstDash val="solid"/>
+          </a:ln>
+        </p:spPr>
+        <p:txBody>
+          <a:bodyPr/>
+          <a:lstStyle/>
+          <a:p>
+            <a:endParaRPr lang="en-US"/>
+          </a:p>
+        </p:txBody>
+      </p:sp>
+      <p:sp>
+        <p:nvSpPr>
+          <p:cNvPr id="6" name="Text 4"/>
+          <p:cNvSpPr/>
+          <p:nvPr/>
+        </p:nvSpPr>
+        <p:spPr>
+          <a:xfrm>
+            <a:off x="777240" y="1920240"/>
+            <a:ext cx="3383280" cy="640080"/>
+          </a:xfrm>
+          <a:prstGeom prst="rect">
+            <a:avLst/>
+          </a:prstGeom>
+          <a:noFill/>
+          <a:ln/>
+        </p:spPr>
+        <p:txBody>
+          <a:bodyPr wrap="square" lIns="0" tIns="0" rIns="0" bIns="0" rtlCol="0" anchor="ctr"/>
+          <a:lstStyle/>
+          <a:p>
+            <a:pPr marL="0" indent="0">
+              <a:buNone/>
+            </a:pPr>
+            <a:r>
+              <a:rPr lang="en-US" sz="1600" b="1">
+                <a:solidFill>
+                  <a:srgbClr val="1D252D"/>
+                </a:solidFill>
+                <a:latin typeface="Arial" pitchFamily="34" charset="0"/>
+                <a:ea typeface="Arial" pitchFamily="34" charset="-122"/>
+                <a:cs typeface="Arial" pitchFamily="34" charset="-120"/>
+              </a:rPr>
+              <a:t>“What does alarm code E-204 mean?”</a:t>
+            </a:r>
+            <a:endParaRPr lang="en-US" sz="1600"/>
+          </a:p>
+        </p:txBody>
+      </p:sp>
+      <p:sp>
+        <p:nvSpPr>
+          <p:cNvPr id="7" name="Text 5"/>
+          <p:cNvSpPr/>
+          <p:nvPr/>
+        </p:nvSpPr>
+        <p:spPr>
+          <a:xfrm>
+            <a:off x="777240" y="2697480"/>
+            <a:ext cx="3383280" cy="274320"/>
+          </a:xfrm>
+          <a:prstGeom prst="rect">
+            <a:avLst/>
+          </a:prstGeom>
+          <a:noFill/>
+          <a:ln/>
+        </p:spPr>
+        <p:txBody>
+          <a:bodyPr wrap="square" lIns="0" tIns="0" rIns="0" bIns="0" rtlCol="0" anchor="ctr"/>
+          <a:lstStyle/>
+          <a:p>
+            <a:pPr marL="0" indent="0">
+              <a:buNone/>
+            </a:pPr>
+            <a:r>
+              <a:rPr lang="en-US" sz="1200" b="1">
+                <a:solidFill>
+                  <a:srgbClr val="FD5000"/>
+                </a:solidFill>
+                <a:latin typeface="Arial"/>
+                <a:ea typeface="Arial" pitchFamily="34" charset="-122"/>
+                <a:cs typeface="Arial"/>
+              </a:rPr>
+              <a:t>RAG over factory documents</a:t>
+            </a:r>
+            <a:endParaRPr lang="en-US" sz="1200">
+              <a:latin typeface="Arial"/>
+              <a:cs typeface="Arial"/>
+            </a:endParaRPr>
+          </a:p>
+        </p:txBody>
+      </p:sp>
+      <p:sp>
+        <p:nvSpPr>
+          <p:cNvPr id="8" name="Text 6"/>
+          <p:cNvSpPr/>
+          <p:nvPr/>
+        </p:nvSpPr>
+        <p:spPr>
+          <a:xfrm>
+            <a:off x="777240" y="3035808"/>
+            <a:ext cx="3383280" cy="822960"/>
+          </a:xfrm>
+          <a:prstGeom prst="rect">
+            <a:avLst/>
+          </a:prstGeom>
+          <a:noFill/>
+          <a:ln/>
+        </p:spPr>
+        <p:txBody>
+          <a:bodyPr wrap="square" lIns="0" tIns="0" rIns="0" bIns="0" rtlCol="0" anchor="ctr"/>
+          <a:lstStyle/>
+          <a:p>
+            <a:pPr marL="0" indent="0">
+              <a:buNone/>
+            </a:pPr>
+            <a:r>
+              <a:rPr lang="en-US" sz="1200">
+                <a:solidFill>
+                  <a:srgbClr val="46555F"/>
+                </a:solidFill>
+                <a:latin typeface="Arial" pitchFamily="34" charset="0"/>
+                <a:ea typeface="Arial" pitchFamily="34" charset="-122"/>
+                <a:cs typeface="Arial" pitchFamily="34" charset="-120"/>
+              </a:rPr>
+              <a:t>The answer is written down. Find it, quote it, cite the page.</a:t>
+            </a:r>
+            <a:endParaRPr lang="en-US" sz="1200"/>
+          </a:p>
+        </p:txBody>
+      </p:sp>
+      <p:sp>
+        <p:nvSpPr>
+          <p:cNvPr id="9" name="Shape 7"/>
+          <p:cNvSpPr/>
+          <p:nvPr/>
+        </p:nvSpPr>
+        <p:spPr>
+          <a:xfrm>
+            <a:off x="4709160" y="1691640"/>
             <a:ext cx="3931920" cy="2514600"/>
           </a:xfrm>
           <a:prstGeom prst="roundRect">
@@ -3423,150 +3625,13 @@
             <a:prstDash val="solid"/>
           </a:ln>
         </p:spPr>
-      </p:sp>
-      <p:sp>
-        <p:nvSpPr>
-          <p:cNvPr id="6" name="Text 4"/>
-          <p:cNvSpPr/>
-          <p:nvPr/>
-        </p:nvSpPr>
-        <p:spPr>
-          <a:xfrm>
-            <a:off x="777240" y="1920240"/>
-            <a:ext cx="3383280" cy="640080"/>
-          </a:xfrm>
-          <a:prstGeom prst="rect">
-            <a:avLst/>
-          </a:prstGeom>
-          <a:noFill/>
-          <a:ln/>
-        </p:spPr>
-        <p:txBody>
-          <a:bodyPr wrap="square" lIns="0" tIns="0" rIns="0" bIns="0" rtlCol="0" anchor="ctr"/>
-          <a:lstStyle/>
-          <a:p>
-            <a:pPr indent="0" marL="0">
-              <a:buNone/>
-            </a:pPr>
-            <a:r>
-              <a:rPr lang="en-US" sz="1600" b="1" dirty="0">
-                <a:solidFill>
-                  <a:srgbClr val="FFFFFF"/>
-                </a:solidFill>
-                <a:latin typeface="Arial" pitchFamily="34" charset="0"/>
-                <a:ea typeface="Arial" pitchFamily="34" charset="-122"/>
-                <a:cs typeface="Arial" pitchFamily="34" charset="-120"/>
-              </a:rPr>
-              <a:t>“Which database used the most CPU?”</a:t>
-            </a:r>
-            <a:endParaRPr lang="en-US" sz="1600" dirty="0"/>
-          </a:p>
-        </p:txBody>
-      </p:sp>
-      <p:sp>
-        <p:nvSpPr>
-          <p:cNvPr id="7" name="Text 5"/>
-          <p:cNvSpPr/>
-          <p:nvPr/>
-        </p:nvSpPr>
-        <p:spPr>
-          <a:xfrm>
-            <a:off x="777240" y="2697480"/>
-            <a:ext cx="3383280" cy="274320"/>
-          </a:xfrm>
-          <a:prstGeom prst="rect">
-            <a:avLst/>
-          </a:prstGeom>
-          <a:noFill/>
-          <a:ln/>
-        </p:spPr>
-        <p:txBody>
-          <a:bodyPr wrap="square" lIns="0" tIns="0" rIns="0" bIns="0" rtlCol="0" anchor="ctr"/>
-          <a:lstStyle/>
-          <a:p>
-            <a:pPr indent="0" marL="0">
-              <a:buNone/>
-            </a:pPr>
-            <a:r>
-              <a:rPr lang="en-US" sz="1200" b="1" dirty="0">
-                <a:solidFill>
-                  <a:srgbClr val="FD5000"/>
-                </a:solidFill>
-                <a:latin typeface="Arial" pitchFamily="34" charset="0"/>
-                <a:ea typeface="Arial" pitchFamily="34" charset="-122"/>
-                <a:cs typeface="Arial" pitchFamily="34" charset="-120"/>
-              </a:rPr>
-              <a:t>Text-to-SQL over telemetry  —  our extension</a:t>
-            </a:r>
-            <a:endParaRPr lang="en-US" sz="1200" dirty="0"/>
-          </a:p>
-        </p:txBody>
-      </p:sp>
-      <p:sp>
-        <p:nvSpPr>
-          <p:cNvPr id="8" name="Text 6"/>
-          <p:cNvSpPr/>
-          <p:nvPr/>
-        </p:nvSpPr>
-        <p:spPr>
-          <a:xfrm>
-            <a:off x="777240" y="3035808"/>
-            <a:ext cx="3383280" cy="822960"/>
-          </a:xfrm>
-          <a:prstGeom prst="rect">
-            <a:avLst/>
-          </a:prstGeom>
-          <a:noFill/>
-          <a:ln/>
-        </p:spPr>
-        <p:txBody>
-          <a:bodyPr wrap="square" lIns="0" tIns="0" rIns="0" bIns="0" rtlCol="0" anchor="ctr"/>
-          <a:lstStyle/>
-          <a:p>
-            <a:pPr indent="0" marL="0">
-              <a:buNone/>
-            </a:pPr>
-            <a:r>
-              <a:rPr lang="en-US" sz="1200" dirty="0">
-                <a:solidFill>
-                  <a:srgbClr val="B9C0CA"/>
-                </a:solidFill>
-                <a:latin typeface="Arial" pitchFamily="34" charset="0"/>
-                <a:ea typeface="Arial" pitchFamily="34" charset="-122"/>
-                <a:cs typeface="Arial" pitchFamily="34" charset="-120"/>
-              </a:rPr>
-              <a:t>No document contains this. It must be computed across 2,372 rows.</a:t>
-            </a:r>
-            <a:endParaRPr lang="en-US" sz="1200" dirty="0"/>
-          </a:p>
-        </p:txBody>
-      </p:sp>
-      <p:sp>
-        <p:nvSpPr>
-          <p:cNvPr id="9" name="Shape 7"/>
-          <p:cNvSpPr/>
-          <p:nvPr/>
-        </p:nvSpPr>
-        <p:spPr>
-          <a:xfrm>
-            <a:off x="4709160" y="1691640"/>
-            <a:ext cx="3931920" cy="2514600"/>
-          </a:xfrm>
-          <a:prstGeom prst="roundRect">
-            <a:avLst>
-              <a:gd name="adj" fmla="val 2182"/>
-            </a:avLst>
-          </a:prstGeom>
-          <a:solidFill>
-            <a:srgbClr val="FDF6F1"/>
-          </a:solidFill>
-          <a:ln w="12700">
-            <a:solidFill>
-              <a:srgbClr val="FDF6F1"/>
-            </a:solidFill>
-            <a:prstDash val="solid"/>
-          </a:ln>
-        </p:spPr>
+        <p:txBody>
+          <a:bodyPr/>
+          <a:lstStyle/>
+          <a:p>
+            <a:endParaRPr lang="en-US"/>
+          </a:p>
+        </p:txBody>
       </p:sp>
       <p:sp>
         <p:nvSpPr>
@@ -3589,21 +3654,21 @@
           <a:bodyPr wrap="square" lIns="0" tIns="0" rIns="0" bIns="0" rtlCol="0" anchor="ctr"/>
           <a:lstStyle/>
           <a:p>
-            <a:pPr indent="0" marL="0">
-              <a:buNone/>
-            </a:pPr>
-            <a:r>
-              <a:rPr lang="en-US" sz="1600" b="1" dirty="0">
-                <a:solidFill>
-                  <a:srgbClr val="1D252D"/>
-                </a:solidFill>
-                <a:latin typeface="Arial" pitchFamily="34" charset="0"/>
-                <a:ea typeface="Arial" pitchFamily="34" charset="-122"/>
-                <a:cs typeface="Arial" pitchFamily="34" charset="-120"/>
-              </a:rPr>
-              <a:t>“What does alarm code E-204 mean?”</a:t>
-            </a:r>
-            <a:endParaRPr lang="en-US" sz="1600" dirty="0"/>
+            <a:pPr marL="0" indent="0">
+              <a:buNone/>
+            </a:pPr>
+            <a:r>
+              <a:rPr lang="en-US" sz="1600" b="1">
+                <a:solidFill>
+                  <a:srgbClr val="FFFFFF"/>
+                </a:solidFill>
+                <a:latin typeface="Arial" pitchFamily="34" charset="0"/>
+                <a:ea typeface="Arial" pitchFamily="34" charset="-122"/>
+                <a:cs typeface="Arial" pitchFamily="34" charset="-120"/>
+              </a:rPr>
+              <a:t>“Which database used the most CPU?”</a:t>
+            </a:r>
+            <a:endParaRPr lang="en-US" sz="1600"/>
           </a:p>
         </p:txBody>
       </p:sp>
@@ -3628,11 +3693,11 @@
           <a:bodyPr wrap="square" lIns="0" tIns="0" rIns="0" bIns="0" rtlCol="0" anchor="ctr"/>
           <a:lstStyle/>
           <a:p>
-            <a:pPr indent="0" marL="0">
-              <a:buNone/>
-            </a:pPr>
-            <a:r>
-              <a:rPr lang="en-US" sz="1200" b="1" dirty="0">
+            <a:pPr marL="0" indent="0">
+              <a:buNone/>
+            </a:pPr>
+            <a:r>
+              <a:rPr lang="en-US" sz="1200" b="1">
                 <a:solidFill>
                   <a:srgbClr val="FD5000"/>
                 </a:solidFill>
@@ -3640,9 +3705,9 @@
                 <a:ea typeface="Arial" pitchFamily="34" charset="-122"/>
                 <a:cs typeface="Arial" pitchFamily="34" charset="-120"/>
               </a:rPr>
-              <a:t>RAG over documents  —  the kit baseline</a:t>
-            </a:r>
-            <a:endParaRPr lang="en-US" sz="1200" dirty="0"/>
+              <a:t>Text-to-SQL over telemetry</a:t>
+            </a:r>
+            <a:endParaRPr lang="en-US" sz="1200"/>
           </a:p>
         </p:txBody>
       </p:sp>
@@ -3667,60 +3732,72 @@
           <a:bodyPr wrap="square" lIns="0" tIns="0" rIns="0" bIns="0" rtlCol="0" anchor="ctr"/>
           <a:lstStyle/>
           <a:p>
-            <a:pPr indent="0" marL="0">
-              <a:buNone/>
-            </a:pPr>
-            <a:r>
-              <a:rPr lang="en-US" sz="1200" dirty="0">
+            <a:r>
+              <a:rPr lang="en-US" sz="1200">
+                <a:solidFill>
+                  <a:srgbClr val="B9C0CA"/>
+                </a:solidFill>
+                <a:latin typeface="Arial"/>
+                <a:cs typeface="Arial"/>
+              </a:rPr>
+              <a:t>The answer must be calculated across 2,372 SQL Server telemetry records.</a:t>
+            </a:r>
+            <a:endParaRPr lang="en-US" sz="1200">
+              <a:solidFill>
+                <a:srgbClr val="000000"/>
+              </a:solidFill>
+              <a:latin typeface="Calibri"/>
+              <a:ea typeface="Calibri"/>
+              <a:cs typeface="Calibri"/>
+            </a:endParaRPr>
+          </a:p>
+        </p:txBody>
+      </p:sp>
+      <p:sp>
+        <p:nvSpPr>
+          <p:cNvPr id="15" name="Text 27">
+            <a:extLst>
+              <a:ext uri="{FF2B5EF4-FFF2-40B4-BE49-F238E27FC236}">
+                <a16:creationId xmlns:a16="http://schemas.microsoft.com/office/drawing/2014/main" id="{4D3CC1A0-9E33-A449-60CE-230481A4FE6F}"/>
+              </a:ext>
+            </a:extLst>
+          </p:cNvPr>
+          <p:cNvSpPr/>
+          <p:nvPr/>
+        </p:nvSpPr>
+        <p:spPr>
+          <a:xfrm>
+            <a:off x="502920" y="4434840"/>
+            <a:ext cx="8138160" cy="274320"/>
+          </a:xfrm>
+          <a:prstGeom prst="rect">
+            <a:avLst/>
+          </a:prstGeom>
+          <a:noFill/>
+          <a:ln/>
+        </p:spPr>
+        <p:txBody>
+          <a:bodyPr wrap="square" lIns="0" tIns="0" rIns="0" bIns="0" rtlCol="0" anchor="ctr"/>
+          <a:lstStyle/>
+          <a:p>
+            <a:r>
+              <a:rPr lang="en-US" sz="1150" i="1">
                 <a:solidFill>
                   <a:srgbClr val="46555F"/>
                 </a:solidFill>
-                <a:latin typeface="Arial" pitchFamily="34" charset="0"/>
-                <a:ea typeface="Arial" pitchFamily="34" charset="-122"/>
-                <a:cs typeface="Arial" pitchFamily="34" charset="-120"/>
-              </a:rPr>
-              <a:t>The answer is written down. Find it, quote it, cite the source.</a:t>
-            </a:r>
-            <a:endParaRPr lang="en-US" sz="1200" dirty="0"/>
-          </a:p>
-        </p:txBody>
-      </p:sp>
-      <p:sp>
-        <p:nvSpPr>
-          <p:cNvPr id="13" name="Text 11"/>
-          <p:cNvSpPr/>
-          <p:nvPr/>
-        </p:nvSpPr>
-        <p:spPr>
-          <a:xfrm>
-            <a:off x="502920" y="4389120"/>
-            <a:ext cx="8138160" cy="320040"/>
-          </a:xfrm>
-          <a:prstGeom prst="rect">
-            <a:avLst/>
-          </a:prstGeom>
-          <a:noFill/>
-          <a:ln/>
-        </p:spPr>
-        <p:txBody>
-          <a:bodyPr wrap="square" lIns="0" tIns="0" rIns="0" bIns="0" rtlCol="0" anchor="ctr"/>
-          <a:lstStyle/>
-          <a:p>
-            <a:pPr indent="0" marL="0">
-              <a:buNone/>
-            </a:pPr>
-            <a:r>
-              <a:rPr lang="en-US" sz="1200" i="1" dirty="0">
-                <a:solidFill>
-                  <a:srgbClr val="1D252D"/>
-                </a:solidFill>
-                <a:latin typeface="Arial" pitchFamily="34" charset="0"/>
-                <a:ea typeface="Arial" pitchFamily="34" charset="-122"/>
-                <a:cs typeface="Arial" pitchFamily="34" charset="-120"/>
-              </a:rPr>
-              <a:t>Retrieval cannot SUM. Sending a spreadsheet question to RAG is how you get a confident wrong number.</a:t>
-            </a:r>
-            <a:endParaRPr lang="en-US" sz="1200" dirty="0"/>
+                <a:latin typeface="Arial"/>
+                <a:cs typeface="Arial"/>
+              </a:rPr>
+              <a:t>RAG retrieves documented knowledge. SQL calculates answers from structured data.</a:t>
+            </a:r>
+            <a:endParaRPr lang="en-US">
+              <a:solidFill>
+                <a:srgbClr val="000000"/>
+              </a:solidFill>
+              <a:latin typeface="Calibri" panose="020F0502020204030204"/>
+              <a:ea typeface="Calibri" panose="020F0502020204030204"/>
+              <a:cs typeface="Calibri" panose="020F0502020204030204"/>
+            </a:endParaRPr>
           </a:p>
         </p:txBody>
       </p:sp>
@@ -3770,11 +3847,11 @@
           <a:bodyPr wrap="square" lIns="0" tIns="0" rIns="0" bIns="0" rtlCol="0" anchor="ctr"/>
           <a:lstStyle/>
           <a:p>
-            <a:pPr indent="0" marL="0">
-              <a:buNone/>
-            </a:pPr>
-            <a:r>
-              <a:rPr lang="en-US" sz="1100" b="1" spc="200" kern="0" dirty="0">
+            <a:pPr marL="0" indent="0">
+              <a:buNone/>
+            </a:pPr>
+            <a:r>
+              <a:rPr lang="en-US" sz="1100" b="1" kern="0" spc="200">
                 <a:solidFill>
                   <a:srgbClr val="FD5000"/>
                 </a:solidFill>
@@ -3784,7 +3861,7 @@
               </a:rPr>
               <a:t>ARCHITECTURE</a:t>
             </a:r>
-            <a:endParaRPr lang="en-US" sz="1100" dirty="0"/>
+            <a:endParaRPr lang="en-US" sz="1100"/>
           </a:p>
         </p:txBody>
       </p:sp>
@@ -3809,11 +3886,11 @@
           <a:bodyPr wrap="square" lIns="0" tIns="0" rIns="0" bIns="0" rtlCol="0" anchor="ctr"/>
           <a:lstStyle/>
           <a:p>
-            <a:pPr indent="0" marL="0">
-              <a:buNone/>
-            </a:pPr>
-            <a:r>
-              <a:rPr lang="en-US" sz="3000" b="1" dirty="0">
+            <a:pPr marL="0" indent="0">
+              <a:buNone/>
+            </a:pPr>
+            <a:r>
+              <a:rPr lang="en-US" sz="3000" b="1">
                 <a:solidFill>
                   <a:srgbClr val="1D252D"/>
                 </a:solidFill>
@@ -3823,7 +3900,7 @@
               </a:rPr>
               <a:t>How a question flows</a:t>
             </a:r>
-            <a:endParaRPr lang="en-US" sz="3000" dirty="0"/>
+            <a:endParaRPr lang="en-US" sz="3000"/>
           </a:p>
         </p:txBody>
       </p:sp>
@@ -3835,7 +3912,7 @@
         </p:nvSpPr>
         <p:spPr>
           <a:xfrm>
-            <a:off x="502920" y="1600200"/>
+            <a:off x="502920" y="1931068"/>
             <a:ext cx="1600200" cy="566928"/>
           </a:xfrm>
           <a:prstGeom prst="roundRect">
@@ -3853,6 +3930,13 @@
             <a:prstDash val="solid"/>
           </a:ln>
         </p:spPr>
+        <p:txBody>
+          <a:bodyPr/>
+          <a:lstStyle/>
+          <a:p>
+            <a:endParaRPr lang="en-US"/>
+          </a:p>
+        </p:txBody>
       </p:sp>
       <p:sp>
         <p:nvSpPr>
@@ -3862,7 +3946,7 @@
         </p:nvSpPr>
         <p:spPr>
           <a:xfrm>
-            <a:off x="502920" y="1600200"/>
+            <a:off x="502920" y="1931068"/>
             <a:ext cx="1600200" cy="566928"/>
           </a:xfrm>
           <a:prstGeom prst="rect">
@@ -3875,11 +3959,11 @@
           <a:bodyPr wrap="square" lIns="0" tIns="0" rIns="0" bIns="0" rtlCol="0" anchor="ctr"/>
           <a:lstStyle/>
           <a:p>
-            <a:pPr algn="ctr" indent="0" marL="0">
-              <a:buNone/>
-            </a:pPr>
-            <a:r>
-              <a:rPr lang="en-US" sz="1200" b="1" dirty="0">
+            <a:pPr marL="0" indent="0" algn="ctr">
+              <a:buNone/>
+            </a:pPr>
+            <a:r>
+              <a:rPr lang="en-US" sz="1200" b="1">
                 <a:solidFill>
                   <a:srgbClr val="1D252D"/>
                 </a:solidFill>
@@ -3889,7 +3973,7 @@
               </a:rPr>
               <a:t>Question</a:t>
             </a:r>
-            <a:endParaRPr lang="en-US" sz="1200" dirty="0"/>
+            <a:endParaRPr lang="en-US" sz="1200"/>
           </a:p>
         </p:txBody>
       </p:sp>
@@ -3901,7 +3985,7 @@
         </p:nvSpPr>
         <p:spPr>
           <a:xfrm>
-            <a:off x="2468880" y="1600200"/>
+            <a:off x="2468880" y="1931068"/>
             <a:ext cx="1600200" cy="566928"/>
           </a:xfrm>
           <a:prstGeom prst="roundRect">
@@ -3919,6 +4003,13 @@
             <a:prstDash val="solid"/>
           </a:ln>
         </p:spPr>
+        <p:txBody>
+          <a:bodyPr/>
+          <a:lstStyle/>
+          <a:p>
+            <a:endParaRPr lang="en-US"/>
+          </a:p>
+        </p:txBody>
       </p:sp>
       <p:sp>
         <p:nvSpPr>
@@ -3928,7 +4019,7 @@
         </p:nvSpPr>
         <p:spPr>
           <a:xfrm>
-            <a:off x="2468880" y="1600200"/>
+            <a:off x="2468880" y="1931068"/>
             <a:ext cx="1600200" cy="566928"/>
           </a:xfrm>
           <a:prstGeom prst="rect">
@@ -3941,21 +4032,34 @@
           <a:bodyPr wrap="square" lIns="0" tIns="0" rIns="0" bIns="0" rtlCol="0" anchor="ctr"/>
           <a:lstStyle/>
           <a:p>
-            <a:pPr algn="ctr" indent="0" marL="0">
-              <a:buNone/>
-            </a:pPr>
-            <a:r>
-              <a:rPr lang="en-US" sz="1200" b="1" dirty="0">
+            <a:pPr algn="ctr"/>
+            <a:r>
+              <a:rPr lang="en-US" sz="1200" b="1">
                 <a:solidFill>
                   <a:srgbClr val="FFFFFF"/>
                 </a:solidFill>
-                <a:latin typeface="Arial" pitchFamily="34" charset="0"/>
-                <a:ea typeface="Arial" pitchFamily="34" charset="-122"/>
-                <a:cs typeface="Arial" pitchFamily="34" charset="-120"/>
-              </a:rPr>
-              <a:t>Router</a:t>
-            </a:r>
-            <a:endParaRPr lang="en-US" sz="1200" dirty="0"/>
+                <a:latin typeface="Arial"/>
+                <a:cs typeface="Arial"/>
+              </a:rPr>
+              <a:t>Engine Router</a:t>
+            </a:r>
+          </a:p>
+          <a:p>
+            <a:pPr algn="ctr"/>
+            <a:r>
+              <a:rPr lang="en-US" sz="1000" i="1">
+                <a:solidFill>
+                  <a:srgbClr val="FFFFFF"/>
+                </a:solidFill>
+                <a:latin typeface="Arial"/>
+                <a:cs typeface="Arial"/>
+              </a:rPr>
+              <a:t>Telemetry or document?</a:t>
+            </a:r>
+            <a:endParaRPr lang="en-US" sz="1000" i="1">
+              <a:ea typeface="Calibri"/>
+              <a:cs typeface="Calibri"/>
+            </a:endParaRPr>
           </a:p>
         </p:txBody>
       </p:sp>
@@ -3967,7 +4071,7 @@
         </p:nvSpPr>
         <p:spPr>
           <a:xfrm>
-            <a:off x="2103120" y="1883664"/>
+            <a:off x="2103120" y="2214532"/>
             <a:ext cx="365760" cy="0"/>
           </a:xfrm>
           <a:prstGeom prst="line">
@@ -3982,6 +4086,13 @@
             <a:tailEnd type="triangle"/>
           </a:ln>
         </p:spPr>
+        <p:txBody>
+          <a:bodyPr/>
+          <a:lstStyle/>
+          <a:p>
+            <a:endParaRPr lang="en-US"/>
+          </a:p>
+        </p:txBody>
       </p:sp>
       <p:sp>
         <p:nvSpPr>
@@ -3991,8 +4102,8 @@
         </p:nvSpPr>
         <p:spPr>
           <a:xfrm>
-            <a:off x="4434840" y="1188720"/>
-            <a:ext cx="3063240" cy="932688"/>
+            <a:off x="4434839" y="2301641"/>
+            <a:ext cx="3145957" cy="977806"/>
           </a:xfrm>
           <a:prstGeom prst="roundRect">
             <a:avLst>
@@ -4009,6 +4120,13 @@
             <a:prstDash val="solid"/>
           </a:ln>
         </p:spPr>
+        <p:txBody>
+          <a:bodyPr/>
+          <a:lstStyle/>
+          <a:p>
+            <a:endParaRPr lang="en-US"/>
+          </a:p>
+        </p:txBody>
       </p:sp>
       <p:sp>
         <p:nvSpPr>
@@ -4018,7 +4136,7 @@
         </p:nvSpPr>
         <p:spPr>
           <a:xfrm>
-            <a:off x="4636008" y="1298448"/>
+            <a:off x="4628488" y="2441448"/>
             <a:ext cx="2743200" cy="256032"/>
           </a:xfrm>
           <a:prstGeom prst="rect">
@@ -4031,21 +4149,34 @@
           <a:bodyPr wrap="square" lIns="0" tIns="0" rIns="0" bIns="0" rtlCol="0" anchor="ctr"/>
           <a:lstStyle/>
           <a:p>
-            <a:pPr indent="0" marL="0">
-              <a:buNone/>
-            </a:pPr>
-            <a:r>
-              <a:rPr lang="en-US" sz="1200" b="1" dirty="0">
+            <a:r>
+              <a:rPr lang="en-US" sz="1000" i="1">
                 <a:solidFill>
                   <a:srgbClr val="FD5000"/>
                 </a:solidFill>
-                <a:latin typeface="Arial" pitchFamily="34" charset="0"/>
-                <a:ea typeface="Arial" pitchFamily="34" charset="-122"/>
-                <a:cs typeface="Arial" pitchFamily="34" charset="-120"/>
-              </a:rPr>
-              <a:t>RAG  ·  3 specialists</a:t>
-            </a:r>
-            <a:endParaRPr lang="en-US" sz="1200" dirty="0"/>
+                <a:latin typeface="Arial"/>
+                <a:ea typeface="Arial" pitchFamily="34" charset="-122"/>
+                <a:cs typeface="Arial"/>
+              </a:rPr>
+              <a:t>If Document:</a:t>
+            </a:r>
+          </a:p>
+          <a:p>
+            <a:r>
+              <a:rPr lang="en-US" sz="1200" b="1">
+                <a:solidFill>
+                  <a:srgbClr val="FD5000"/>
+                </a:solidFill>
+                <a:latin typeface="Arial"/>
+                <a:ea typeface="Arial" pitchFamily="34" charset="-122"/>
+                <a:cs typeface="Arial"/>
+              </a:rPr>
+              <a:t>RAG  ·  Specialist Router</a:t>
+            </a:r>
+            <a:endParaRPr lang="en-US" sz="1200">
+              <a:ea typeface="Calibri"/>
+              <a:cs typeface="Calibri"/>
+            </a:endParaRPr>
           </a:p>
         </p:txBody>
       </p:sp>
@@ -4057,51 +4188,78 @@
         </p:nvSpPr>
         <p:spPr>
           <a:xfrm>
-            <a:off x="4636008" y="1572768"/>
-            <a:ext cx="2743200" cy="475488"/>
-          </a:xfrm>
-          <a:prstGeom prst="rect">
-            <a:avLst/>
-          </a:prstGeom>
-          <a:noFill/>
-          <a:ln/>
-        </p:spPr>
-        <p:txBody>
-          <a:bodyPr wrap="square" lIns="0" tIns="0" rIns="0" bIns="0" rtlCol="0" anchor="ctr"/>
-          <a:lstStyle/>
-          <a:p>
-            <a:pPr indent="0" marL="0">
-              <a:buNone/>
-            </a:pPr>
-            <a:r>
-              <a:rPr lang="en-US" sz="1050" dirty="0">
+            <a:off x="4628488" y="2700729"/>
+            <a:ext cx="2946232" cy="490527"/>
+          </a:xfrm>
+          <a:prstGeom prst="rect">
+            <a:avLst/>
+          </a:prstGeom>
+          <a:noFill/>
+          <a:ln/>
+        </p:spPr>
+        <p:txBody>
+          <a:bodyPr wrap="square" lIns="0" tIns="0" rIns="0" bIns="0" rtlCol="0" anchor="ctr"/>
+          <a:lstStyle/>
+          <a:p>
+            <a:r>
+              <a:rPr lang="en-US" sz="1050">
                 <a:solidFill>
                   <a:srgbClr val="46555F"/>
                 </a:solidFill>
-                <a:latin typeface="Arial" pitchFamily="34" charset="0"/>
-                <a:ea typeface="Arial" pitchFamily="34" charset="-122"/>
-                <a:cs typeface="Arial" pitchFamily="34" charset="-120"/>
+                <a:latin typeface="Arial"/>
+                <a:ea typeface="Arial" pitchFamily="34" charset="-122"/>
+                <a:cs typeface="Arial"/>
+              </a:rPr>
+              <a:t>3 specialists: </a:t>
+            </a:r>
+            <a:r>
+              <a:rPr lang="en-US" sz="1050" b="1">
+                <a:solidFill>
+                  <a:srgbClr val="46555F"/>
+                </a:solidFill>
+                <a:latin typeface="Arial"/>
+                <a:ea typeface="Arial" pitchFamily="34" charset="-122"/>
+                <a:cs typeface="Arial"/>
               </a:rPr>
               <a:t>Maintenance · Safety · Quality</a:t>
             </a:r>
-            <a:endParaRPr lang="en-US" sz="1050" dirty="0"/>
-          </a:p>
-          <a:p>
-            <a:pPr indent="0" marL="0">
-              <a:buNone/>
-            </a:pPr>
-            <a:r>
-              <a:rPr lang="en-US" sz="1050" dirty="0">
+            <a:endParaRPr lang="en-US" sz="1050" b="1">
+              <a:latin typeface="Arial"/>
+              <a:ea typeface="Calibri"/>
+              <a:cs typeface="Calibri"/>
+            </a:endParaRPr>
+          </a:p>
+          <a:p>
+            <a:r>
+              <a:rPr lang="en-US" sz="1050" err="1">
                 <a:solidFill>
                   <a:srgbClr val="46555F"/>
                 </a:solidFill>
-                <a:latin typeface="Arial" pitchFamily="34" charset="0"/>
-                <a:ea typeface="Arial" pitchFamily="34" charset="-122"/>
-                <a:cs typeface="Arial" pitchFamily="34" charset="-120"/>
-              </a:rPr>
-              <a:t>Chroma vector search + citations</a:t>
-            </a:r>
-            <a:endParaRPr lang="en-US" sz="1050" dirty="0"/>
+                <a:latin typeface="Arial"/>
+                <a:ea typeface="Arial" pitchFamily="34" charset="-122"/>
+                <a:cs typeface="Arial"/>
+              </a:rPr>
+              <a:t>ChromaDB</a:t>
+            </a:r>
+            <a:r>
+              <a:rPr lang="en-US" sz="1050">
+                <a:solidFill>
+                  <a:srgbClr val="46555F"/>
+                </a:solidFill>
+                <a:latin typeface="Arial"/>
+                <a:ea typeface="Arial" pitchFamily="34" charset="-122"/>
+                <a:cs typeface="Arial"/>
+              </a:rPr>
+              <a:t> vector retrieval · citations</a:t>
+            </a:r>
+            <a:endParaRPr lang="en-US" sz="1050">
+              <a:solidFill>
+                <a:srgbClr val="000000"/>
+              </a:solidFill>
+              <a:latin typeface="Arial"/>
+              <a:ea typeface="Calibri" panose="020F0502020204030204"/>
+              <a:cs typeface="Arial"/>
+            </a:endParaRPr>
           </a:p>
         </p:txBody>
       </p:sp>
@@ -4113,8 +4271,8 @@
         </p:nvSpPr>
         <p:spPr>
           <a:xfrm>
-            <a:off x="4434840" y="2331720"/>
-            <a:ext cx="3063240" cy="932688"/>
+            <a:off x="4449879" y="1173680"/>
+            <a:ext cx="3145957" cy="925169"/>
           </a:xfrm>
           <a:prstGeom prst="roundRect">
             <a:avLst>
@@ -4131,6 +4289,13 @@
             <a:prstDash val="solid"/>
           </a:ln>
         </p:spPr>
+        <p:txBody>
+          <a:bodyPr/>
+          <a:lstStyle/>
+          <a:p>
+            <a:endParaRPr lang="en-US"/>
+          </a:p>
+        </p:txBody>
       </p:sp>
       <p:sp>
         <p:nvSpPr>
@@ -4140,7 +4305,7 @@
         </p:nvSpPr>
         <p:spPr>
           <a:xfrm>
-            <a:off x="4636008" y="2441448"/>
+            <a:off x="4643528" y="1290928"/>
             <a:ext cx="2743200" cy="256032"/>
           </a:xfrm>
           <a:prstGeom prst="rect">
@@ -4153,21 +4318,46 @@
           <a:bodyPr wrap="square" lIns="0" tIns="0" rIns="0" bIns="0" rtlCol="0" anchor="ctr"/>
           <a:lstStyle/>
           <a:p>
-            <a:pPr indent="0" marL="0">
-              <a:buNone/>
-            </a:pPr>
-            <a:r>
-              <a:rPr lang="en-US" sz="1200" b="1" dirty="0">
+            <a:r>
+              <a:rPr lang="en-US" sz="1000" i="1">
                 <a:solidFill>
                   <a:srgbClr val="FD5000"/>
                 </a:solidFill>
-                <a:latin typeface="Arial" pitchFamily="34" charset="0"/>
-                <a:ea typeface="Arial" pitchFamily="34" charset="-122"/>
-                <a:cs typeface="Arial" pitchFamily="34" charset="-120"/>
-              </a:rPr>
-              <a:t>Text-to-SQL agent</a:t>
-            </a:r>
-            <a:endParaRPr lang="en-US" sz="1200" dirty="0"/>
+                <a:latin typeface="Arial"/>
+                <a:ea typeface="Arial" pitchFamily="34" charset="-122"/>
+                <a:cs typeface="Arial"/>
+              </a:rPr>
+              <a:t>If Telemetry:</a:t>
+            </a:r>
+            <a:endParaRPr lang="en-US" sz="1000" i="1">
+              <a:solidFill>
+                <a:srgbClr val="000000"/>
+              </a:solidFill>
+              <a:latin typeface="Arial"/>
+              <a:ea typeface="Arial" pitchFamily="34" charset="-122"/>
+              <a:cs typeface="Arial"/>
+            </a:endParaRPr>
+          </a:p>
+          <a:p>
+            <a:r>
+              <a:rPr lang="en-US" sz="1200" b="1">
+                <a:solidFill>
+                  <a:srgbClr val="FD5000"/>
+                </a:solidFill>
+                <a:latin typeface="Arial"/>
+                <a:ea typeface="Arial" pitchFamily="34" charset="-122"/>
+                <a:cs typeface="Arial"/>
+              </a:rPr>
+              <a:t>Text-to-SQL tool</a:t>
+            </a:r>
+            <a:endParaRPr lang="en-US" sz="1200">
+              <a:solidFill>
+                <a:srgbClr val="000000"/>
+              </a:solidFill>
+              <a:latin typeface="Arial"/>
+              <a:ea typeface="Calibri" panose="020F0502020204030204"/>
+              <a:cs typeface="Calibri" panose="020F0502020204030204"/>
+            </a:endParaRPr>
           </a:p>
         </p:txBody>
       </p:sp>
@@ -4179,7 +4369,7 @@
         </p:nvSpPr>
         <p:spPr>
           <a:xfrm>
-            <a:off x="4636008" y="2715768"/>
+            <a:off x="4643528" y="1565248"/>
             <a:ext cx="2743200" cy="475488"/>
           </a:xfrm>
           <a:prstGeom prst="rect">
@@ -4192,38 +4382,50 @@
           <a:bodyPr wrap="square" lIns="0" tIns="0" rIns="0" bIns="0" rtlCol="0" anchor="ctr"/>
           <a:lstStyle/>
           <a:p>
-            <a:pPr indent="0" marL="0">
-              <a:buNone/>
-            </a:pPr>
-            <a:r>
-              <a:rPr lang="en-US" sz="1050" dirty="0">
+            <a:pPr marL="0" indent="0">
+              <a:buNone/>
+            </a:pPr>
+            <a:r>
+              <a:rPr lang="en-US" sz="1050">
                 <a:solidFill>
                   <a:srgbClr val="46555F"/>
                 </a:solidFill>
-                <a:latin typeface="Arial" pitchFamily="34" charset="0"/>
-                <a:ea typeface="Arial" pitchFamily="34" charset="-122"/>
-                <a:cs typeface="Arial" pitchFamily="34" charset="-120"/>
-              </a:rPr>
-              <a:t>SQLite over 2,372 telemetry rows</a:t>
-            </a:r>
-            <a:endParaRPr lang="en-US" sz="1050" dirty="0"/>
-          </a:p>
-          <a:p>
-            <a:pPr indent="0" marL="0">
-              <a:buNone/>
-            </a:pPr>
-            <a:r>
-              <a:rPr lang="en-US" sz="1050" dirty="0">
+                <a:latin typeface="Arial"/>
+                <a:ea typeface="Arial" pitchFamily="34" charset="-122"/>
+                <a:cs typeface="Arial"/>
+              </a:rPr>
+              <a:t>SQLite </a:t>
+            </a:r>
+            <a:r>
+              <a:rPr lang="en-US" sz="1050">
                 <a:solidFill>
                   <a:srgbClr val="46555F"/>
                 </a:solidFill>
-                <a:latin typeface="Arial" pitchFamily="34" charset="0"/>
-                <a:ea typeface="Arial" pitchFamily="34" charset="-122"/>
-                <a:cs typeface="Arial" pitchFamily="34" charset="-120"/>
-              </a:rPr>
-              <a:t>read-only, ships its query</a:t>
-            </a:r>
-            <a:endParaRPr lang="en-US" sz="1050" dirty="0"/>
+                <a:latin typeface="Arial"/>
+                <a:cs typeface="Arial"/>
+              </a:rPr>
+              <a:t>snapshot · 2,372 telemetry rows</a:t>
+            </a:r>
+            <a:br>
+              <a:rPr lang="en-US" sz="1050">
+                <a:solidFill>
+                  <a:srgbClr val="46555F"/>
+                </a:solidFill>
+                <a:latin typeface="Arial"/>
+                <a:cs typeface="Arial"/>
+              </a:rPr>
+            </a:br>
+            <a:r>
+              <a:rPr lang="en-US" sz="1050">
+                <a:solidFill>
+                  <a:srgbClr val="46555F"/>
+                </a:solidFill>
+                <a:latin typeface="Arial"/>
+                <a:cs typeface="Arial"/>
+              </a:rPr>
+              <a:t>Read-only validation · SQL shown</a:t>
+            </a:r>
+            <a:endParaRPr lang="en-US"/>
           </a:p>
         </p:txBody>
       </p:sp>
@@ -4235,7 +4437,7 @@
         </p:nvSpPr>
         <p:spPr>
           <a:xfrm>
-            <a:off x="4069080" y="1883664"/>
+            <a:off x="4069080" y="2214532"/>
             <a:ext cx="182880" cy="0"/>
           </a:xfrm>
           <a:prstGeom prst="line">
@@ -4249,6 +4451,13 @@
             <a:prstDash val="solid"/>
           </a:ln>
         </p:spPr>
+        <p:txBody>
+          <a:bodyPr/>
+          <a:lstStyle/>
+          <a:p>
+            <a:endParaRPr lang="en-US"/>
+          </a:p>
+        </p:txBody>
       </p:sp>
       <p:sp>
         <p:nvSpPr>
@@ -4272,6 +4481,13 @@
             <a:prstDash val="solid"/>
           </a:ln>
         </p:spPr>
+        <p:txBody>
+          <a:bodyPr/>
+          <a:lstStyle/>
+          <a:p>
+            <a:endParaRPr lang="en-US"/>
+          </a:p>
+        </p:txBody>
       </p:sp>
       <p:sp>
         <p:nvSpPr>
@@ -4296,6 +4512,13 @@
             <a:tailEnd type="triangle"/>
           </a:ln>
         </p:spPr>
+        <p:txBody>
+          <a:bodyPr/>
+          <a:lstStyle/>
+          <a:p>
+            <a:endParaRPr lang="en-US"/>
+          </a:p>
+        </p:txBody>
       </p:sp>
       <p:sp>
         <p:nvSpPr>
@@ -4305,7 +4528,7 @@
         </p:nvSpPr>
         <p:spPr>
           <a:xfrm>
-            <a:off x="4069080" y="1883664"/>
+            <a:off x="4069080" y="2214532"/>
             <a:ext cx="182880" cy="0"/>
           </a:xfrm>
           <a:prstGeom prst="line">
@@ -4319,6 +4542,13 @@
             <a:prstDash val="solid"/>
           </a:ln>
         </p:spPr>
+        <p:txBody>
+          <a:bodyPr/>
+          <a:lstStyle/>
+          <a:p>
+            <a:endParaRPr lang="en-US"/>
+          </a:p>
+        </p:txBody>
       </p:sp>
       <p:sp>
         <p:nvSpPr>
@@ -4342,6 +4572,13 @@
             <a:prstDash val="solid"/>
           </a:ln>
         </p:spPr>
+        <p:txBody>
+          <a:bodyPr/>
+          <a:lstStyle/>
+          <a:p>
+            <a:endParaRPr lang="en-US"/>
+          </a:p>
+        </p:txBody>
       </p:sp>
       <p:sp>
         <p:nvSpPr>
@@ -4366,6 +4603,13 @@
             <a:tailEnd type="triangle"/>
           </a:ln>
         </p:spPr>
+        <p:txBody>
+          <a:bodyPr/>
+          <a:lstStyle/>
+          <a:p>
+            <a:endParaRPr lang="en-US"/>
+          </a:p>
+        </p:txBody>
       </p:sp>
       <p:sp>
         <p:nvSpPr>
@@ -4393,6 +4637,13 @@
             <a:prstDash val="solid"/>
           </a:ln>
         </p:spPr>
+        <p:txBody>
+          <a:bodyPr/>
+          <a:lstStyle/>
+          <a:p>
+            <a:endParaRPr lang="en-US"/>
+          </a:p>
+        </p:txBody>
       </p:sp>
       <p:sp>
         <p:nvSpPr>
@@ -4415,21 +4666,25 @@
           <a:bodyPr wrap="square" lIns="0" tIns="0" rIns="0" bIns="0" rtlCol="0" anchor="ctr"/>
           <a:lstStyle/>
           <a:p>
-            <a:pPr indent="0" marL="0">
-              <a:buNone/>
-            </a:pPr>
-            <a:r>
-              <a:rPr lang="en-US" sz="1200" b="1" dirty="0">
+            <a:r>
+              <a:rPr lang="en-US" sz="1200" b="1">
                 <a:solidFill>
                   <a:srgbClr val="FFFFFF"/>
                 </a:solidFill>
-                <a:latin typeface="Arial" pitchFamily="34" charset="0"/>
-                <a:ea typeface="Arial" pitchFamily="34" charset="-122"/>
-                <a:cs typeface="Arial" pitchFamily="34" charset="-120"/>
-              </a:rPr>
-              <a:t>Guardrail runs BEFORE the model is called</a:t>
-            </a:r>
-            <a:endParaRPr lang="en-US" sz="1200" dirty="0"/>
+                <a:latin typeface="Arial"/>
+                <a:ea typeface="Arial" pitchFamily="34" charset="-122"/>
+                <a:cs typeface="Arial"/>
+              </a:rPr>
+              <a:t>RAG evidence check runs before the model is called:</a:t>
+            </a:r>
+            <a:endParaRPr lang="en-US" sz="1200">
+              <a:solidFill>
+                <a:srgbClr val="000000"/>
+              </a:solidFill>
+              <a:latin typeface="Arial"/>
+              <a:ea typeface="Calibri" panose="020F0502020204030204"/>
+              <a:cs typeface="Arial"/>
+            </a:endParaRPr>
           </a:p>
         </p:txBody>
       </p:sp>
@@ -4454,21 +4709,214 @@
           <a:bodyPr wrap="square" lIns="0" tIns="0" rIns="0" bIns="0" rtlCol="0" anchor="ctr"/>
           <a:lstStyle/>
           <a:p>
-            <a:pPr indent="0" marL="0">
-              <a:buNone/>
-            </a:pPr>
-            <a:r>
-              <a:rPr lang="en-US" sz="1100" dirty="0">
-                <a:solidFill>
-                  <a:srgbClr val="FD5000"/>
-                </a:solidFill>
-                <a:latin typeface="Courier New" pitchFamily="34" charset="0"/>
-                <a:ea typeface="Courier New" pitchFamily="34" charset="-122"/>
-                <a:cs typeface="Courier New" pitchFamily="34" charset="-120"/>
-              </a:rPr>
-              <a:t>trusted = [h for h in hits if h.score &gt;= min_score]  →  if empty, refuse</a:t>
-            </a:r>
-            <a:endParaRPr lang="en-US" sz="1100" dirty="0"/>
+            <a:pPr marL="0" indent="0">
+              <a:buNone/>
+            </a:pPr>
+            <a:r>
+              <a:rPr lang="en-US" sz="1100" b="1">
+                <a:solidFill>
+                  <a:srgbClr val="ED7D31"/>
+                </a:solidFill>
+                <a:latin typeface="Courier New"/>
+                <a:cs typeface="Courier New"/>
+              </a:rPr>
+              <a:t>Keep chunks with score &gt;= </a:t>
+            </a:r>
+            <a:r>
+              <a:rPr lang="en-US" sz="1100" b="1" err="1">
+                <a:solidFill>
+                  <a:srgbClr val="ED7D31"/>
+                </a:solidFill>
+                <a:latin typeface="Courier New"/>
+                <a:cs typeface="Courier New"/>
+              </a:rPr>
+              <a:t>min_score</a:t>
+            </a:r>
+            <a:endParaRPr lang="en-US" b="1" err="1">
+              <a:solidFill>
+                <a:srgbClr val="ED7D31"/>
+              </a:solidFill>
+            </a:endParaRPr>
+          </a:p>
+          <a:p>
+            <a:r>
+              <a:rPr lang="en-US" sz="1100" b="1">
+                <a:solidFill>
+                  <a:srgbClr val="ED7D31"/>
+                </a:solidFill>
+                <a:latin typeface="Courier New"/>
+                <a:cs typeface="Courier New"/>
+              </a:rPr>
+              <a:t>No trusted chunks → abstain</a:t>
+            </a:r>
+            <a:endParaRPr lang="en-US" b="1">
+              <a:solidFill>
+                <a:srgbClr val="ED7D31"/>
+              </a:solidFill>
+            </a:endParaRPr>
+          </a:p>
+        </p:txBody>
+      </p:sp>
+      <p:sp>
+        <p:nvSpPr>
+          <p:cNvPr id="25" name="TextBox 24">
+            <a:extLst>
+              <a:ext uri="{FF2B5EF4-FFF2-40B4-BE49-F238E27FC236}">
+                <a16:creationId xmlns:a16="http://schemas.microsoft.com/office/drawing/2014/main" id="{2BC0CE38-59F6-A487-4E8F-26431D171A4D}"/>
+              </a:ext>
+            </a:extLst>
+          </p:cNvPr>
+          <p:cNvSpPr txBox="1"/>
+          <p:nvPr/>
+        </p:nvSpPr>
+        <p:spPr>
+          <a:xfrm>
+            <a:off x="4985586" y="3752349"/>
+            <a:ext cx="3406440" cy="553998"/>
+          </a:xfrm>
+          <a:prstGeom prst="rect">
+            <a:avLst/>
+          </a:prstGeom>
+          <a:solidFill>
+            <a:schemeClr val="accent1">
+              <a:lumMod val="50000"/>
+            </a:schemeClr>
+          </a:solidFill>
+        </p:spPr>
+        <p:txBody>
+          <a:bodyPr rot="0" spcFirstLastPara="0" vertOverflow="overflow" horzOverflow="overflow" vert="horz" wrap="square" lIns="91440" tIns="45720" rIns="91440" bIns="45720" numCol="1" spcCol="0" rtlCol="0" fromWordArt="0" anchor="t" anchorCtr="0" forceAA="0" compatLnSpc="1">
+            <a:prstTxWarp prst="textNoShape">
+              <a:avLst/>
+            </a:prstTxWarp>
+            <a:spAutoFit/>
+          </a:bodyPr>
+          <a:lstStyle/>
+          <a:p>
+            <a:r>
+              <a:rPr lang="en-US" sz="1000" kern="1200">
+                <a:solidFill>
+                  <a:schemeClr val="bg1"/>
+                </a:solidFill>
+                <a:latin typeface="Courier New"/>
+                <a:ea typeface="Courier New"/>
+                <a:cs typeface="Courier New"/>
+              </a:rPr>
+              <a:t>trusted = </a:t>
+            </a:r>
+            <a:endParaRPr lang="en-US">
+              <a:solidFill>
+                <a:schemeClr val="bg1"/>
+              </a:solidFill>
+              <a:ea typeface="Calibri"/>
+              <a:cs typeface="Calibri"/>
+            </a:endParaRPr>
+          </a:p>
+          <a:p>
+            <a:r>
+              <a:rPr lang="en-US" sz="1000" kern="1200">
+                <a:solidFill>
+                  <a:schemeClr val="bg1"/>
+                </a:solidFill>
+                <a:latin typeface="Courier New"/>
+                <a:ea typeface="Courier New"/>
+                <a:cs typeface="Courier New"/>
+              </a:rPr>
+              <a:t>[h for h in hits if </a:t>
+            </a:r>
+            <a:r>
+              <a:rPr lang="en-US" sz="1000" kern="1200" err="1">
+                <a:solidFill>
+                  <a:schemeClr val="bg1"/>
+                </a:solidFill>
+                <a:latin typeface="Courier New"/>
+                <a:ea typeface="Courier New"/>
+                <a:cs typeface="Courier New"/>
+              </a:rPr>
+              <a:t>h.score</a:t>
+            </a:r>
+            <a:r>
+              <a:rPr lang="en-US" sz="1000" kern="1200">
+                <a:solidFill>
+                  <a:schemeClr val="bg1"/>
+                </a:solidFill>
+                <a:latin typeface="Courier New"/>
+                <a:ea typeface="Courier New"/>
+                <a:cs typeface="Courier New"/>
+              </a:rPr>
+              <a:t> &gt;=</a:t>
+            </a:r>
+            <a:r>
+              <a:rPr lang="en-US" sz="1000">
+                <a:solidFill>
+                  <a:schemeClr val="bg1"/>
+                </a:solidFill>
+                <a:latin typeface="Courier New"/>
+                <a:ea typeface="Courier New"/>
+                <a:cs typeface="Courier New"/>
+              </a:rPr>
+              <a:t> </a:t>
+            </a:r>
+            <a:r>
+              <a:rPr lang="en-US" sz="1000" kern="1200" err="1">
+                <a:solidFill>
+                  <a:schemeClr val="bg1"/>
+                </a:solidFill>
+                <a:latin typeface="Courier New"/>
+                <a:ea typeface="Courier New"/>
+                <a:cs typeface="Courier New"/>
+              </a:rPr>
+              <a:t>min_score</a:t>
+            </a:r>
+            <a:r>
+              <a:rPr lang="en-US" sz="1000" kern="1200">
+                <a:solidFill>
+                  <a:schemeClr val="bg1"/>
+                </a:solidFill>
+                <a:latin typeface="Courier New"/>
+                <a:ea typeface="Courier New"/>
+                <a:cs typeface="Courier New"/>
+              </a:rPr>
+              <a:t>]</a:t>
+            </a:r>
+            <a:endParaRPr lang="en-US">
+              <a:solidFill>
+                <a:schemeClr val="bg1"/>
+              </a:solidFill>
+              <a:latin typeface="Calibri" panose="020F0502020204030204"/>
+              <a:ea typeface="Calibri" panose="020F0502020204030204"/>
+              <a:cs typeface="Calibri" panose="020F0502020204030204"/>
+            </a:endParaRPr>
+          </a:p>
+          <a:p>
+            <a:r>
+              <a:rPr lang="en-US" sz="1000" kern="1200">
+                <a:solidFill>
+                  <a:schemeClr val="bg1"/>
+                </a:solidFill>
+                <a:latin typeface="Courier New"/>
+                <a:ea typeface="Courier New"/>
+                <a:cs typeface="Courier New"/>
+              </a:rPr>
+              <a:t> →  if empty, </a:t>
+            </a:r>
+            <a:r>
+              <a:rPr lang="en-US" sz="1000">
+                <a:solidFill>
+                  <a:schemeClr val="bg1"/>
+                </a:solidFill>
+                <a:latin typeface="Courier New"/>
+                <a:ea typeface="Courier New"/>
+                <a:cs typeface="Courier New"/>
+              </a:rPr>
+              <a:t>abstain</a:t>
+            </a:r>
+            <a:endParaRPr lang="en-US">
+              <a:solidFill>
+                <a:schemeClr val="bg1"/>
+              </a:solidFill>
+              <a:ea typeface="Calibri"/>
+              <a:cs typeface="Calibri"/>
+            </a:endParaRPr>
           </a:p>
         </p:txBody>
       </p:sp>
@@ -4518,21 +4966,24 @@
           <a:bodyPr wrap="square" lIns="0" tIns="0" rIns="0" bIns="0" rtlCol="0" anchor="ctr"/>
           <a:lstStyle/>
           <a:p>
-            <a:pPr indent="0" marL="0">
-              <a:buNone/>
-            </a:pPr>
-            <a:r>
-              <a:rPr lang="en-US" sz="1100" b="1" spc="200" kern="0" dirty="0">
+            <a:r>
+              <a:rPr lang="en-US" sz="1100" b="1" kern="0" spc="200">
                 <a:solidFill>
                   <a:srgbClr val="FD5000"/>
                 </a:solidFill>
-                <a:latin typeface="Arial" pitchFamily="34" charset="0"/>
-                <a:ea typeface="Arial" pitchFamily="34" charset="-122"/>
-                <a:cs typeface="Arial" pitchFamily="34" charset="-120"/>
+                <a:latin typeface="Arial"/>
+                <a:ea typeface="Arial" pitchFamily="34" charset="-122"/>
+                <a:cs typeface="Arial"/>
               </a:rPr>
               <a:t>EVALUATION</a:t>
             </a:r>
-            <a:endParaRPr lang="en-US" sz="1100" dirty="0"/>
+            <a:endParaRPr lang="en-US" sz="1100" b="1" kern="0" spc="200">
+              <a:solidFill>
+                <a:srgbClr val="FD5000"/>
+              </a:solidFill>
+              <a:latin typeface="Arial"/>
+              <a:cs typeface="Arial"/>
+            </a:endParaRPr>
           </a:p>
         </p:txBody>
       </p:sp>
@@ -4557,11 +5008,11 @@
           <a:bodyPr wrap="square" lIns="0" tIns="0" rIns="0" bIns="0" rtlCol="0" anchor="ctr"/>
           <a:lstStyle/>
           <a:p>
-            <a:pPr indent="0" marL="0">
-              <a:buNone/>
-            </a:pPr>
-            <a:r>
-              <a:rPr lang="en-US" sz="3000" b="1" dirty="0">
+            <a:pPr marL="0" indent="0">
+              <a:buNone/>
+            </a:pPr>
+            <a:r>
+              <a:rPr lang="en-US" sz="3000" b="1">
                 <a:solidFill>
                   <a:srgbClr val="1D252D"/>
                 </a:solidFill>
@@ -4571,7 +5022,7 @@
               </a:rPr>
               <a:t>We measured it, we didn't assume it</a:t>
             </a:r>
-            <a:endParaRPr lang="en-US" sz="3000" dirty="0"/>
+            <a:endParaRPr lang="en-US" sz="3000"/>
           </a:p>
         </p:txBody>
       </p:sp>
@@ -4583,50 +5034,95 @@
         </p:nvSpPr>
         <p:spPr>
           <a:xfrm>
-            <a:off x="502920" y="1207008"/>
-            <a:ext cx="8138160" cy="292608"/>
-          </a:xfrm>
-          <a:prstGeom prst="rect">
-            <a:avLst/>
-          </a:prstGeom>
-          <a:noFill/>
-          <a:ln/>
-        </p:spPr>
-        <p:txBody>
-          <a:bodyPr wrap="square" lIns="0" tIns="0" rIns="0" bIns="0" rtlCol="0" anchor="ctr"/>
-          <a:lstStyle/>
-          <a:p>
-            <a:pPr indent="0" marL="0">
-              <a:buNone/>
-            </a:pPr>
-            <a:r>
-              <a:rPr lang="en-US" sz="1300" dirty="0">
-                <a:solidFill>
-                  <a:srgbClr val="46555F"/>
-                </a:solidFill>
-                <a:latin typeface="Arial" pitchFamily="34" charset="0"/>
-                <a:ea typeface="Arial" pitchFamily="34" charset="-122"/>
-                <a:cs typeface="Arial" pitchFamily="34" charset="-120"/>
-              </a:rPr>
-              <a:t>17-case golden set. Mean Reciprocal Rank across every chunking strategy and retriever.</a:t>
-            </a:r>
-            <a:endParaRPr lang="en-US" sz="1300" dirty="0"/>
+            <a:off x="502920" y="1071469"/>
+            <a:ext cx="8138160" cy="566928"/>
+          </a:xfrm>
+          <a:prstGeom prst="rect">
+            <a:avLst/>
+          </a:prstGeom>
+          <a:noFill/>
+          <a:ln/>
+        </p:spPr>
+        <p:txBody>
+          <a:bodyPr wrap="square" lIns="0" tIns="0" rIns="0" bIns="0" rtlCol="0" anchor="ctr"/>
+          <a:lstStyle/>
+          <a:p>
+            <a:r>
+              <a:rPr lang="en-US" sz="1300">
+                <a:solidFill>
+                  <a:schemeClr val="tx1">
+                    <a:lumMod val="50000"/>
+                    <a:lumOff val="50000"/>
+                  </a:schemeClr>
+                </a:solidFill>
+                <a:latin typeface="Arial"/>
+                <a:ea typeface="Arial" pitchFamily="34" charset="-122"/>
+                <a:cs typeface="Arial"/>
+              </a:rPr>
+              <a:t>17-case golden set. </a:t>
+            </a:r>
+            <a:r>
+              <a:rPr lang="en-US" sz="1300">
+                <a:solidFill>
+                  <a:schemeClr val="tx2"/>
+                </a:solidFill>
+                <a:latin typeface="Arial"/>
+                <a:ea typeface="Arial" pitchFamily="34" charset="-122"/>
+                <a:cs typeface="Arial"/>
+              </a:rPr>
+              <a:t>Mean Reciprocal Rank across every chunking strategy (split the documents) </a:t>
+            </a:r>
+            <a:r>
+              <a:rPr lang="en-US" sz="1400">
+                <a:solidFill>
+                  <a:schemeClr val="tx2"/>
+                </a:solidFill>
+              </a:rPr>
+              <a:t>against every </a:t>
+            </a:r>
+            <a:r>
+              <a:rPr lang="en-US" sz="1400" b="1">
+                <a:solidFill>
+                  <a:schemeClr val="tx2"/>
+                </a:solidFill>
+              </a:rPr>
+              <a:t>r</a:t>
+            </a:r>
+            <a:r>
+              <a:rPr lang="en-US" sz="1400">
+                <a:solidFill>
+                  <a:schemeClr val="tx2"/>
+                </a:solidFill>
+              </a:rPr>
+              <a:t>etriever (search them)</a:t>
+            </a:r>
+            <a:endParaRPr lang="en-US" sz="1300">
+              <a:solidFill>
+                <a:schemeClr val="tx2"/>
+              </a:solidFill>
+            </a:endParaRPr>
           </a:p>
         </p:txBody>
       </p:sp>
       <p:graphicFrame>
         <p:nvGraphicFramePr>
-          <p:cNvPr id="5" name="Chart 0" descr=""/>
+          <p:cNvPr id="5" name="Chart 0"/>
           <p:cNvGraphicFramePr/>
-          <p:nvPr/>
+          <p:nvPr>
+            <p:extLst>
+              <p:ext uri="{D42A27DB-BD31-4B8C-83A1-F6EECF244321}">
+                <p14:modId xmlns:p14="http://schemas.microsoft.com/office/powerpoint/2010/main" val="1107082517"/>
+              </p:ext>
+            </p:extLst>
+          </p:nvPr>
         </p:nvGraphicFramePr>
         <p:xfrm>
           <a:off x="502920" y="1645920"/>
           <a:ext cx="5029200" cy="2697480"/>
         </p:xfrm>
-        <a:graphic xmlns:a="http://schemas.openxmlformats.org/drawingml/2006/main">
+        <a:graphic>
           <a:graphicData uri="http://schemas.openxmlformats.org/drawingml/2006/chart">
-            <c:chart xmlns:c="http://schemas.openxmlformats.org/drawingml/2006/chart" r:id="rId1"/>
+            <c:chart xmlns:c="http://schemas.openxmlformats.org/drawingml/2006/chart" xmlns:r="http://schemas.openxmlformats.org/officeDocument/2006/relationships" r:id="rId3"/>
           </a:graphicData>
         </a:graphic>
       </p:graphicFrame>
@@ -4649,6 +5145,13 @@
           </a:solidFill>
           <a:ln/>
         </p:spPr>
+        <p:txBody>
+          <a:bodyPr/>
+          <a:lstStyle/>
+          <a:p>
+            <a:endParaRPr lang="en-US"/>
+          </a:p>
+        </p:txBody>
       </p:sp>
       <p:sp>
         <p:nvSpPr>
@@ -4671,11 +5174,11 @@
           <a:bodyPr wrap="square" lIns="0" tIns="0" rIns="0" bIns="0" rtlCol="0" anchor="ctr"/>
           <a:lstStyle/>
           <a:p>
-            <a:pPr algn="ctr" indent="0" marL="0">
-              <a:buNone/>
-            </a:pPr>
-            <a:r>
-              <a:rPr lang="en-US" sz="1300" b="1" dirty="0">
+            <a:pPr marL="0" indent="0" algn="ctr">
+              <a:buNone/>
+            </a:pPr>
+            <a:r>
+              <a:rPr lang="en-US" sz="1300" b="1">
                 <a:solidFill>
                   <a:srgbClr val="FFFFFF"/>
                 </a:solidFill>
@@ -4685,7 +5188,7 @@
               </a:rPr>
               <a:t>1</a:t>
             </a:r>
-            <a:endParaRPr lang="en-US" sz="1300" dirty="0"/>
+            <a:endParaRPr lang="en-US" sz="1300"/>
           </a:p>
         </p:txBody>
       </p:sp>
@@ -4710,11 +5213,11 @@
           <a:bodyPr wrap="square" lIns="0" tIns="0" rIns="0" bIns="0" rtlCol="0" anchor="ctr"/>
           <a:lstStyle/>
           <a:p>
-            <a:pPr indent="0" marL="0">
-              <a:buNone/>
-            </a:pPr>
-            <a:r>
-              <a:rPr lang="en-US" sz="1200" b="1" dirty="0">
+            <a:pPr marL="0" indent="0">
+              <a:buNone/>
+            </a:pPr>
+            <a:r>
+              <a:rPr lang="en-US" sz="1200" b="1">
                 <a:solidFill>
                   <a:srgbClr val="1D252D"/>
                 </a:solidFill>
@@ -4724,7 +5227,7 @@
               </a:rPr>
               <a:t>Best config</a:t>
             </a:r>
-            <a:endParaRPr lang="en-US" sz="1200" dirty="0"/>
+            <a:endParaRPr lang="en-US" sz="1200"/>
           </a:p>
         </p:txBody>
       </p:sp>
@@ -4749,11 +5252,11 @@
           <a:bodyPr wrap="square" lIns="0" tIns="0" rIns="0" bIns="0" rtlCol="0" anchor="ctr"/>
           <a:lstStyle/>
           <a:p>
-            <a:pPr indent="0" marL="0">
-              <a:buNone/>
-            </a:pPr>
-            <a:r>
-              <a:rPr lang="en-US" sz="1050" dirty="0">
+            <a:pPr marL="0" indent="0">
+              <a:buNone/>
+            </a:pPr>
+            <a:r>
+              <a:rPr lang="en-US" sz="1050">
                 <a:solidFill>
                   <a:srgbClr val="46555F"/>
                 </a:solidFill>
@@ -4763,14 +5266,14 @@
               </a:rPr>
               <a:t>metadata_aware chunking</a:t>
             </a:r>
-            <a:endParaRPr lang="en-US" sz="1050" dirty="0"/>
-          </a:p>
-          <a:p>
-            <a:pPr indent="0" marL="0">
-              <a:buNone/>
-            </a:pPr>
-            <a:r>
-              <a:rPr lang="en-US" sz="1050" dirty="0">
+            <a:endParaRPr lang="en-US" sz="1050"/>
+          </a:p>
+          <a:p>
+            <a:pPr marL="0" indent="0">
+              <a:buNone/>
+            </a:pPr>
+            <a:r>
+              <a:rPr lang="en-US" sz="1050">
                 <a:solidFill>
                   <a:srgbClr val="46555F"/>
                 </a:solidFill>
@@ -4780,7 +5283,7 @@
               </a:rPr>
               <a:t>+ vector retrieval  →  MRR 0.93</a:t>
             </a:r>
-            <a:endParaRPr lang="en-US" sz="1050" dirty="0"/>
+            <a:endParaRPr lang="en-US" sz="1050"/>
           </a:p>
         </p:txBody>
       </p:sp>
@@ -4803,6 +5306,13 @@
           </a:solidFill>
           <a:ln/>
         </p:spPr>
+        <p:txBody>
+          <a:bodyPr/>
+          <a:lstStyle/>
+          <a:p>
+            <a:endParaRPr lang="en-US"/>
+          </a:p>
+        </p:txBody>
       </p:sp>
       <p:sp>
         <p:nvSpPr>
@@ -4825,11 +5335,11 @@
           <a:bodyPr wrap="square" lIns="0" tIns="0" rIns="0" bIns="0" rtlCol="0" anchor="ctr"/>
           <a:lstStyle/>
           <a:p>
-            <a:pPr algn="ctr" indent="0" marL="0">
-              <a:buNone/>
-            </a:pPr>
-            <a:r>
-              <a:rPr lang="en-US" sz="1300" b="1" dirty="0">
+            <a:pPr marL="0" indent="0" algn="ctr">
+              <a:buNone/>
+            </a:pPr>
+            <a:r>
+              <a:rPr lang="en-US" sz="1300" b="1">
                 <a:solidFill>
                   <a:srgbClr val="FFFFFF"/>
                 </a:solidFill>
@@ -4839,7 +5349,7 @@
               </a:rPr>
               <a:t>2</a:t>
             </a:r>
-            <a:endParaRPr lang="en-US" sz="1300" dirty="0"/>
+            <a:endParaRPr lang="en-US" sz="1300"/>
           </a:p>
         </p:txBody>
       </p:sp>
@@ -4864,11 +5374,11 @@
           <a:bodyPr wrap="square" lIns="0" tIns="0" rIns="0" bIns="0" rtlCol="0" anchor="ctr"/>
           <a:lstStyle/>
           <a:p>
-            <a:pPr indent="0" marL="0">
-              <a:buNone/>
-            </a:pPr>
-            <a:r>
-              <a:rPr lang="en-US" sz="1200" b="1" dirty="0">
+            <a:pPr marL="0" indent="0">
+              <a:buNone/>
+            </a:pPr>
+            <a:r>
+              <a:rPr lang="en-US" sz="1200" b="1">
                 <a:solidFill>
                   <a:srgbClr val="1D252D"/>
                 </a:solidFill>
@@ -4878,7 +5388,7 @@
               </a:rPr>
               <a:t>Reported as found</a:t>
             </a:r>
-            <a:endParaRPr lang="en-US" sz="1200" dirty="0"/>
+            <a:endParaRPr lang="en-US" sz="1200"/>
           </a:p>
         </p:txBody>
       </p:sp>
@@ -4903,11 +5413,11 @@
           <a:bodyPr wrap="square" lIns="0" tIns="0" rIns="0" bIns="0" rtlCol="0" anchor="ctr"/>
           <a:lstStyle/>
           <a:p>
-            <a:pPr indent="0" marL="0">
-              <a:buNone/>
-            </a:pPr>
-            <a:r>
-              <a:rPr lang="en-US" sz="1050" dirty="0">
+            <a:pPr marL="0" indent="0">
+              <a:buNone/>
+            </a:pPr>
+            <a:r>
+              <a:rPr lang="en-US" sz="1050">
                 <a:solidFill>
                   <a:srgbClr val="46555F"/>
                 </a:solidFill>
@@ -4917,14 +5427,14 @@
               </a:rPr>
               <a:t>Hybrid RRF scored WORSE than</a:t>
             </a:r>
-            <a:endParaRPr lang="en-US" sz="1050" dirty="0"/>
-          </a:p>
-          <a:p>
-            <a:pPr indent="0" marL="0">
-              <a:buNone/>
-            </a:pPr>
-            <a:r>
-              <a:rPr lang="en-US" sz="1050" dirty="0">
+            <a:endParaRPr lang="en-US" sz="1050"/>
+          </a:p>
+          <a:p>
+            <a:pPr marL="0" indent="0">
+              <a:buNone/>
+            </a:pPr>
+            <a:r>
+              <a:rPr lang="en-US" sz="1050">
                 <a:solidFill>
                   <a:srgbClr val="46555F"/>
                 </a:solidFill>
@@ -4934,7 +5444,7 @@
               </a:rPr>
               <a:t>pure vector (0.88 vs 0.93)</a:t>
             </a:r>
-            <a:endParaRPr lang="en-US" sz="1050" dirty="0"/>
+            <a:endParaRPr lang="en-US" sz="1050"/>
           </a:p>
         </p:txBody>
       </p:sp>
@@ -4957,6 +5467,13 @@
           </a:solidFill>
           <a:ln/>
         </p:spPr>
+        <p:txBody>
+          <a:bodyPr/>
+          <a:lstStyle/>
+          <a:p>
+            <a:endParaRPr lang="en-US"/>
+          </a:p>
+        </p:txBody>
       </p:sp>
       <p:sp>
         <p:nvSpPr>
@@ -4979,11 +5496,11 @@
           <a:bodyPr wrap="square" lIns="0" tIns="0" rIns="0" bIns="0" rtlCol="0" anchor="ctr"/>
           <a:lstStyle/>
           <a:p>
-            <a:pPr algn="ctr" indent="0" marL="0">
-              <a:buNone/>
-            </a:pPr>
-            <a:r>
-              <a:rPr lang="en-US" sz="1300" b="1" dirty="0">
+            <a:pPr marL="0" indent="0" algn="ctr">
+              <a:buNone/>
+            </a:pPr>
+            <a:r>
+              <a:rPr lang="en-US" sz="1300" b="1">
                 <a:solidFill>
                   <a:srgbClr val="FFFFFF"/>
                 </a:solidFill>
@@ -4993,7 +5510,7 @@
               </a:rPr>
               <a:t>3</a:t>
             </a:r>
-            <a:endParaRPr lang="en-US" sz="1300" dirty="0"/>
+            <a:endParaRPr lang="en-US" sz="1300"/>
           </a:p>
         </p:txBody>
       </p:sp>
@@ -5018,11 +5535,11 @@
           <a:bodyPr wrap="square" lIns="0" tIns="0" rIns="0" bIns="0" rtlCol="0" anchor="ctr"/>
           <a:lstStyle/>
           <a:p>
-            <a:pPr indent="0" marL="0">
-              <a:buNone/>
-            </a:pPr>
-            <a:r>
-              <a:rPr lang="en-US" sz="1200" b="1" dirty="0">
+            <a:pPr marL="0" indent="0">
+              <a:buNone/>
+            </a:pPr>
+            <a:r>
+              <a:rPr lang="en-US" sz="1200" b="1">
                 <a:solidFill>
                   <a:srgbClr val="1D252D"/>
                 </a:solidFill>
@@ -5032,7 +5549,7 @@
               </a:rPr>
               <a:t>Hit@5</a:t>
             </a:r>
-            <a:endParaRPr lang="en-US" sz="1200" dirty="0"/>
+            <a:endParaRPr lang="en-US" sz="1200"/>
           </a:p>
         </p:txBody>
       </p:sp>
@@ -5057,11 +5574,11 @@
           <a:bodyPr wrap="square" lIns="0" tIns="0" rIns="0" bIns="0" rtlCol="0" anchor="ctr"/>
           <a:lstStyle/>
           <a:p>
-            <a:pPr indent="0" marL="0">
-              <a:buNone/>
-            </a:pPr>
-            <a:r>
-              <a:rPr lang="en-US" sz="1050" dirty="0">
+            <a:pPr marL="0" indent="0">
+              <a:buNone/>
+            </a:pPr>
+            <a:r>
+              <a:rPr lang="en-US" sz="1050">
                 <a:solidFill>
                   <a:srgbClr val="46555F"/>
                 </a:solidFill>
@@ -5071,14 +5588,14 @@
               </a:rPr>
               <a:t>1.00 across all strategies —</a:t>
             </a:r>
-            <a:endParaRPr lang="en-US" sz="1050" dirty="0"/>
-          </a:p>
-          <a:p>
-            <a:pPr indent="0" marL="0">
-              <a:buNone/>
-            </a:pPr>
-            <a:r>
-              <a:rPr lang="en-US" sz="1050" dirty="0">
+            <a:endParaRPr lang="en-US" sz="1050"/>
+          </a:p>
+          <a:p>
+            <a:pPr marL="0" indent="0">
+              <a:buNone/>
+            </a:pPr>
+            <a:r>
+              <a:rPr lang="en-US" sz="1050">
                 <a:solidFill>
                   <a:srgbClr val="46555F"/>
                 </a:solidFill>
@@ -5088,7 +5605,7 @@
               </a:rPr>
               <a:t>the right doc is always retrieved</a:t>
             </a:r>
-            <a:endParaRPr lang="en-US" sz="1050" dirty="0"/>
+            <a:endParaRPr lang="en-US" sz="1050"/>
           </a:p>
         </p:txBody>
       </p:sp>
@@ -5100,24 +5617,24 @@
         </p:nvSpPr>
         <p:spPr>
           <a:xfrm>
-            <a:off x="502920" y="4498848"/>
-            <a:ext cx="8138160" cy="274320"/>
-          </a:xfrm>
-          <a:prstGeom prst="rect">
-            <a:avLst/>
-          </a:prstGeom>
-          <a:noFill/>
-          <a:ln/>
-        </p:spPr>
-        <p:txBody>
-          <a:bodyPr wrap="square" lIns="0" tIns="0" rIns="0" bIns="0" rtlCol="0" anchor="ctr"/>
-          <a:lstStyle/>
-          <a:p>
-            <a:pPr indent="0" marL="0">
-              <a:buNone/>
-            </a:pPr>
-            <a:r>
-              <a:rPr lang="en-US" sz="1150" i="1" dirty="0">
+            <a:off x="5998723" y="4690872"/>
+            <a:ext cx="3073941" cy="274320"/>
+          </a:xfrm>
+          <a:prstGeom prst="rect">
+            <a:avLst/>
+          </a:prstGeom>
+          <a:noFill/>
+          <a:ln/>
+        </p:spPr>
+        <p:txBody>
+          <a:bodyPr wrap="square" lIns="0" tIns="0" rIns="0" bIns="0" rtlCol="0" anchor="ctr"/>
+          <a:lstStyle/>
+          <a:p>
+            <a:pPr marL="0" indent="0">
+              <a:buNone/>
+            </a:pPr>
+            <a:r>
+              <a:rPr lang="en-US" sz="800" i="1">
                 <a:solidFill>
                   <a:srgbClr val="1D252D"/>
                 </a:solidFill>
@@ -5125,9 +5642,202 @@
                 <a:ea typeface="Arial" pitchFamily="34" charset="-122"/>
                 <a:cs typeface="Arial" pitchFamily="34" charset="-120"/>
               </a:rPr>
-              <a:t>Hybrid retrieval is widely recommended. On our corpus it lost. We report the measurement, not the expectation.</a:t>
-            </a:r>
-            <a:endParaRPr lang="en-US" sz="1150" dirty="0"/>
+              <a:t>MRR Mean Reciprocal Rank : how high up the correct document appears in search results.</a:t>
+            </a:r>
+          </a:p>
+          <a:p>
+            <a:pPr marL="0" indent="0">
+              <a:buNone/>
+            </a:pPr>
+            <a:endParaRPr lang="en-US" sz="800" i="1">
+              <a:solidFill>
+                <a:srgbClr val="1D252D"/>
+              </a:solidFill>
+              <a:latin typeface="Arial" pitchFamily="34" charset="0"/>
+              <a:ea typeface="Arial" pitchFamily="34" charset="-122"/>
+              <a:cs typeface="Arial" pitchFamily="34" charset="-120"/>
+            </a:endParaRPr>
+          </a:p>
+          <a:p>
+            <a:pPr marL="0" indent="0">
+              <a:buNone/>
+            </a:pPr>
+            <a:r>
+              <a:rPr lang="en-US" sz="800" i="1">
+                <a:solidFill>
+                  <a:srgbClr val="1D252D"/>
+                </a:solidFill>
+                <a:latin typeface="Arial" pitchFamily="34" charset="0"/>
+                <a:ea typeface="Arial" pitchFamily="34" charset="-122"/>
+                <a:cs typeface="Arial" pitchFamily="34" charset="-120"/>
+              </a:rPr>
+              <a:t>Hit@5 = was the correct document somewhere in the top 5 retrieved results?</a:t>
+            </a:r>
+          </a:p>
+          <a:p>
+            <a:pPr marL="0" indent="0">
+              <a:buNone/>
+            </a:pPr>
+            <a:endParaRPr lang="en-US" sz="900"/>
+          </a:p>
+        </p:txBody>
+      </p:sp>
+      <p:sp>
+        <p:nvSpPr>
+          <p:cNvPr id="19" name="Text 15">
+            <a:extLst>
+              <a:ext uri="{FF2B5EF4-FFF2-40B4-BE49-F238E27FC236}">
+                <a16:creationId xmlns:a16="http://schemas.microsoft.com/office/drawing/2014/main" id="{6C515F7B-826F-1E45-0D0A-11408B6265ED}"/>
+              </a:ext>
+            </a:extLst>
+          </p:cNvPr>
+          <p:cNvSpPr/>
+          <p:nvPr/>
+        </p:nvSpPr>
+        <p:spPr>
+          <a:xfrm>
+            <a:off x="355708" y="4594860"/>
+            <a:ext cx="5029200" cy="283464"/>
+          </a:xfrm>
+          <a:prstGeom prst="rect">
+            <a:avLst/>
+          </a:prstGeom>
+          <a:noFill/>
+          <a:ln/>
+        </p:spPr>
+        <p:txBody>
+          <a:bodyPr wrap="square" lIns="0" tIns="0" rIns="0" bIns="0" rtlCol="0" anchor="ctr"/>
+          <a:lstStyle/>
+          <a:p>
+            <a:pPr marL="0" indent="0">
+              <a:buNone/>
+            </a:pPr>
+            <a:r>
+              <a:rPr lang="en-US" sz="800" i="1">
+                <a:solidFill>
+                  <a:schemeClr val="tx1">
+                    <a:lumMod val="65000"/>
+                    <a:lumOff val="35000"/>
+                  </a:schemeClr>
+                </a:solidFill>
+                <a:latin typeface="Arial" panose="020B0604020202020204" pitchFamily="34" charset="0"/>
+                <a:ea typeface="Arial" pitchFamily="34" charset="-122"/>
+                <a:cs typeface="Arial" panose="020B0604020202020204" pitchFamily="34" charset="0"/>
+              </a:rPr>
+              <a:t>BM25: Keyword matching</a:t>
+            </a:r>
+          </a:p>
+          <a:p>
+            <a:r>
+              <a:rPr lang="en-US" sz="800" i="1">
+                <a:solidFill>
+                  <a:schemeClr val="tx1">
+                    <a:lumMod val="65000"/>
+                    <a:lumOff val="35000"/>
+                  </a:schemeClr>
+                </a:solidFill>
+                <a:latin typeface="Arial" panose="020B0604020202020204" pitchFamily="34" charset="0"/>
+                <a:cs typeface="Arial" panose="020B0604020202020204" pitchFamily="34" charset="0"/>
+              </a:rPr>
+              <a:t>Hybrid RRF : V</a:t>
+            </a:r>
+            <a:r>
+              <a:rPr lang="en-US" sz="800">
+                <a:solidFill>
+                  <a:schemeClr val="tx1">
+                    <a:lumMod val="65000"/>
+                    <a:lumOff val="35000"/>
+                  </a:schemeClr>
+                </a:solidFill>
+                <a:latin typeface="Arial" panose="020B0604020202020204" pitchFamily="34" charset="0"/>
+                <a:cs typeface="Arial" panose="020B0604020202020204" pitchFamily="34" charset="0"/>
+              </a:rPr>
+              <a:t>ector + keyword</a:t>
+            </a:r>
+          </a:p>
+          <a:p>
+            <a:r>
+              <a:rPr lang="en-US" sz="800" i="1">
+                <a:solidFill>
+                  <a:schemeClr val="tx1">
+                    <a:lumMod val="65000"/>
+                    <a:lumOff val="35000"/>
+                  </a:schemeClr>
+                </a:solidFill>
+                <a:latin typeface="Arial" panose="020B0604020202020204" pitchFamily="34" charset="0"/>
+                <a:cs typeface="Arial" panose="020B0604020202020204" pitchFamily="34" charset="0"/>
+              </a:rPr>
+              <a:t>Recursive</a:t>
+            </a:r>
+            <a:r>
+              <a:rPr lang="en-US" sz="800">
+                <a:solidFill>
+                  <a:schemeClr val="tx1">
+                    <a:lumMod val="65000"/>
+                    <a:lumOff val="35000"/>
+                  </a:schemeClr>
+                </a:solidFill>
+                <a:latin typeface="Arial" panose="020B0604020202020204" pitchFamily="34" charset="0"/>
+                <a:cs typeface="Arial" panose="020B0604020202020204" pitchFamily="34" charset="0"/>
+              </a:rPr>
+              <a:t> : Splits along natural structure</a:t>
+            </a:r>
+          </a:p>
+          <a:p>
+            <a:r>
+              <a:rPr lang="en-US" sz="800" i="1" err="1">
+                <a:solidFill>
+                  <a:schemeClr val="tx1">
+                    <a:lumMod val="65000"/>
+                    <a:lumOff val="35000"/>
+                  </a:schemeClr>
+                </a:solidFill>
+                <a:latin typeface="Arial" panose="020B0604020202020204" pitchFamily="34" charset="0"/>
+                <a:cs typeface="Arial" panose="020B0604020202020204" pitchFamily="34" charset="0"/>
+              </a:rPr>
+              <a:t>Metadata_aware</a:t>
+            </a:r>
+            <a:r>
+              <a:rPr lang="en-US" sz="800" i="1">
+                <a:solidFill>
+                  <a:schemeClr val="tx1">
+                    <a:lumMod val="65000"/>
+                    <a:lumOff val="35000"/>
+                  </a:schemeClr>
+                </a:solidFill>
+                <a:latin typeface="Arial" panose="020B0604020202020204" pitchFamily="34" charset="0"/>
+                <a:cs typeface="Arial" panose="020B0604020202020204" pitchFamily="34" charset="0"/>
+              </a:rPr>
+              <a:t> </a:t>
+            </a:r>
+            <a:r>
+              <a:rPr lang="en-US" sz="800">
+                <a:solidFill>
+                  <a:schemeClr val="tx1">
+                    <a:lumMod val="65000"/>
+                    <a:lumOff val="35000"/>
+                  </a:schemeClr>
+                </a:solidFill>
+                <a:latin typeface="Arial" panose="020B0604020202020204" pitchFamily="34" charset="0"/>
+                <a:cs typeface="Arial" panose="020B0604020202020204" pitchFamily="34" charset="0"/>
+              </a:rPr>
+              <a:t>: Each chunk tagged with its section and page</a:t>
+            </a:r>
+          </a:p>
+          <a:p>
+            <a:r>
+              <a:rPr lang="en-US" sz="800" i="1">
+                <a:solidFill>
+                  <a:schemeClr val="tx1">
+                    <a:lumMod val="65000"/>
+                    <a:lumOff val="35000"/>
+                  </a:schemeClr>
+                </a:solidFill>
+                <a:latin typeface="Arial" panose="020B0604020202020204" pitchFamily="34" charset="0"/>
+                <a:cs typeface="Arial" panose="020B0604020202020204" pitchFamily="34" charset="0"/>
+              </a:rPr>
+              <a:t>Fixed : Equal-size pieces</a:t>
+            </a:r>
           </a:p>
         </p:txBody>
       </p:sp>
@@ -5147,6 +5857,7 @@
         <a:solidFill>
           <a:srgbClr val="1D252D"/>
         </a:solidFill>
+        <a:effectLst/>
       </p:bgPr>
     </p:bg>
     <p:spTree>
@@ -5184,11 +5895,11 @@
           <a:bodyPr wrap="square" lIns="0" tIns="0" rIns="0" bIns="0" rtlCol="0" anchor="ctr"/>
           <a:lstStyle/>
           <a:p>
-            <a:pPr indent="0" marL="0">
-              <a:buNone/>
-            </a:pPr>
-            <a:r>
-              <a:rPr lang="en-US" sz="1100" b="1" spc="200" kern="0" dirty="0">
+            <a:pPr marL="0" indent="0">
+              <a:buNone/>
+            </a:pPr>
+            <a:r>
+              <a:rPr lang="en-US" sz="1100" b="1" kern="0" spc="200">
                 <a:solidFill>
                   <a:srgbClr val="FD5000"/>
                 </a:solidFill>
@@ -5198,7 +5909,7 @@
               </a:rPr>
               <a:t>GROUNDING</a:t>
             </a:r>
-            <a:endParaRPr lang="en-US" sz="1100" dirty="0"/>
+            <a:endParaRPr lang="en-US" sz="1100"/>
           </a:p>
         </p:txBody>
       </p:sp>
@@ -5223,11 +5934,11 @@
           <a:bodyPr wrap="square" lIns="0" tIns="0" rIns="0" bIns="0" rtlCol="0" anchor="ctr"/>
           <a:lstStyle/>
           <a:p>
-            <a:pPr indent="0" marL="0">
-              <a:buNone/>
-            </a:pPr>
-            <a:r>
-              <a:rPr lang="en-US" sz="3000" b="1" dirty="0">
+            <a:pPr marL="0" indent="0">
+              <a:buNone/>
+            </a:pPr>
+            <a:r>
+              <a:rPr lang="en-US" sz="3000" b="1">
                 <a:solidFill>
                   <a:srgbClr val="FFFFFF"/>
                 </a:solidFill>
@@ -5237,7 +5948,7 @@
               </a:rPr>
               <a:t>Knowing when to say nothing</a:t>
             </a:r>
-            <a:endParaRPr lang="en-US" sz="3000" dirty="0"/>
+            <a:endParaRPr lang="en-US" sz="3000"/>
           </a:p>
         </p:txBody>
       </p:sp>
@@ -5262,11 +5973,11 @@
           <a:bodyPr wrap="square" lIns="0" tIns="0" rIns="0" bIns="0" rtlCol="0" anchor="ctr"/>
           <a:lstStyle/>
           <a:p>
-            <a:pPr indent="0" marL="0">
-              <a:buNone/>
-            </a:pPr>
-            <a:r>
-              <a:rPr lang="en-US" sz="1300" dirty="0">
+            <a:pPr marL="0" indent="0">
+              <a:buNone/>
+            </a:pPr>
+            <a:r>
+              <a:rPr lang="en-US" sz="1300">
                 <a:solidFill>
                   <a:srgbClr val="B9C0CA"/>
                 </a:solidFill>
@@ -5276,7 +5987,7 @@
               </a:rPr>
               <a:t>Score distributions, measured on our corpus:</a:t>
             </a:r>
-            <a:endParaRPr lang="en-US" sz="1300" dirty="0"/>
+            <a:endParaRPr lang="en-US" sz="1300"/>
           </a:p>
         </p:txBody>
       </p:sp>
@@ -5301,11 +6012,11 @@
           <a:bodyPr wrap="square" lIns="0" tIns="0" rIns="0" bIns="0" rtlCol="0" anchor="ctr"/>
           <a:lstStyle/>
           <a:p>
-            <a:pPr indent="0" marL="0">
-              <a:buNone/>
-            </a:pPr>
-            <a:r>
-              <a:rPr lang="en-US" sz="1300" dirty="0">
+            <a:pPr marL="0" indent="0">
+              <a:buNone/>
+            </a:pPr>
+            <a:r>
+              <a:rPr lang="en-US" sz="1300">
                 <a:solidFill>
                   <a:srgbClr val="FFFFFF"/>
                 </a:solidFill>
@@ -5315,7 +6026,7 @@
               </a:rPr>
               <a:t>Grounded questions</a:t>
             </a:r>
-            <a:endParaRPr lang="en-US" sz="1300" dirty="0"/>
+            <a:endParaRPr lang="en-US" sz="1300"/>
           </a:p>
         </p:txBody>
       </p:sp>
@@ -5340,11 +6051,11 @@
           <a:bodyPr wrap="square" lIns="0" tIns="0" rIns="0" bIns="0" rtlCol="0" anchor="ctr"/>
           <a:lstStyle/>
           <a:p>
-            <a:pPr indent="0" marL="0">
-              <a:buNone/>
-            </a:pPr>
-            <a:r>
-              <a:rPr lang="en-US" sz="1500" b="1" dirty="0">
+            <a:pPr marL="0" indent="0">
+              <a:buNone/>
+            </a:pPr>
+            <a:r>
+              <a:rPr lang="en-US" sz="1500" b="1">
                 <a:solidFill>
                   <a:srgbClr val="FD5000"/>
                 </a:solidFill>
@@ -5354,7 +6065,7 @@
               </a:rPr>
               <a:t>0.643  —  0.847</a:t>
             </a:r>
-            <a:endParaRPr lang="en-US" sz="1500" dirty="0"/>
+            <a:endParaRPr lang="en-US" sz="1500"/>
           </a:p>
         </p:txBody>
       </p:sp>
@@ -5379,11 +6090,11 @@
           <a:bodyPr wrap="square" lIns="0" tIns="0" rIns="0" bIns="0" rtlCol="0" anchor="ctr"/>
           <a:lstStyle/>
           <a:p>
-            <a:pPr indent="0" marL="0">
-              <a:buNone/>
-            </a:pPr>
-            <a:r>
-              <a:rPr lang="en-US" sz="1300" dirty="0">
+            <a:pPr marL="0" indent="0">
+              <a:buNone/>
+            </a:pPr>
+            <a:r>
+              <a:rPr lang="en-US" sz="1300">
                 <a:solidFill>
                   <a:srgbClr val="FFFFFF"/>
                 </a:solidFill>
@@ -5393,7 +6104,7 @@
               </a:rPr>
               <a:t>Adversarial questions</a:t>
             </a:r>
-            <a:endParaRPr lang="en-US" sz="1300" dirty="0"/>
+            <a:endParaRPr lang="en-US" sz="1300"/>
           </a:p>
         </p:txBody>
       </p:sp>
@@ -5418,11 +6129,11 @@
           <a:bodyPr wrap="square" lIns="0" tIns="0" rIns="0" bIns="0" rtlCol="0" anchor="ctr"/>
           <a:lstStyle/>
           <a:p>
-            <a:pPr indent="0" marL="0">
-              <a:buNone/>
-            </a:pPr>
-            <a:r>
-              <a:rPr lang="en-US" sz="1500" b="1" dirty="0">
+            <a:pPr marL="0" indent="0">
+              <a:buNone/>
+            </a:pPr>
+            <a:r>
+              <a:rPr lang="en-US" sz="1500" b="1">
                 <a:solidFill>
                   <a:srgbClr val="9BA6B2"/>
                 </a:solidFill>
@@ -5432,7 +6143,7 @@
               </a:rPr>
               <a:t>0.500  —  0.673</a:t>
             </a:r>
-            <a:endParaRPr lang="en-US" sz="1500" dirty="0"/>
+            <a:endParaRPr lang="en-US" sz="1500"/>
           </a:p>
         </p:txBody>
       </p:sp>
@@ -5462,6 +6173,13 @@
             <a:prstDash val="solid"/>
           </a:ln>
         </p:spPr>
+        <p:txBody>
+          <a:bodyPr/>
+          <a:lstStyle/>
+          <a:p>
+            <a:endParaRPr lang="en-US"/>
+          </a:p>
+        </p:txBody>
       </p:sp>
       <p:sp>
         <p:nvSpPr>
@@ -5484,11 +6202,11 @@
           <a:bodyPr wrap="square" lIns="0" tIns="0" rIns="0" bIns="0" rtlCol="0" anchor="ctr"/>
           <a:lstStyle/>
           <a:p>
-            <a:pPr algn="ctr" indent="0" marL="0">
-              <a:buNone/>
-            </a:pPr>
-            <a:r>
-              <a:rPr lang="en-US" sz="3600" b="1" dirty="0">
+            <a:pPr marL="0" indent="0" algn="ctr">
+              <a:buNone/>
+            </a:pPr>
+            <a:r>
+              <a:rPr lang="en-US" sz="3600" b="1">
                 <a:solidFill>
                   <a:srgbClr val="FD5000"/>
                 </a:solidFill>
@@ -5498,7 +6216,7 @@
               </a:rPr>
               <a:t>0.68</a:t>
             </a:r>
-            <a:endParaRPr lang="en-US" sz="3600" dirty="0"/>
+            <a:endParaRPr lang="en-US" sz="3600"/>
           </a:p>
         </p:txBody>
       </p:sp>
@@ -5523,11 +6241,11 @@
           <a:bodyPr wrap="square" lIns="0" tIns="0" rIns="0" bIns="0" rtlCol="0" anchor="ctr"/>
           <a:lstStyle/>
           <a:p>
-            <a:pPr algn="ctr" indent="0" marL="0">
-              <a:buNone/>
-            </a:pPr>
-            <a:r>
-              <a:rPr lang="en-US" sz="1050" dirty="0">
+            <a:pPr marL="0" indent="0" algn="ctr">
+              <a:buNone/>
+            </a:pPr>
+            <a:r>
+              <a:rPr lang="en-US" sz="1050">
                 <a:solidFill>
                   <a:srgbClr val="B9C0CA"/>
                 </a:solidFill>
@@ -5537,14 +6255,14 @@
               </a:rPr>
               <a:t>abstain floor</a:t>
             </a:r>
-            <a:endParaRPr lang="en-US" sz="1050" dirty="0"/>
-          </a:p>
-          <a:p>
-            <a:pPr algn="ctr" indent="0" marL="0">
-              <a:buNone/>
-            </a:pPr>
-            <a:r>
-              <a:rPr lang="en-US" sz="1050" dirty="0">
+            <a:endParaRPr lang="en-US" sz="1050"/>
+          </a:p>
+          <a:p>
+            <a:pPr marL="0" indent="0" algn="ctr">
+              <a:buNone/>
+            </a:pPr>
+            <a:r>
+              <a:rPr lang="en-US" sz="1050">
                 <a:solidFill>
                   <a:srgbClr val="B9C0CA"/>
                 </a:solidFill>
@@ -5554,7 +6272,7 @@
               </a:rPr>
               <a:t>set just above the adversarial ceiling</a:t>
             </a:r>
-            <a:endParaRPr lang="en-US" sz="1050" dirty="0"/>
+            <a:endParaRPr lang="en-US" sz="1050"/>
           </a:p>
         </p:txBody>
       </p:sp>
@@ -5579,11 +6297,11 @@
           <a:bodyPr wrap="square" lIns="0" tIns="0" rIns="0" bIns="0" rtlCol="0" anchor="ctr"/>
           <a:lstStyle/>
           <a:p>
-            <a:pPr indent="0" marL="0">
-              <a:buNone/>
-            </a:pPr>
-            <a:r>
-              <a:rPr lang="en-US" sz="1400" b="1" dirty="0">
+            <a:pPr marL="0" indent="0">
+              <a:buNone/>
+            </a:pPr>
+            <a:r>
+              <a:rPr lang="en-US" sz="1400" b="1">
                 <a:solidFill>
                   <a:srgbClr val="FFFFFF"/>
                 </a:solidFill>
@@ -5593,7 +6311,7 @@
               </a:rPr>
               <a:t>The honest part: these ranges overlap.</a:t>
             </a:r>
-            <a:endParaRPr lang="en-US" sz="1400" dirty="0"/>
+            <a:endParaRPr lang="en-US" sz="1400"/>
           </a:p>
         </p:txBody>
       </p:sp>
@@ -5618,11 +6336,11 @@
           <a:bodyPr wrap="square" lIns="0" tIns="0" rIns="0" bIns="0" rtlCol="0" anchor="ctr"/>
           <a:lstStyle/>
           <a:p>
-            <a:pPr indent="0" marL="0">
-              <a:buNone/>
-            </a:pPr>
-            <a:r>
-              <a:rPr lang="en-US" sz="1200" dirty="0">
+            <a:pPr marL="0" indent="0">
+              <a:buNone/>
+            </a:pPr>
+            <a:r>
+              <a:rPr lang="en-US" sz="1200">
                 <a:solidFill>
                   <a:srgbClr val="B9C0CA"/>
                 </a:solidFill>
@@ -5632,7 +6350,7 @@
               </a:rPr>
               <a:t>An adversarial question can score 0.673 while a real one scores 0.643. No threshold separates them cleanly — every floor trades false refusals against false answers. We chose the value, and we can defend why.</a:t>
             </a:r>
-            <a:endParaRPr lang="en-US" sz="1200" dirty="0"/>
+            <a:endParaRPr lang="en-US" sz="1200"/>
           </a:p>
         </p:txBody>
       </p:sp>
@@ -5657,11 +6375,11 @@
           <a:bodyPr wrap="square" lIns="0" tIns="0" rIns="0" bIns="0" rtlCol="0" anchor="ctr"/>
           <a:lstStyle/>
           <a:p>
-            <a:pPr indent="0" marL="0">
-              <a:buNone/>
-            </a:pPr>
-            <a:r>
-              <a:rPr lang="en-US" sz="1150" i="1" dirty="0">
+            <a:pPr marL="0" indent="0">
+              <a:buNone/>
+            </a:pPr>
+            <a:r>
+              <a:rPr lang="en-US" sz="1150" i="1">
                 <a:solidFill>
                   <a:srgbClr val="FD5000"/>
                 </a:solidFill>
@@ -5671,7 +6389,7 @@
               </a:rPr>
               <a:t>Live demo:  ask for alarm code Z-999  —  it does not exist  —  the system refuses instead of improvising.</a:t>
             </a:r>
-            <a:endParaRPr lang="en-US" sz="1150" dirty="0"/>
+            <a:endParaRPr lang="en-US" sz="1150"/>
           </a:p>
         </p:txBody>
       </p:sp>
@@ -5721,21 +6439,16 @@
           <a:bodyPr wrap="square" lIns="0" tIns="0" rIns="0" bIns="0" rtlCol="0" anchor="ctr"/>
           <a:lstStyle/>
           <a:p>
-            <a:pPr indent="0" marL="0">
-              <a:buNone/>
-            </a:pPr>
-            <a:r>
-              <a:rPr lang="en-US" sz="1100" b="1" spc="200" kern="0" dirty="0">
+            <a:r>
+              <a:rPr lang="en-US" sz="1100" b="1" kern="0" spc="200">
                 <a:solidFill>
                   <a:srgbClr val="FD5000"/>
                 </a:solidFill>
-                <a:latin typeface="Arial" pitchFamily="34" charset="0"/>
-                <a:ea typeface="Arial" pitchFamily="34" charset="-122"/>
-                <a:cs typeface="Arial" pitchFamily="34" charset="-120"/>
-              </a:rPr>
-              <a:t>TOOL USE</a:t>
-            </a:r>
-            <a:endParaRPr lang="en-US" sz="1100" dirty="0"/>
+                <a:latin typeface="Arial"/>
+                <a:cs typeface="Arial"/>
+              </a:rPr>
+              <a:t>TOOL USE, database query</a:t>
+            </a:r>
           </a:p>
         </p:txBody>
       </p:sp>
@@ -5760,21 +6473,24 @@
           <a:bodyPr wrap="square" lIns="0" tIns="0" rIns="0" bIns="0" rtlCol="0" anchor="ctr"/>
           <a:lstStyle/>
           <a:p>
-            <a:pPr indent="0" marL="0">
-              <a:buNone/>
-            </a:pPr>
-            <a:r>
-              <a:rPr lang="en-US" sz="3000" b="1" dirty="0">
+            <a:r>
+              <a:rPr lang="en-US" sz="3000" b="1">
                 <a:solidFill>
                   <a:srgbClr val="1D252D"/>
                 </a:solidFill>
-                <a:latin typeface="Arial" pitchFamily="34" charset="0"/>
-                <a:ea typeface="Arial" pitchFamily="34" charset="-122"/>
-                <a:cs typeface="Arial" pitchFamily="34" charset="-120"/>
-              </a:rPr>
-              <a:t>Numbers you can re-run</a:t>
-            </a:r>
-            <a:endParaRPr lang="en-US" sz="3000" dirty="0"/>
+                <a:latin typeface="Arial"/>
+                <a:cs typeface="Arial"/>
+              </a:rPr>
+              <a:t>Text-to-SQL telemetry agent</a:t>
+            </a:r>
+            <a:endParaRPr lang="en-US" sz="1100">
+              <a:solidFill>
+                <a:srgbClr val="1D252D"/>
+              </a:solidFill>
+              <a:latin typeface="Segoe UI"/>
+              <a:ea typeface="Calibri"/>
+              <a:cs typeface="Segoe UI"/>
+            </a:endParaRPr>
           </a:p>
         </p:txBody>
       </p:sp>
@@ -5799,11 +6515,11 @@
           <a:bodyPr wrap="square" lIns="0" tIns="0" rIns="0" bIns="0" rtlCol="0" anchor="ctr"/>
           <a:lstStyle/>
           <a:p>
-            <a:pPr indent="0" marL="0">
-              <a:buNone/>
-            </a:pPr>
-            <a:r>
-              <a:rPr lang="en-US" sz="1300" dirty="0">
+            <a:pPr marL="0" indent="0">
+              <a:buNone/>
+            </a:pPr>
+            <a:r>
+              <a:rPr lang="en-US" sz="1300">
                 <a:solidFill>
                   <a:srgbClr val="46555F"/>
                 </a:solidFill>
@@ -5813,7 +6529,7 @@
               </a:rPr>
               <a:t>2,372 rows of SQL Server session telemetry, loaded into an in-memory SQLite snapshot. Read-only whitelist.</a:t>
             </a:r>
-            <a:endParaRPr lang="en-US" sz="1300" dirty="0"/>
+            <a:endParaRPr lang="en-US" sz="1300"/>
           </a:p>
         </p:txBody>
       </p:sp>
@@ -5843,6 +6559,13 @@
             <a:prstDash val="solid"/>
           </a:ln>
         </p:spPr>
+        <p:txBody>
+          <a:bodyPr/>
+          <a:lstStyle/>
+          <a:p>
+            <a:endParaRPr lang="en-US"/>
+          </a:p>
+        </p:txBody>
       </p:sp>
       <p:sp>
         <p:nvSpPr>
@@ -5865,11 +6588,11 @@
           <a:bodyPr wrap="square" lIns="0" tIns="0" rIns="0" bIns="0" rtlCol="0" anchor="ctr"/>
           <a:lstStyle/>
           <a:p>
-            <a:pPr indent="0" marL="0">
-              <a:buNone/>
-            </a:pPr>
-            <a:r>
-              <a:rPr lang="en-US" sz="1200" b="1" dirty="0">
+            <a:pPr marL="0" indent="0">
+              <a:buNone/>
+            </a:pPr>
+            <a:r>
+              <a:rPr lang="en-US" sz="1200" b="1">
                 <a:solidFill>
                   <a:srgbClr val="FFFFFF"/>
                 </a:solidFill>
@@ -5879,7 +6602,7 @@
               </a:rPr>
               <a:t>“Which database used the most CPU in total?”</a:t>
             </a:r>
-            <a:endParaRPr lang="en-US" sz="1200" dirty="0"/>
+            <a:endParaRPr lang="en-US" sz="1200"/>
           </a:p>
         </p:txBody>
       </p:sp>
@@ -5904,11 +6627,11 @@
           <a:bodyPr wrap="square" lIns="0" tIns="0" rIns="0" bIns="0" rtlCol="0" anchor="ctr"/>
           <a:lstStyle/>
           <a:p>
-            <a:pPr indent="0" marL="0">
-              <a:buNone/>
-            </a:pPr>
-            <a:r>
-              <a:rPr lang="en-US" sz="1050" dirty="0">
+            <a:pPr marL="0" indent="0">
+              <a:buNone/>
+            </a:pPr>
+            <a:r>
+              <a:rPr lang="en-US" sz="1050">
                 <a:solidFill>
                   <a:srgbClr val="FD5000"/>
                 </a:solidFill>
@@ -5918,14 +6641,14 @@
               </a:rPr>
               <a:t>SELECT DB_NAME, SUM(CPU_TIME) AS total_cpu</a:t>
             </a:r>
-            <a:endParaRPr lang="en-US" sz="1050" dirty="0"/>
-          </a:p>
-          <a:p>
-            <a:pPr indent="0" marL="0">
-              <a:buNone/>
-            </a:pPr>
-            <a:r>
-              <a:rPr lang="en-US" sz="1050" dirty="0">
+            <a:endParaRPr lang="en-US" sz="1050"/>
+          </a:p>
+          <a:p>
+            <a:pPr marL="0" indent="0">
+              <a:buNone/>
+            </a:pPr>
+            <a:r>
+              <a:rPr lang="en-US" sz="1050">
                 <a:solidFill>
                   <a:srgbClr val="FD5000"/>
                 </a:solidFill>
@@ -5935,14 +6658,14 @@
               </a:rPr>
               <a:t>FROM sessions</a:t>
             </a:r>
-            <a:endParaRPr lang="en-US" sz="1050" dirty="0"/>
-          </a:p>
-          <a:p>
-            <a:pPr indent="0" marL="0">
-              <a:buNone/>
-            </a:pPr>
-            <a:r>
-              <a:rPr lang="en-US" sz="1050" dirty="0">
+            <a:endParaRPr lang="en-US" sz="1050"/>
+          </a:p>
+          <a:p>
+            <a:pPr marL="0" indent="0">
+              <a:buNone/>
+            </a:pPr>
+            <a:r>
+              <a:rPr lang="en-US" sz="1050">
                 <a:solidFill>
                   <a:srgbClr val="FD5000"/>
                 </a:solidFill>
@@ -5952,14 +6675,14 @@
               </a:rPr>
               <a:t>GROUP BY DB_NAME</a:t>
             </a:r>
-            <a:endParaRPr lang="en-US" sz="1050" dirty="0"/>
-          </a:p>
-          <a:p>
-            <a:pPr indent="0" marL="0">
-              <a:buNone/>
-            </a:pPr>
-            <a:r>
-              <a:rPr lang="en-US" sz="1050" dirty="0">
+            <a:endParaRPr lang="en-US" sz="1050"/>
+          </a:p>
+          <a:p>
+            <a:pPr marL="0" indent="0">
+              <a:buNone/>
+            </a:pPr>
+            <a:r>
+              <a:rPr lang="en-US" sz="1050">
                 <a:solidFill>
                   <a:srgbClr val="FD5000"/>
                 </a:solidFill>
@@ -5969,14 +6692,14 @@
               </a:rPr>
               <a:t>ORDER BY total_cpu DESC</a:t>
             </a:r>
-            <a:endParaRPr lang="en-US" sz="1050" dirty="0"/>
-          </a:p>
-          <a:p>
-            <a:pPr indent="0" marL="0">
-              <a:buNone/>
-            </a:pPr>
-            <a:r>
-              <a:rPr lang="en-US" sz="1050" dirty="0">
+            <a:endParaRPr lang="en-US" sz="1050"/>
+          </a:p>
+          <a:p>
+            <a:pPr marL="0" indent="0">
+              <a:buNone/>
+            </a:pPr>
+            <a:r>
+              <a:rPr lang="en-US" sz="1050">
                 <a:solidFill>
                   <a:srgbClr val="FD5000"/>
                 </a:solidFill>
@@ -5986,7 +6709,7 @@
               </a:rPr>
               <a:t>LIMIT 1;</a:t>
             </a:r>
-            <a:endParaRPr lang="en-US" sz="1050" dirty="0"/>
+            <a:endParaRPr lang="en-US" sz="1050"/>
           </a:p>
         </p:txBody>
       </p:sp>
@@ -6011,11 +6734,11 @@
           <a:bodyPr wrap="square" lIns="0" tIns="0" rIns="0" bIns="0" rtlCol="0" anchor="ctr"/>
           <a:lstStyle/>
           <a:p>
-            <a:pPr indent="0" marL="0">
-              <a:buNone/>
-            </a:pPr>
-            <a:r>
-              <a:rPr lang="en-US" sz="1150" b="1" dirty="0">
+            <a:pPr marL="0" indent="0">
+              <a:buNone/>
+            </a:pPr>
+            <a:r>
+              <a:rPr lang="en-US" sz="1150" b="1">
                 <a:solidFill>
                   <a:srgbClr val="FFFFFF"/>
                 </a:solidFill>
@@ -6025,7 +6748,7 @@
               </a:rPr>
               <a:t>db06  —  60,214,551 ms  across 1,242 sessions</a:t>
             </a:r>
-            <a:endParaRPr lang="en-US" sz="1150" dirty="0"/>
+            <a:endParaRPr lang="en-US" sz="1150"/>
           </a:p>
         </p:txBody>
       </p:sp>
@@ -6048,6 +6771,13 @@
           </a:solidFill>
           <a:ln/>
         </p:spPr>
+        <p:txBody>
+          <a:bodyPr/>
+          <a:lstStyle/>
+          <a:p>
+            <a:endParaRPr lang="en-US"/>
+          </a:p>
+        </p:txBody>
       </p:sp>
       <p:sp>
         <p:nvSpPr>
@@ -6070,11 +6800,11 @@
           <a:bodyPr wrap="square" lIns="0" tIns="0" rIns="0" bIns="0" rtlCol="0" anchor="ctr"/>
           <a:lstStyle/>
           <a:p>
-            <a:pPr algn="ctr" indent="0" marL="0">
-              <a:buNone/>
-            </a:pPr>
-            <a:r>
-              <a:rPr lang="en-US" sz="1300" b="1" dirty="0">
+            <a:pPr marL="0" indent="0" algn="ctr">
+              <a:buNone/>
+            </a:pPr>
+            <a:r>
+              <a:rPr lang="en-US" sz="1300" b="1">
                 <a:solidFill>
                   <a:srgbClr val="FFFFFF"/>
                 </a:solidFill>
@@ -6084,7 +6814,7 @@
               </a:rPr>
               <a:t>1</a:t>
             </a:r>
-            <a:endParaRPr lang="en-US" sz="1300" dirty="0"/>
+            <a:endParaRPr lang="en-US" sz="1300"/>
           </a:p>
         </p:txBody>
       </p:sp>
@@ -6109,11 +6839,11 @@
           <a:bodyPr wrap="square" lIns="0" tIns="0" rIns="0" bIns="0" rtlCol="0" anchor="ctr"/>
           <a:lstStyle/>
           <a:p>
-            <a:pPr indent="0" marL="0">
-              <a:buNone/>
-            </a:pPr>
-            <a:r>
-              <a:rPr lang="en-US" sz="1200" b="1" dirty="0">
+            <a:pPr marL="0" indent="0">
+              <a:buNone/>
+            </a:pPr>
+            <a:r>
+              <a:rPr lang="en-US" sz="1200" b="1">
                 <a:solidFill>
                   <a:srgbClr val="1D252D"/>
                 </a:solidFill>
@@ -6123,7 +6853,7 @@
               </a:rPr>
               <a:t>Every answer ships its SQL</a:t>
             </a:r>
-            <a:endParaRPr lang="en-US" sz="1200" dirty="0"/>
+            <a:endParaRPr lang="en-US" sz="1200"/>
           </a:p>
         </p:txBody>
       </p:sp>
@@ -6148,21 +6878,27 @@
           <a:bodyPr wrap="square" lIns="0" tIns="0" rIns="0" bIns="0" rtlCol="0" anchor="ctr"/>
           <a:lstStyle/>
           <a:p>
-            <a:pPr indent="0" marL="0">
-              <a:buNone/>
-            </a:pPr>
-            <a:r>
-              <a:rPr lang="en-US" sz="1050" dirty="0">
+            <a:pPr marL="0" indent="0">
+              <a:buNone/>
+            </a:pPr>
+            <a:r>
+              <a:rPr lang="en-US" sz="1050">
                 <a:solidFill>
                   <a:srgbClr val="46555F"/>
                 </a:solidFill>
-                <a:latin typeface="Arial" pitchFamily="34" charset="0"/>
-                <a:ea typeface="Arial" pitchFamily="34" charset="-122"/>
-                <a:cs typeface="Arial" pitchFamily="34" charset="-120"/>
-              </a:rPr>
-              <a:t>The number is auditable — re-run the query and check it yourself.</a:t>
-            </a:r>
-            <a:endParaRPr lang="en-US" sz="1050" dirty="0"/>
+                <a:latin typeface="Arial"/>
+                <a:ea typeface="Arial" pitchFamily="34" charset="-122"/>
+                <a:cs typeface="Arial"/>
+              </a:rPr>
+              <a:t>The number is auditable</a:t>
+            </a:r>
+            <a:endParaRPr lang="en-US" sz="1050">
+              <a:solidFill>
+                <a:srgbClr val="46555F"/>
+              </a:solidFill>
+              <a:latin typeface="Arial"/>
+              <a:cs typeface="Arial"/>
+            </a:endParaRPr>
           </a:p>
         </p:txBody>
       </p:sp>
@@ -6185,6 +6921,13 @@
           </a:solidFill>
           <a:ln/>
         </p:spPr>
+        <p:txBody>
+          <a:bodyPr/>
+          <a:lstStyle/>
+          <a:p>
+            <a:endParaRPr lang="en-US"/>
+          </a:p>
+        </p:txBody>
       </p:sp>
       <p:sp>
         <p:nvSpPr>
@@ -6207,11 +6950,11 @@
           <a:bodyPr wrap="square" lIns="0" tIns="0" rIns="0" bIns="0" rtlCol="0" anchor="ctr"/>
           <a:lstStyle/>
           <a:p>
-            <a:pPr algn="ctr" indent="0" marL="0">
-              <a:buNone/>
-            </a:pPr>
-            <a:r>
-              <a:rPr lang="en-US" sz="1300" b="1" dirty="0">
+            <a:pPr marL="0" indent="0" algn="ctr">
+              <a:buNone/>
+            </a:pPr>
+            <a:r>
+              <a:rPr lang="en-US" sz="1300" b="1">
                 <a:solidFill>
                   <a:srgbClr val="FFFFFF"/>
                 </a:solidFill>
@@ -6221,7 +6964,7 @@
               </a:rPr>
               <a:t>2</a:t>
             </a:r>
-            <a:endParaRPr lang="en-US" sz="1300" dirty="0"/>
+            <a:endParaRPr lang="en-US" sz="1300"/>
           </a:p>
         </p:txBody>
       </p:sp>
@@ -6246,11 +6989,11 @@
           <a:bodyPr wrap="square" lIns="0" tIns="0" rIns="0" bIns="0" rtlCol="0" anchor="ctr"/>
           <a:lstStyle/>
           <a:p>
-            <a:pPr indent="0" marL="0">
-              <a:buNone/>
-            </a:pPr>
-            <a:r>
-              <a:rPr lang="en-US" sz="1200" b="1" dirty="0">
+            <a:pPr marL="0" indent="0">
+              <a:buNone/>
+            </a:pPr>
+            <a:r>
+              <a:rPr lang="en-US" sz="1200" b="1">
                 <a:solidFill>
                   <a:srgbClr val="1D252D"/>
                 </a:solidFill>
@@ -6260,7 +7003,7 @@
               </a:rPr>
               <a:t>Read-only by construction</a:t>
             </a:r>
-            <a:endParaRPr lang="en-US" sz="1200" dirty="0"/>
+            <a:endParaRPr lang="en-US" sz="1200"/>
           </a:p>
         </p:txBody>
       </p:sp>
@@ -6285,11 +7028,11 @@
           <a:bodyPr wrap="square" lIns="0" tIns="0" rIns="0" bIns="0" rtlCol="0" anchor="ctr"/>
           <a:lstStyle/>
           <a:p>
-            <a:pPr indent="0" marL="0">
-              <a:buNone/>
-            </a:pPr>
-            <a:r>
-              <a:rPr lang="en-US" sz="1050" dirty="0">
+            <a:pPr marL="0" indent="0">
+              <a:buNone/>
+            </a:pPr>
+            <a:r>
+              <a:rPr lang="en-US" sz="1050">
                 <a:solidFill>
                   <a:srgbClr val="46555F"/>
                 </a:solidFill>
@@ -6299,7 +7042,7 @@
               </a:rPr>
               <a:t>A whitelist rejects anything that is not a SELECT.</a:t>
             </a:r>
-            <a:endParaRPr lang="en-US" sz="1050" dirty="0"/>
+            <a:endParaRPr lang="en-US" sz="1050"/>
           </a:p>
         </p:txBody>
       </p:sp>
@@ -6322,6 +7065,13 @@
           </a:solidFill>
           <a:ln/>
         </p:spPr>
+        <p:txBody>
+          <a:bodyPr/>
+          <a:lstStyle/>
+          <a:p>
+            <a:endParaRPr lang="en-US"/>
+          </a:p>
+        </p:txBody>
       </p:sp>
       <p:sp>
         <p:nvSpPr>
@@ -6344,11 +7094,11 @@
           <a:bodyPr wrap="square" lIns="0" tIns="0" rIns="0" bIns="0" rtlCol="0" anchor="ctr"/>
           <a:lstStyle/>
           <a:p>
-            <a:pPr algn="ctr" indent="0" marL="0">
-              <a:buNone/>
-            </a:pPr>
-            <a:r>
-              <a:rPr lang="en-US" sz="1300" b="1" dirty="0">
+            <a:pPr marL="0" indent="0" algn="ctr">
+              <a:buNone/>
+            </a:pPr>
+            <a:r>
+              <a:rPr lang="en-US" sz="1300" b="1">
                 <a:solidFill>
                   <a:srgbClr val="FFFFFF"/>
                 </a:solidFill>
@@ -6358,7 +7108,7 @@
               </a:rPr>
               <a:t>3</a:t>
             </a:r>
-            <a:endParaRPr lang="en-US" sz="1300" dirty="0"/>
+            <a:endParaRPr lang="en-US" sz="1300"/>
           </a:p>
         </p:txBody>
       </p:sp>
@@ -6383,11 +7133,11 @@
           <a:bodyPr wrap="square" lIns="0" tIns="0" rIns="0" bIns="0" rtlCol="0" anchor="ctr"/>
           <a:lstStyle/>
           <a:p>
-            <a:pPr indent="0" marL="0">
-              <a:buNone/>
-            </a:pPr>
-            <a:r>
-              <a:rPr lang="en-US" sz="1200" b="1" dirty="0">
+            <a:pPr marL="0" indent="0">
+              <a:buNone/>
+            </a:pPr>
+            <a:r>
+              <a:rPr lang="en-US" sz="1200" b="1">
                 <a:solidFill>
                   <a:srgbClr val="1D252D"/>
                 </a:solidFill>
@@ -6397,7 +7147,7 @@
               </a:rPr>
               <a:t>Two-layer test suite</a:t>
             </a:r>
-            <a:endParaRPr lang="en-US" sz="1200" dirty="0"/>
+            <a:endParaRPr lang="en-US" sz="1200"/>
           </a:p>
         </p:txBody>
       </p:sp>
@@ -6422,11 +7172,11 @@
           <a:bodyPr wrap="square" lIns="0" tIns="0" rIns="0" bIns="0" rtlCol="0" anchor="ctr"/>
           <a:lstStyle/>
           <a:p>
-            <a:pPr indent="0" marL="0">
-              <a:buNone/>
-            </a:pPr>
-            <a:r>
-              <a:rPr lang="en-US" sz="1050" dirty="0">
+            <a:pPr marL="0" indent="0">
+              <a:buNone/>
+            </a:pPr>
+            <a:r>
+              <a:rPr lang="en-US" sz="1050">
                 <a:solidFill>
                   <a:srgbClr val="46555F"/>
                 </a:solidFill>
@@ -6436,7 +7186,7 @@
               </a:rPr>
               <a:t>44 deterministic tests with no LLM; 46 end-to-end with one.</a:t>
             </a:r>
-            <a:endParaRPr lang="en-US" sz="1050" dirty="0"/>
+            <a:endParaRPr lang="en-US" sz="1050"/>
           </a:p>
         </p:txBody>
       </p:sp>
@@ -6461,21 +7211,16 @@
           <a:bodyPr wrap="square" lIns="0" tIns="0" rIns="0" bIns="0" rtlCol="0" anchor="ctr"/>
           <a:lstStyle/>
           <a:p>
-            <a:pPr indent="0" marL="0">
-              <a:buNone/>
-            </a:pPr>
-            <a:r>
-              <a:rPr lang="en-US" sz="1100" i="1" dirty="0">
-                <a:solidFill>
-                  <a:srgbClr val="1D252D"/>
-                </a:solidFill>
-                <a:latin typeface="Arial" pitchFamily="34" charset="0"/>
-                <a:ea typeface="Arial" pitchFamily="34" charset="-122"/>
-                <a:cs typeface="Arial" pitchFamily="34" charset="-120"/>
-              </a:rPr>
-              <a:t>Finding: qwen2.5:3b scored 45/46 — it invented a WHERE clause and returned 28.6M instead of 60.2M. Small local models are weak at SQL; we route this path to a stronger model.</a:t>
-            </a:r>
-            <a:endParaRPr lang="en-US" sz="1100" dirty="0"/>
+            <a:pPr marL="0" indent="0">
+              <a:buNone/>
+            </a:pPr>
+            <a:endParaRPr lang="en-US" sz="1100" i="1">
+              <a:solidFill>
+                <a:srgbClr val="1D252D"/>
+              </a:solidFill>
+              <a:latin typeface="Arial"/>
+              <a:cs typeface="Arial"/>
+            </a:endParaRPr>
           </a:p>
         </p:txBody>
       </p:sp>
@@ -6525,21 +7270,18 @@
           <a:bodyPr wrap="square" lIns="0" tIns="0" rIns="0" bIns="0" rtlCol="0" anchor="ctr"/>
           <a:lstStyle/>
           <a:p>
-            <a:pPr indent="0" marL="0">
-              <a:buNone/>
-            </a:pPr>
-            <a:r>
-              <a:rPr lang="en-US" sz="1100" b="1" spc="200" kern="0" dirty="0">
+            <a:r>
+              <a:rPr lang="en-US" sz="1100" b="1" kern="0" spc="200">
                 <a:solidFill>
                   <a:srgbClr val="FD5000"/>
                 </a:solidFill>
-                <a:latin typeface="Arial" pitchFamily="34" charset="0"/>
-                <a:ea typeface="Arial" pitchFamily="34" charset="-122"/>
-                <a:cs typeface="Arial" pitchFamily="34" charset="-120"/>
-              </a:rPr>
-              <a:t>DEPLOYMENT</a:t>
-            </a:r>
-            <a:endParaRPr lang="en-US" sz="1100" dirty="0"/>
+                <a:latin typeface="Arial"/>
+                <a:ea typeface="Arial" pitchFamily="34" charset="-122"/>
+                <a:cs typeface="Arial"/>
+              </a:rPr>
+              <a:t>LOCAL LLM, DEPLOYMENT</a:t>
+            </a:r>
+            <a:endParaRPr lang="en-US" sz="1100"/>
           </a:p>
         </p:txBody>
       </p:sp>
@@ -6564,11 +7306,11 @@
           <a:bodyPr wrap="square" lIns="0" tIns="0" rIns="0" bIns="0" rtlCol="0" anchor="ctr"/>
           <a:lstStyle/>
           <a:p>
-            <a:pPr indent="0" marL="0">
-              <a:buNone/>
-            </a:pPr>
-            <a:r>
-              <a:rPr lang="en-US" sz="3000" b="1" dirty="0">
+            <a:pPr marL="0" indent="0">
+              <a:buNone/>
+            </a:pPr>
+            <a:r>
+              <a:rPr lang="en-US" sz="3000" b="1">
                 <a:solidFill>
                   <a:srgbClr val="1D252D"/>
                 </a:solidFill>
@@ -6578,7 +7320,7 @@
               </a:rPr>
               <a:t>Runs offline. Or on any model you own.</a:t>
             </a:r>
-            <a:endParaRPr lang="en-US" sz="3000" dirty="0"/>
+            <a:endParaRPr lang="en-US" sz="3000"/>
           </a:p>
         </p:txBody>
       </p:sp>
@@ -6608,6 +7350,13 @@
             <a:prstDash val="solid"/>
           </a:ln>
         </p:spPr>
+        <p:txBody>
+          <a:bodyPr/>
+          <a:lstStyle/>
+          <a:p>
+            <a:endParaRPr lang="en-US"/>
+          </a:p>
+        </p:txBody>
       </p:sp>
       <p:sp>
         <p:nvSpPr>
@@ -6630,11 +7379,11 @@
           <a:bodyPr wrap="square" lIns="0" tIns="0" rIns="0" bIns="0" rtlCol="0" anchor="ctr"/>
           <a:lstStyle/>
           <a:p>
-            <a:pPr algn="ctr" indent="0" marL="0">
-              <a:buNone/>
-            </a:pPr>
-            <a:r>
-              <a:rPr lang="en-US" sz="1200" b="1" dirty="0">
+            <a:pPr marL="0" indent="0" algn="ctr">
+              <a:buNone/>
+            </a:pPr>
+            <a:r>
+              <a:rPr lang="en-US" sz="1200" b="1">
                 <a:solidFill>
                   <a:srgbClr val="FFFFFF"/>
                 </a:solidFill>
@@ -6644,7 +7393,7 @@
               </a:rPr>
               <a:t>Ollama</a:t>
             </a:r>
-            <a:endParaRPr lang="en-US" sz="1200" dirty="0"/>
+            <a:endParaRPr lang="en-US" sz="1200"/>
           </a:p>
         </p:txBody>
       </p:sp>
@@ -6674,6 +7423,13 @@
             <a:prstDash val="solid"/>
           </a:ln>
         </p:spPr>
+        <p:txBody>
+          <a:bodyPr/>
+          <a:lstStyle/>
+          <a:p>
+            <a:endParaRPr lang="en-US"/>
+          </a:p>
+        </p:txBody>
       </p:sp>
       <p:sp>
         <p:nvSpPr>
@@ -6696,11 +7452,11 @@
           <a:bodyPr wrap="square" lIns="0" tIns="0" rIns="0" bIns="0" rtlCol="0" anchor="ctr"/>
           <a:lstStyle/>
           <a:p>
-            <a:pPr algn="ctr" indent="0" marL="0">
-              <a:buNone/>
-            </a:pPr>
-            <a:r>
-              <a:rPr lang="en-US" sz="1200" b="1" dirty="0">
+            <a:pPr marL="0" indent="0" algn="ctr">
+              <a:buNone/>
+            </a:pPr>
+            <a:r>
+              <a:rPr lang="en-US" sz="1200" b="1">
                 <a:solidFill>
                   <a:srgbClr val="FFFFFF"/>
                 </a:solidFill>
@@ -6710,7 +7466,7 @@
               </a:rPr>
               <a:t>LM Studio</a:t>
             </a:r>
-            <a:endParaRPr lang="en-US" sz="1200" dirty="0"/>
+            <a:endParaRPr lang="en-US" sz="1200"/>
           </a:p>
         </p:txBody>
       </p:sp>
@@ -6740,6 +7496,13 @@
             <a:prstDash val="solid"/>
           </a:ln>
         </p:spPr>
+        <p:txBody>
+          <a:bodyPr/>
+          <a:lstStyle/>
+          <a:p>
+            <a:endParaRPr lang="en-US"/>
+          </a:p>
+        </p:txBody>
       </p:sp>
       <p:sp>
         <p:nvSpPr>
@@ -6762,11 +7525,11 @@
           <a:bodyPr wrap="square" lIns="0" tIns="0" rIns="0" bIns="0" rtlCol="0" anchor="ctr"/>
           <a:lstStyle/>
           <a:p>
-            <a:pPr algn="ctr" indent="0" marL="0">
-              <a:buNone/>
-            </a:pPr>
-            <a:r>
-              <a:rPr lang="en-US" sz="1200" b="1" dirty="0">
+            <a:pPr marL="0" indent="0" algn="ctr">
+              <a:buNone/>
+            </a:pPr>
+            <a:r>
+              <a:rPr lang="en-US" sz="1200" b="1">
                 <a:solidFill>
                   <a:srgbClr val="1D252D"/>
                 </a:solidFill>
@@ -6776,7 +7539,7 @@
               </a:rPr>
               <a:t>OpenAI</a:t>
             </a:r>
-            <a:endParaRPr lang="en-US" sz="1200" dirty="0"/>
+            <a:endParaRPr lang="en-US" sz="1200"/>
           </a:p>
         </p:txBody>
       </p:sp>
@@ -6806,6 +7569,13 @@
             <a:prstDash val="solid"/>
           </a:ln>
         </p:spPr>
+        <p:txBody>
+          <a:bodyPr/>
+          <a:lstStyle/>
+          <a:p>
+            <a:endParaRPr lang="en-US"/>
+          </a:p>
+        </p:txBody>
       </p:sp>
       <p:sp>
         <p:nvSpPr>
@@ -6828,11 +7598,11 @@
           <a:bodyPr wrap="square" lIns="0" tIns="0" rIns="0" bIns="0" rtlCol="0" anchor="ctr"/>
           <a:lstStyle/>
           <a:p>
-            <a:pPr algn="ctr" indent="0" marL="0">
-              <a:buNone/>
-            </a:pPr>
-            <a:r>
-              <a:rPr lang="en-US" sz="1200" b="1" dirty="0">
+            <a:pPr marL="0" indent="0" algn="ctr">
+              <a:buNone/>
+            </a:pPr>
+            <a:r>
+              <a:rPr lang="en-US" sz="1200" b="1">
                 <a:solidFill>
                   <a:srgbClr val="1D252D"/>
                 </a:solidFill>
@@ -6842,7 +7612,7 @@
               </a:rPr>
               <a:t>Anthropic</a:t>
             </a:r>
-            <a:endParaRPr lang="en-US" sz="1200" dirty="0"/>
+            <a:endParaRPr lang="en-US" sz="1200"/>
           </a:p>
         </p:txBody>
       </p:sp>
@@ -6872,6 +7642,13 @@
             <a:prstDash val="solid"/>
           </a:ln>
         </p:spPr>
+        <p:txBody>
+          <a:bodyPr/>
+          <a:lstStyle/>
+          <a:p>
+            <a:endParaRPr lang="en-US"/>
+          </a:p>
+        </p:txBody>
       </p:sp>
       <p:sp>
         <p:nvSpPr>
@@ -6894,11 +7671,11 @@
           <a:bodyPr wrap="square" lIns="0" tIns="0" rIns="0" bIns="0" rtlCol="0" anchor="ctr"/>
           <a:lstStyle/>
           <a:p>
-            <a:pPr algn="ctr" indent="0" marL="0">
-              <a:buNone/>
-            </a:pPr>
-            <a:r>
-              <a:rPr lang="en-US" sz="1200" b="1" dirty="0">
+            <a:pPr marL="0" indent="0" algn="ctr">
+              <a:buNone/>
+            </a:pPr>
+            <a:r>
+              <a:rPr lang="en-US" sz="1200" b="1">
                 <a:solidFill>
                   <a:srgbClr val="1D252D"/>
                 </a:solidFill>
@@ -6908,7 +7685,7 @@
               </a:rPr>
               <a:t>GitHub Copilot</a:t>
             </a:r>
-            <a:endParaRPr lang="en-US" sz="1200" dirty="0"/>
+            <a:endParaRPr lang="en-US" sz="1200"/>
           </a:p>
         </p:txBody>
       </p:sp>
@@ -6938,6 +7715,13 @@
             <a:prstDash val="solid"/>
           </a:ln>
         </p:spPr>
+        <p:txBody>
+          <a:bodyPr/>
+          <a:lstStyle/>
+          <a:p>
+            <a:endParaRPr lang="en-US"/>
+          </a:p>
+        </p:txBody>
       </p:sp>
       <p:sp>
         <p:nvSpPr>
@@ -6960,11 +7744,11 @@
           <a:bodyPr wrap="square" lIns="0" tIns="0" rIns="0" bIns="0" rtlCol="0" anchor="ctr"/>
           <a:lstStyle/>
           <a:p>
-            <a:pPr algn="ctr" indent="0" marL="0">
-              <a:buNone/>
-            </a:pPr>
-            <a:r>
-              <a:rPr lang="en-US" sz="1200" b="1" dirty="0">
+            <a:pPr marL="0" indent="0" algn="ctr">
+              <a:buNone/>
+            </a:pPr>
+            <a:r>
+              <a:rPr lang="en-US" sz="1200" b="1">
                 <a:solidFill>
                   <a:srgbClr val="1D252D"/>
                 </a:solidFill>
@@ -6974,7 +7758,7 @@
               </a:rPr>
               <a:t>Retrieval-only</a:t>
             </a:r>
-            <a:endParaRPr lang="en-US" sz="1200" dirty="0"/>
+            <a:endParaRPr lang="en-US" sz="1200"/>
           </a:p>
         </p:txBody>
       </p:sp>
@@ -6986,7 +7770,7 @@
         </p:nvSpPr>
         <p:spPr>
           <a:xfrm>
-            <a:off x="502920" y="2450592"/>
+            <a:off x="551216" y="4334128"/>
             <a:ext cx="8138160" cy="274320"/>
           </a:xfrm>
           <a:prstGeom prst="rect">
@@ -6999,21 +7783,23 @@
           <a:bodyPr wrap="square" lIns="0" tIns="0" rIns="0" bIns="0" rtlCol="0" anchor="ctr"/>
           <a:lstStyle/>
           <a:p>
-            <a:pPr indent="0" marL="0">
-              <a:buNone/>
-            </a:pPr>
-            <a:r>
-              <a:rPr lang="en-US" sz="1150" i="1" dirty="0">
+            <a:r>
+              <a:rPr lang="en-US" sz="1400">
                 <a:solidFill>
                   <a:srgbClr val="46555F"/>
                 </a:solidFill>
-                <a:latin typeface="Arial" pitchFamily="34" charset="0"/>
-                <a:ea typeface="Arial" pitchFamily="34" charset="-122"/>
-                <a:cs typeface="Arial" pitchFamily="34" charset="-120"/>
-              </a:rPr>
-              <a:t>Local-first (highlighted) — factory documents never have to leave the site.</a:t>
-            </a:r>
-            <a:endParaRPr lang="en-US" sz="1150" dirty="0"/>
+                <a:ea typeface="+mn-lt"/>
+                <a:cs typeface="+mn-lt"/>
+              </a:rPr>
+              <a:t>Deployment : Container build, cross-platform launchers, port-collision guard, public GitHub repository</a:t>
+            </a:r>
+            <a:endParaRPr lang="en-US" sz="1400" i="1">
+              <a:solidFill>
+                <a:srgbClr val="46555F"/>
+              </a:solidFill>
+              <a:latin typeface="Arial"/>
+              <a:cs typeface="Arial"/>
+            </a:endParaRPr>
           </a:p>
         </p:txBody>
       </p:sp>
@@ -7025,7 +7811,7 @@
         </p:nvSpPr>
         <p:spPr>
           <a:xfrm>
-            <a:off x="502920" y="2889504"/>
+            <a:off x="502920" y="2615828"/>
             <a:ext cx="310896" cy="310896"/>
           </a:xfrm>
           <a:prstGeom prst="ellipse">
@@ -7036,6 +7822,13 @@
           </a:solidFill>
           <a:ln/>
         </p:spPr>
+        <p:txBody>
+          <a:bodyPr/>
+          <a:lstStyle/>
+          <a:p>
+            <a:endParaRPr lang="en-US"/>
+          </a:p>
+        </p:txBody>
       </p:sp>
       <p:sp>
         <p:nvSpPr>
@@ -7045,7 +7838,7 @@
         </p:nvSpPr>
         <p:spPr>
           <a:xfrm>
-            <a:off x="502920" y="2889504"/>
+            <a:off x="502920" y="2615828"/>
             <a:ext cx="310896" cy="310896"/>
           </a:xfrm>
           <a:prstGeom prst="rect">
@@ -7058,11 +7851,11 @@
           <a:bodyPr wrap="square" lIns="0" tIns="0" rIns="0" bIns="0" rtlCol="0" anchor="ctr"/>
           <a:lstStyle/>
           <a:p>
-            <a:pPr algn="ctr" indent="0" marL="0">
-              <a:buNone/>
-            </a:pPr>
-            <a:r>
-              <a:rPr lang="en-US" sz="1300" b="1" dirty="0">
+            <a:pPr marL="0" indent="0" algn="ctr">
+              <a:buNone/>
+            </a:pPr>
+            <a:r>
+              <a:rPr lang="en-US" sz="1300" b="1">
                 <a:solidFill>
                   <a:srgbClr val="FFFFFF"/>
                 </a:solidFill>
@@ -7072,7 +7865,7 @@
               </a:rPr>
               <a:t>1</a:t>
             </a:r>
-            <a:endParaRPr lang="en-US" sz="1300" dirty="0"/>
+            <a:endParaRPr lang="en-US" sz="1300"/>
           </a:p>
         </p:txBody>
       </p:sp>
@@ -7084,7 +7877,7 @@
         </p:nvSpPr>
         <p:spPr>
           <a:xfrm>
-            <a:off x="932688" y="2871216"/>
+            <a:off x="932688" y="2597540"/>
             <a:ext cx="2377440" cy="237744"/>
           </a:xfrm>
           <a:prstGeom prst="rect">
@@ -7097,11 +7890,11 @@
           <a:bodyPr wrap="square" lIns="0" tIns="0" rIns="0" bIns="0" rtlCol="0" anchor="ctr"/>
           <a:lstStyle/>
           <a:p>
-            <a:pPr indent="0" marL="0">
-              <a:buNone/>
-            </a:pPr>
-            <a:r>
-              <a:rPr lang="en-US" sz="1150" b="1" dirty="0">
+            <a:pPr marL="0" indent="0">
+              <a:buNone/>
+            </a:pPr>
+            <a:r>
+              <a:rPr lang="en-US" sz="1150" b="1">
                 <a:solidFill>
                   <a:srgbClr val="1D252D"/>
                 </a:solidFill>
@@ -7111,7 +7904,7 @@
               </a:rPr>
               <a:t>Live model discovery</a:t>
             </a:r>
-            <a:endParaRPr lang="en-US" sz="1150" dirty="0"/>
+            <a:endParaRPr lang="en-US" sz="1150"/>
           </a:p>
         </p:txBody>
       </p:sp>
@@ -7123,7 +7916,7 @@
         </p:nvSpPr>
         <p:spPr>
           <a:xfrm>
-            <a:off x="2880360" y="2871216"/>
+            <a:off x="3049395" y="2533146"/>
             <a:ext cx="5760720" cy="475488"/>
           </a:xfrm>
           <a:prstGeom prst="rect">
@@ -7136,11 +7929,11 @@
           <a:bodyPr wrap="square" lIns="0" tIns="0" rIns="0" bIns="0" rtlCol="0" anchor="ctr"/>
           <a:lstStyle/>
           <a:p>
-            <a:pPr indent="0" marL="0">
-              <a:buNone/>
-            </a:pPr>
-            <a:r>
-              <a:rPr lang="en-US" sz="1050" dirty="0">
+            <a:pPr marL="0" indent="0">
+              <a:buNone/>
+            </a:pPr>
+            <a:r>
+              <a:rPr lang="en-US" sz="1050">
                 <a:solidFill>
                   <a:srgbClr val="46555F"/>
                 </a:solidFill>
@@ -7150,7 +7943,7 @@
               </a:rPr>
               <a:t>Model lists come from each provider's API — never hardcoded. Copilot exposed 38 models, OpenAI 73.</a:t>
             </a:r>
-            <a:endParaRPr lang="en-US" sz="1050" dirty="0"/>
+            <a:endParaRPr lang="en-US" sz="1050"/>
           </a:p>
         </p:txBody>
       </p:sp>
@@ -7162,7 +7955,7 @@
         </p:nvSpPr>
         <p:spPr>
           <a:xfrm>
-            <a:off x="502920" y="3456432"/>
+            <a:off x="502920" y="3182756"/>
             <a:ext cx="310896" cy="310896"/>
           </a:xfrm>
           <a:prstGeom prst="ellipse">
@@ -7173,6 +7966,13 @@
           </a:solidFill>
           <a:ln/>
         </p:spPr>
+        <p:txBody>
+          <a:bodyPr/>
+          <a:lstStyle/>
+          <a:p>
+            <a:endParaRPr lang="en-US"/>
+          </a:p>
+        </p:txBody>
       </p:sp>
       <p:sp>
         <p:nvSpPr>
@@ -7182,7 +7982,7 @@
         </p:nvSpPr>
         <p:spPr>
           <a:xfrm>
-            <a:off x="502920" y="3456432"/>
+            <a:off x="502920" y="3182756"/>
             <a:ext cx="310896" cy="310896"/>
           </a:xfrm>
           <a:prstGeom prst="rect">
@@ -7195,11 +7995,11 @@
           <a:bodyPr wrap="square" lIns="0" tIns="0" rIns="0" bIns="0" rtlCol="0" anchor="ctr"/>
           <a:lstStyle/>
           <a:p>
-            <a:pPr algn="ctr" indent="0" marL="0">
-              <a:buNone/>
-            </a:pPr>
-            <a:r>
-              <a:rPr lang="en-US" sz="1300" b="1" dirty="0">
+            <a:pPr marL="0" indent="0" algn="ctr">
+              <a:buNone/>
+            </a:pPr>
+            <a:r>
+              <a:rPr lang="en-US" sz="1300" b="1">
                 <a:solidFill>
                   <a:srgbClr val="FFFFFF"/>
                 </a:solidFill>
@@ -7209,7 +8009,7 @@
               </a:rPr>
               <a:t>2</a:t>
             </a:r>
-            <a:endParaRPr lang="en-US" sz="1300" dirty="0"/>
+            <a:endParaRPr lang="en-US" sz="1300"/>
           </a:p>
         </p:txBody>
       </p:sp>
@@ -7221,7 +8021,7 @@
         </p:nvSpPr>
         <p:spPr>
           <a:xfrm>
-            <a:off x="932688" y="3438144"/>
+            <a:off x="932688" y="3164468"/>
             <a:ext cx="2377440" cy="237744"/>
           </a:xfrm>
           <a:prstGeom prst="rect">
@@ -7234,11 +8034,11 @@
           <a:bodyPr wrap="square" lIns="0" tIns="0" rIns="0" bIns="0" rtlCol="0" anchor="ctr"/>
           <a:lstStyle/>
           <a:p>
-            <a:pPr indent="0" marL="0">
-              <a:buNone/>
-            </a:pPr>
-            <a:r>
-              <a:rPr lang="en-US" sz="1150" b="1" dirty="0">
+            <a:pPr marL="0" indent="0">
+              <a:buNone/>
+            </a:pPr>
+            <a:r>
+              <a:rPr lang="en-US" sz="1150" b="1">
                 <a:solidFill>
                   <a:srgbClr val="1D252D"/>
                 </a:solidFill>
@@ -7248,7 +8048,7 @@
               </a:rPr>
               <a:t>Attribution on every reply</a:t>
             </a:r>
-            <a:endParaRPr lang="en-US" sz="1150" dirty="0"/>
+            <a:endParaRPr lang="en-US" sz="1150"/>
           </a:p>
         </p:txBody>
       </p:sp>
@@ -7260,7 +8060,7 @@
         </p:nvSpPr>
         <p:spPr>
           <a:xfrm>
-            <a:off x="2880360" y="3438144"/>
+            <a:off x="3049395" y="3043729"/>
             <a:ext cx="5760720" cy="475488"/>
           </a:xfrm>
           <a:prstGeom prst="rect">
@@ -7273,11 +8073,11 @@
           <a:bodyPr wrap="square" lIns="0" tIns="0" rIns="0" bIns="0" rtlCol="0" anchor="ctr"/>
           <a:lstStyle/>
           <a:p>
-            <a:pPr indent="0" marL="0">
-              <a:buNone/>
-            </a:pPr>
-            <a:r>
-              <a:rPr lang="en-US" sz="1050" dirty="0">
+            <a:pPr marL="0" indent="0">
+              <a:buNone/>
+            </a:pPr>
+            <a:r>
+              <a:rPr lang="en-US" sz="1050">
                 <a:solidFill>
                   <a:srgbClr val="46555F"/>
                 </a:solidFill>
@@ -7287,7 +8087,7 @@
               </a:rPr>
               <a:t>Each answer names the provider AND model that produced it, so a failure points at one model.</a:t>
             </a:r>
-            <a:endParaRPr lang="en-US" sz="1050" dirty="0"/>
+            <a:endParaRPr lang="en-US" sz="1050"/>
           </a:p>
         </p:txBody>
       </p:sp>
@@ -7299,7 +8099,7 @@
         </p:nvSpPr>
         <p:spPr>
           <a:xfrm>
-            <a:off x="502920" y="4023360"/>
+            <a:off x="502920" y="3749684"/>
             <a:ext cx="310896" cy="310896"/>
           </a:xfrm>
           <a:prstGeom prst="ellipse">
@@ -7310,6 +8110,13 @@
           </a:solidFill>
           <a:ln/>
         </p:spPr>
+        <p:txBody>
+          <a:bodyPr/>
+          <a:lstStyle/>
+          <a:p>
+            <a:endParaRPr lang="en-US"/>
+          </a:p>
+        </p:txBody>
       </p:sp>
       <p:sp>
         <p:nvSpPr>
@@ -7319,7 +8126,7 @@
         </p:nvSpPr>
         <p:spPr>
           <a:xfrm>
-            <a:off x="502920" y="4023360"/>
+            <a:off x="502920" y="3749684"/>
             <a:ext cx="310896" cy="310896"/>
           </a:xfrm>
           <a:prstGeom prst="rect">
@@ -7332,11 +8139,11 @@
           <a:bodyPr wrap="square" lIns="0" tIns="0" rIns="0" bIns="0" rtlCol="0" anchor="ctr"/>
           <a:lstStyle/>
           <a:p>
-            <a:pPr algn="ctr" indent="0" marL="0">
-              <a:buNone/>
-            </a:pPr>
-            <a:r>
-              <a:rPr lang="en-US" sz="1300" b="1" dirty="0">
+            <a:pPr marL="0" indent="0" algn="ctr">
+              <a:buNone/>
+            </a:pPr>
+            <a:r>
+              <a:rPr lang="en-US" sz="1300" b="1">
                 <a:solidFill>
                   <a:srgbClr val="FFFFFF"/>
                 </a:solidFill>
@@ -7346,7 +8153,7 @@
               </a:rPr>
               <a:t>3</a:t>
             </a:r>
-            <a:endParaRPr lang="en-US" sz="1300" dirty="0"/>
+            <a:endParaRPr lang="en-US" sz="1300"/>
           </a:p>
         </p:txBody>
       </p:sp>
@@ -7358,7 +8165,7 @@
         </p:nvSpPr>
         <p:spPr>
           <a:xfrm>
-            <a:off x="932688" y="4005072"/>
+            <a:off x="932688" y="3731396"/>
             <a:ext cx="2377440" cy="237744"/>
           </a:xfrm>
           <a:prstGeom prst="rect">
@@ -7371,11 +8178,11 @@
           <a:bodyPr wrap="square" lIns="0" tIns="0" rIns="0" bIns="0" rtlCol="0" anchor="ctr"/>
           <a:lstStyle/>
           <a:p>
-            <a:pPr indent="0" marL="0">
-              <a:buNone/>
-            </a:pPr>
-            <a:r>
-              <a:rPr lang="en-US" sz="1150" b="1" dirty="0">
+            <a:pPr marL="0" indent="0">
+              <a:buNone/>
+            </a:pPr>
+            <a:r>
+              <a:rPr lang="en-US" sz="1150" b="1">
                 <a:solidFill>
                   <a:srgbClr val="1D252D"/>
                 </a:solidFill>
@@ -7385,7 +8192,7 @@
               </a:rPr>
               <a:t>Credentials never touch disk</a:t>
             </a:r>
-            <a:endParaRPr lang="en-US" sz="1150" dirty="0"/>
+            <a:endParaRPr lang="en-US" sz="1150"/>
           </a:p>
         </p:txBody>
       </p:sp>
@@ -7397,7 +8204,7 @@
         </p:nvSpPr>
         <p:spPr>
           <a:xfrm>
-            <a:off x="2880360" y="4005072"/>
+            <a:off x="3049395" y="3610657"/>
             <a:ext cx="5760720" cy="475488"/>
           </a:xfrm>
           <a:prstGeom prst="rect">
@@ -7410,11 +8217,11 @@
           <a:bodyPr wrap="square" lIns="0" tIns="0" rIns="0" bIns="0" rtlCol="0" anchor="ctr"/>
           <a:lstStyle/>
           <a:p>
-            <a:pPr indent="0" marL="0">
-              <a:buNone/>
-            </a:pPr>
-            <a:r>
-              <a:rPr lang="en-US" sz="1050" dirty="0">
+            <a:pPr marL="0" indent="0">
+              <a:buNone/>
+            </a:pPr>
+            <a:r>
+              <a:rPr lang="en-US" sz="1050">
                 <a:solidFill>
                   <a:srgbClr val="46555F"/>
                 </a:solidFill>
@@ -7424,7 +8231,7 @@
               </a:rPr>
               <a:t>Keys entered in the sidebar, held in process. Copilot uses browser device-flow sign-in.</a:t>
             </a:r>
-            <a:endParaRPr lang="en-US" sz="1050" dirty="0"/>
+            <a:endParaRPr lang="en-US" sz="1050"/>
           </a:p>
         </p:txBody>
       </p:sp>
@@ -7474,11 +8281,11 @@
           <a:bodyPr wrap="square" lIns="0" tIns="0" rIns="0" bIns="0" rtlCol="0" anchor="ctr"/>
           <a:lstStyle/>
           <a:p>
-            <a:pPr indent="0" marL="0">
-              <a:buNone/>
-            </a:pPr>
-            <a:r>
-              <a:rPr lang="en-US" sz="1100" b="1" spc="200" kern="0" dirty="0">
+            <a:pPr marL="0" indent="0">
+              <a:buNone/>
+            </a:pPr>
+            <a:r>
+              <a:rPr lang="en-US" sz="1100" b="1" kern="0" spc="200">
                 <a:solidFill>
                   <a:srgbClr val="FD5000"/>
                 </a:solidFill>
@@ -7488,7 +8295,7 @@
               </a:rPr>
               <a:t>SCOPE</a:t>
             </a:r>
-            <a:endParaRPr lang="en-US" sz="1100" dirty="0"/>
+            <a:endParaRPr lang="en-US" sz="1100"/>
           </a:p>
         </p:txBody>
       </p:sp>
@@ -7513,11 +8320,11 @@
           <a:bodyPr wrap="square" lIns="0" tIns="0" rIns="0" bIns="0" rtlCol="0" anchor="ctr"/>
           <a:lstStyle/>
           <a:p>
-            <a:pPr indent="0" marL="0">
-              <a:buNone/>
-            </a:pPr>
-            <a:r>
-              <a:rPr lang="en-US" sz="3000" b="1" dirty="0">
+            <a:pPr marL="0" indent="0">
+              <a:buNone/>
+            </a:pPr>
+            <a:r>
+              <a:rPr lang="en-US" sz="3000" b="1">
                 <a:solidFill>
                   <a:srgbClr val="1D252D"/>
                 </a:solidFill>
@@ -7527,7 +8334,7 @@
               </a:rPr>
               <a:t>Nine categories, minimum was five</a:t>
             </a:r>
-            <a:endParaRPr lang="en-US" sz="3000" dirty="0"/>
+            <a:endParaRPr lang="en-US" sz="3000"/>
           </a:p>
         </p:txBody>
       </p:sp>
@@ -7557,6 +8364,13 @@
             <a:prstDash val="solid"/>
           </a:ln>
         </p:spPr>
+        <p:txBody>
+          <a:bodyPr/>
+          <a:lstStyle/>
+          <a:p>
+            <a:endParaRPr lang="en-US"/>
+          </a:p>
+        </p:txBody>
       </p:sp>
       <p:sp>
         <p:nvSpPr>
@@ -7579,11 +8393,11 @@
           <a:bodyPr wrap="square" lIns="0" tIns="0" rIns="0" bIns="0" rtlCol="0" anchor="ctr"/>
           <a:lstStyle/>
           <a:p>
-            <a:pPr algn="ctr" indent="0" marL="0">
-              <a:buNone/>
-            </a:pPr>
-            <a:r>
-              <a:rPr lang="en-US" sz="1900" b="1" dirty="0">
+            <a:pPr marL="0" indent="0" algn="ctr">
+              <a:buNone/>
+            </a:pPr>
+            <a:r>
+              <a:rPr lang="en-US" sz="1900" b="1">
                 <a:solidFill>
                   <a:srgbClr val="FD5000"/>
                 </a:solidFill>
@@ -7593,7 +8407,7 @@
               </a:rPr>
               <a:t>1</a:t>
             </a:r>
-            <a:endParaRPr lang="en-US" sz="1900" dirty="0"/>
+            <a:endParaRPr lang="en-US" sz="1900"/>
           </a:p>
         </p:txBody>
       </p:sp>
@@ -7618,11 +8432,11 @@
           <a:bodyPr wrap="square" lIns="0" tIns="0" rIns="0" bIns="0" rtlCol="0" anchor="ctr"/>
           <a:lstStyle/>
           <a:p>
-            <a:pPr indent="0" marL="0">
-              <a:buNone/>
-            </a:pPr>
-            <a:r>
-              <a:rPr lang="en-US" sz="1100" b="1" dirty="0">
+            <a:pPr marL="0" indent="0">
+              <a:buNone/>
+            </a:pPr>
+            <a:r>
+              <a:rPr lang="en-US" sz="1100" b="1">
                 <a:solidFill>
                   <a:srgbClr val="1D252D"/>
                 </a:solidFill>
@@ -7632,7 +8446,7 @@
               </a:rPr>
               <a:t>Working Prototype</a:t>
             </a:r>
-            <a:endParaRPr lang="en-US" sz="1100" dirty="0"/>
+            <a:endParaRPr lang="en-US" sz="1100"/>
           </a:p>
         </p:txBody>
       </p:sp>
@@ -7657,21 +8471,36 @@
           <a:bodyPr wrap="square" lIns="0" tIns="0" rIns="0" bIns="0" rtlCol="0" anchor="ctr"/>
           <a:lstStyle/>
           <a:p>
-            <a:pPr indent="0" marL="0">
-              <a:buNone/>
-            </a:pPr>
-            <a:r>
-              <a:rPr lang="en-US" sz="950" dirty="0">
+            <a:pPr marL="0" indent="0">
+              <a:buNone/>
+            </a:pPr>
+            <a:r>
+              <a:rPr lang="en-US" sz="950">
                 <a:solidFill>
                   <a:srgbClr val="46555F"/>
                 </a:solidFill>
-                <a:latin typeface="Arial" pitchFamily="34" charset="0"/>
-                <a:ea typeface="Arial" pitchFamily="34" charset="-122"/>
-                <a:cs typeface="Arial" pitchFamily="34" charset="-120"/>
-              </a:rPr>
-              <a:t>Streamlit app, live demo</a:t>
-            </a:r>
-            <a:endParaRPr lang="en-US" sz="950" dirty="0"/>
+                <a:latin typeface="Arial"/>
+                <a:ea typeface="Arial" pitchFamily="34" charset="-122"/>
+                <a:cs typeface="Arial"/>
+                <a:hlinkClick r:id="rId3"/>
+              </a:rPr>
+              <a:t>Streamlit app</a:t>
+            </a:r>
+            <a:r>
+              <a:rPr lang="en-US" sz="950">
+                <a:solidFill>
+                  <a:srgbClr val="46555F"/>
+                </a:solidFill>
+                <a:latin typeface="Arial"/>
+                <a:ea typeface="Arial" pitchFamily="34" charset="-122"/>
+                <a:cs typeface="Arial"/>
+              </a:rPr>
+              <a:t>, live demo</a:t>
+            </a:r>
+            <a:endParaRPr lang="en-US" sz="950">
+              <a:latin typeface="Arial"/>
+              <a:cs typeface="Arial"/>
+            </a:endParaRPr>
           </a:p>
         </p:txBody>
       </p:sp>
@@ -7701,6 +8530,13 @@
             <a:prstDash val="solid"/>
           </a:ln>
         </p:spPr>
+        <p:txBody>
+          <a:bodyPr/>
+          <a:lstStyle/>
+          <a:p>
+            <a:endParaRPr lang="en-US"/>
+          </a:p>
+        </p:txBody>
       </p:sp>
       <p:sp>
         <p:nvSpPr>
@@ -7723,11 +8559,11 @@
           <a:bodyPr wrap="square" lIns="0" tIns="0" rIns="0" bIns="0" rtlCol="0" anchor="ctr"/>
           <a:lstStyle/>
           <a:p>
-            <a:pPr algn="ctr" indent="0" marL="0">
-              <a:buNone/>
-            </a:pPr>
-            <a:r>
-              <a:rPr lang="en-US" sz="1900" b="1" dirty="0">
+            <a:pPr marL="0" indent="0" algn="ctr">
+              <a:buNone/>
+            </a:pPr>
+            <a:r>
+              <a:rPr lang="en-US" sz="1900" b="1">
                 <a:solidFill>
                   <a:srgbClr val="FD5000"/>
                 </a:solidFill>
@@ -7737,7 +8573,7 @@
               </a:rPr>
               <a:t>2</a:t>
             </a:r>
-            <a:endParaRPr lang="en-US" sz="1900" dirty="0"/>
+            <a:endParaRPr lang="en-US" sz="1900"/>
           </a:p>
         </p:txBody>
       </p:sp>
@@ -7762,11 +8598,11 @@
           <a:bodyPr wrap="square" lIns="0" tIns="0" rIns="0" bIns="0" rtlCol="0" anchor="ctr"/>
           <a:lstStyle/>
           <a:p>
-            <a:pPr indent="0" marL="0">
-              <a:buNone/>
-            </a:pPr>
-            <a:r>
-              <a:rPr lang="en-US" sz="1100" b="1" dirty="0">
+            <a:pPr marL="0" indent="0">
+              <a:buNone/>
+            </a:pPr>
+            <a:r>
+              <a:rPr lang="en-US" sz="1100" b="1">
                 <a:solidFill>
                   <a:srgbClr val="1D252D"/>
                 </a:solidFill>
@@ -7776,7 +8612,7 @@
               </a:rPr>
               <a:t>RAG</a:t>
             </a:r>
-            <a:endParaRPr lang="en-US" sz="1100" dirty="0"/>
+            <a:endParaRPr lang="en-US" sz="1100"/>
           </a:p>
         </p:txBody>
       </p:sp>
@@ -7801,11 +8637,11 @@
           <a:bodyPr wrap="square" lIns="0" tIns="0" rIns="0" bIns="0" rtlCol="0" anchor="ctr"/>
           <a:lstStyle/>
           <a:p>
-            <a:pPr indent="0" marL="0">
-              <a:buNone/>
-            </a:pPr>
-            <a:r>
-              <a:rPr lang="en-US" sz="950" dirty="0">
+            <a:pPr marL="0" indent="0">
+              <a:buNone/>
+            </a:pPr>
+            <a:r>
+              <a:rPr lang="en-US" sz="950">
                 <a:solidFill>
                   <a:srgbClr val="46555F"/>
                 </a:solidFill>
@@ -7815,7 +8651,7 @@
               </a:rPr>
               <a:t>Chroma, citations, abstention</a:t>
             </a:r>
-            <a:endParaRPr lang="en-US" sz="950" dirty="0"/>
+            <a:endParaRPr lang="en-US" sz="950"/>
           </a:p>
         </p:txBody>
       </p:sp>
@@ -7845,6 +8681,13 @@
             <a:prstDash val="solid"/>
           </a:ln>
         </p:spPr>
+        <p:txBody>
+          <a:bodyPr/>
+          <a:lstStyle/>
+          <a:p>
+            <a:endParaRPr lang="en-US"/>
+          </a:p>
+        </p:txBody>
       </p:sp>
       <p:sp>
         <p:nvSpPr>
@@ -7867,11 +8710,11 @@
           <a:bodyPr wrap="square" lIns="0" tIns="0" rIns="0" bIns="0" rtlCol="0" anchor="ctr"/>
           <a:lstStyle/>
           <a:p>
-            <a:pPr algn="ctr" indent="0" marL="0">
-              <a:buNone/>
-            </a:pPr>
-            <a:r>
-              <a:rPr lang="en-US" sz="1900" b="1" dirty="0">
+            <a:pPr marL="0" indent="0" algn="ctr">
+              <a:buNone/>
+            </a:pPr>
+            <a:r>
+              <a:rPr lang="en-US" sz="1900" b="1">
                 <a:solidFill>
                   <a:srgbClr val="FD5000"/>
                 </a:solidFill>
@@ -7881,7 +8724,7 @@
               </a:rPr>
               <a:t>3</a:t>
             </a:r>
-            <a:endParaRPr lang="en-US" sz="1900" dirty="0"/>
+            <a:endParaRPr lang="en-US" sz="1900"/>
           </a:p>
         </p:txBody>
       </p:sp>
@@ -7906,11 +8749,11 @@
           <a:bodyPr wrap="square" lIns="0" tIns="0" rIns="0" bIns="0" rtlCol="0" anchor="ctr"/>
           <a:lstStyle/>
           <a:p>
-            <a:pPr indent="0" marL="0">
-              <a:buNone/>
-            </a:pPr>
-            <a:r>
-              <a:rPr lang="en-US" sz="1100" b="1" dirty="0">
+            <a:pPr marL="0" indent="0">
+              <a:buNone/>
+            </a:pPr>
+            <a:r>
+              <a:rPr lang="en-US" sz="1100" b="1">
                 <a:solidFill>
                   <a:srgbClr val="1D252D"/>
                 </a:solidFill>
@@ -7920,7 +8763,7 @@
               </a:rPr>
               <a:t>Advanced Chunking</a:t>
             </a:r>
-            <a:endParaRPr lang="en-US" sz="1100" dirty="0"/>
+            <a:endParaRPr lang="en-US" sz="1100"/>
           </a:p>
         </p:txBody>
       </p:sp>
@@ -7945,11 +8788,11 @@
           <a:bodyPr wrap="square" lIns="0" tIns="0" rIns="0" bIns="0" rtlCol="0" anchor="ctr"/>
           <a:lstStyle/>
           <a:p>
-            <a:pPr indent="0" marL="0">
-              <a:buNone/>
-            </a:pPr>
-            <a:r>
-              <a:rPr lang="en-US" sz="950" dirty="0">
+            <a:pPr marL="0" indent="0">
+              <a:buNone/>
+            </a:pPr>
+            <a:r>
+              <a:rPr lang="en-US" sz="950">
                 <a:solidFill>
                   <a:srgbClr val="46555F"/>
                 </a:solidFill>
@@ -7959,7 +8802,7 @@
               </a:rPr>
               <a:t>4 strategies, benchmarked</a:t>
             </a:r>
-            <a:endParaRPr lang="en-US" sz="950" dirty="0"/>
+            <a:endParaRPr lang="en-US" sz="950"/>
           </a:p>
         </p:txBody>
       </p:sp>
@@ -7989,6 +8832,13 @@
             <a:prstDash val="solid"/>
           </a:ln>
         </p:spPr>
+        <p:txBody>
+          <a:bodyPr/>
+          <a:lstStyle/>
+          <a:p>
+            <a:endParaRPr lang="en-US"/>
+          </a:p>
+        </p:txBody>
       </p:sp>
       <p:sp>
         <p:nvSpPr>
@@ -8011,11 +8861,11 @@
           <a:bodyPr wrap="square" lIns="0" tIns="0" rIns="0" bIns="0" rtlCol="0" anchor="ctr"/>
           <a:lstStyle/>
           <a:p>
-            <a:pPr algn="ctr" indent="0" marL="0">
-              <a:buNone/>
-            </a:pPr>
-            <a:r>
-              <a:rPr lang="en-US" sz="1900" b="1" dirty="0">
+            <a:pPr marL="0" indent="0" algn="ctr">
+              <a:buNone/>
+            </a:pPr>
+            <a:r>
+              <a:rPr lang="en-US" sz="1900" b="1">
                 <a:solidFill>
                   <a:srgbClr val="FD5000"/>
                 </a:solidFill>
@@ -8025,7 +8875,7 @@
               </a:rPr>
               <a:t>5</a:t>
             </a:r>
-            <a:endParaRPr lang="en-US" sz="1900" dirty="0"/>
+            <a:endParaRPr lang="en-US" sz="1900"/>
           </a:p>
         </p:txBody>
       </p:sp>
@@ -8050,11 +8900,11 @@
           <a:bodyPr wrap="square" lIns="0" tIns="0" rIns="0" bIns="0" rtlCol="0" anchor="ctr"/>
           <a:lstStyle/>
           <a:p>
-            <a:pPr indent="0" marL="0">
-              <a:buNone/>
-            </a:pPr>
-            <a:r>
-              <a:rPr lang="en-US" sz="1100" b="1" dirty="0">
+            <a:pPr marL="0" indent="0">
+              <a:buNone/>
+            </a:pPr>
+            <a:r>
+              <a:rPr lang="en-US" sz="1100" b="1">
                 <a:solidFill>
                   <a:srgbClr val="1D252D"/>
                 </a:solidFill>
@@ -8064,7 +8914,7 @@
               </a:rPr>
               <a:t>Memory</a:t>
             </a:r>
-            <a:endParaRPr lang="en-US" sz="1100" dirty="0"/>
+            <a:endParaRPr lang="en-US" sz="1100"/>
           </a:p>
         </p:txBody>
       </p:sp>
@@ -8089,11 +8939,11 @@
           <a:bodyPr wrap="square" lIns="0" tIns="0" rIns="0" bIns="0" rtlCol="0" anchor="ctr"/>
           <a:lstStyle/>
           <a:p>
-            <a:pPr indent="0" marL="0">
-              <a:buNone/>
-            </a:pPr>
-            <a:r>
-              <a:rPr lang="en-US" sz="950" dirty="0">
+            <a:pPr marL="0" indent="0">
+              <a:buNone/>
+            </a:pPr>
+            <a:r>
+              <a:rPr lang="en-US" sz="950">
                 <a:solidFill>
                   <a:srgbClr val="46555F"/>
                 </a:solidFill>
@@ -8103,7 +8953,7 @@
               </a:rPr>
               <a:t>6 turns fed back into the prompt</a:t>
             </a:r>
-            <a:endParaRPr lang="en-US" sz="950" dirty="0"/>
+            <a:endParaRPr lang="en-US" sz="950"/>
           </a:p>
         </p:txBody>
       </p:sp>
@@ -8133,6 +8983,13 @@
             <a:prstDash val="solid"/>
           </a:ln>
         </p:spPr>
+        <p:txBody>
+          <a:bodyPr/>
+          <a:lstStyle/>
+          <a:p>
+            <a:endParaRPr lang="en-US"/>
+          </a:p>
+        </p:txBody>
       </p:sp>
       <p:sp>
         <p:nvSpPr>
@@ -8155,11 +9012,11 @@
           <a:bodyPr wrap="square" lIns="0" tIns="0" rIns="0" bIns="0" rtlCol="0" anchor="ctr"/>
           <a:lstStyle/>
           <a:p>
-            <a:pPr algn="ctr" indent="0" marL="0">
-              <a:buNone/>
-            </a:pPr>
-            <a:r>
-              <a:rPr lang="en-US" sz="1900" b="1" dirty="0">
+            <a:pPr marL="0" indent="0" algn="ctr">
+              <a:buNone/>
+            </a:pPr>
+            <a:r>
+              <a:rPr lang="en-US" sz="1900" b="1">
                 <a:solidFill>
                   <a:srgbClr val="FD5000"/>
                 </a:solidFill>
@@ -8169,7 +9026,7 @@
               </a:rPr>
               <a:t>6</a:t>
             </a:r>
-            <a:endParaRPr lang="en-US" sz="1900" dirty="0"/>
+            <a:endParaRPr lang="en-US" sz="1900"/>
           </a:p>
         </p:txBody>
       </p:sp>
@@ -8194,11 +9051,11 @@
           <a:bodyPr wrap="square" lIns="0" tIns="0" rIns="0" bIns="0" rtlCol="0" anchor="ctr"/>
           <a:lstStyle/>
           <a:p>
-            <a:pPr indent="0" marL="0">
-              <a:buNone/>
-            </a:pPr>
-            <a:r>
-              <a:rPr lang="en-US" sz="1100" b="1" dirty="0">
+            <a:pPr marL="0" indent="0">
+              <a:buNone/>
+            </a:pPr>
+            <a:r>
+              <a:rPr lang="en-US" sz="1100" b="1">
                 <a:solidFill>
                   <a:srgbClr val="1D252D"/>
                 </a:solidFill>
@@ -8208,7 +9065,7 @@
               </a:rPr>
               <a:t>Tool Use</a:t>
             </a:r>
-            <a:endParaRPr lang="en-US" sz="1100" dirty="0"/>
+            <a:endParaRPr lang="en-US" sz="1100"/>
           </a:p>
         </p:txBody>
       </p:sp>
@@ -8233,11 +9090,11 @@
           <a:bodyPr wrap="square" lIns="0" tIns="0" rIns="0" bIns="0" rtlCol="0" anchor="ctr"/>
           <a:lstStyle/>
           <a:p>
-            <a:pPr indent="0" marL="0">
-              <a:buNone/>
-            </a:pPr>
-            <a:r>
-              <a:rPr lang="en-US" sz="950" dirty="0">
+            <a:pPr marL="0" indent="0">
+              <a:buNone/>
+            </a:pPr>
+            <a:r>
+              <a:rPr lang="en-US" sz="950">
                 <a:solidFill>
                   <a:srgbClr val="46555F"/>
                 </a:solidFill>
@@ -8247,7 +9104,7 @@
               </a:rPr>
               <a:t>Text-to-SQL over telemetry</a:t>
             </a:r>
-            <a:endParaRPr lang="en-US" sz="950" dirty="0"/>
+            <a:endParaRPr lang="en-US" sz="950"/>
           </a:p>
         </p:txBody>
       </p:sp>
@@ -8277,6 +9134,13 @@
             <a:prstDash val="solid"/>
           </a:ln>
         </p:spPr>
+        <p:txBody>
+          <a:bodyPr/>
+          <a:lstStyle/>
+          <a:p>
+            <a:endParaRPr lang="en-US"/>
+          </a:p>
+        </p:txBody>
       </p:sp>
       <p:sp>
         <p:nvSpPr>
@@ -8299,11 +9163,11 @@
           <a:bodyPr wrap="square" lIns="0" tIns="0" rIns="0" bIns="0" rtlCol="0" anchor="ctr"/>
           <a:lstStyle/>
           <a:p>
-            <a:pPr algn="ctr" indent="0" marL="0">
-              <a:buNone/>
-            </a:pPr>
-            <a:r>
-              <a:rPr lang="en-US" sz="1900" b="1" dirty="0">
+            <a:pPr marL="0" indent="0" algn="ctr">
+              <a:buNone/>
+            </a:pPr>
+            <a:r>
+              <a:rPr lang="en-US" sz="1900" b="1">
                 <a:solidFill>
                   <a:srgbClr val="FD5000"/>
                 </a:solidFill>
@@ -8313,7 +9177,7 @@
               </a:rPr>
               <a:t>8</a:t>
             </a:r>
-            <a:endParaRPr lang="en-US" sz="1900" dirty="0"/>
+            <a:endParaRPr lang="en-US" sz="1900"/>
           </a:p>
         </p:txBody>
       </p:sp>
@@ -8338,11 +9202,11 @@
           <a:bodyPr wrap="square" lIns="0" tIns="0" rIns="0" bIns="0" rtlCol="0" anchor="ctr"/>
           <a:lstStyle/>
           <a:p>
-            <a:pPr indent="0" marL="0">
-              <a:buNone/>
-            </a:pPr>
-            <a:r>
-              <a:rPr lang="en-US" sz="1100" b="1" dirty="0">
+            <a:pPr marL="0" indent="0">
+              <a:buNone/>
+            </a:pPr>
+            <a:r>
+              <a:rPr lang="en-US" sz="1100" b="1">
                 <a:solidFill>
                   <a:srgbClr val="1D252D"/>
                 </a:solidFill>
@@ -8352,7 +9216,7 @@
               </a:rPr>
               <a:t>Local LLM</a:t>
             </a:r>
-            <a:endParaRPr lang="en-US" sz="1100" dirty="0"/>
+            <a:endParaRPr lang="en-US" sz="1100"/>
           </a:p>
         </p:txBody>
       </p:sp>
@@ -8377,11 +9241,11 @@
           <a:bodyPr wrap="square" lIns="0" tIns="0" rIns="0" bIns="0" rtlCol="0" anchor="ctr"/>
           <a:lstStyle/>
           <a:p>
-            <a:pPr indent="0" marL="0">
-              <a:buNone/>
-            </a:pPr>
-            <a:r>
-              <a:rPr lang="en-US" sz="950" dirty="0">
+            <a:pPr marL="0" indent="0">
+              <a:buNone/>
+            </a:pPr>
+            <a:r>
+              <a:rPr lang="en-US" sz="950">
                 <a:solidFill>
                   <a:srgbClr val="46555F"/>
                 </a:solidFill>
@@ -8391,7 +9255,7 @@
               </a:rPr>
               <a:t>Ollama + LM Studio</a:t>
             </a:r>
-            <a:endParaRPr lang="en-US" sz="950" dirty="0"/>
+            <a:endParaRPr lang="en-US" sz="950"/>
           </a:p>
         </p:txBody>
       </p:sp>
@@ -8421,6 +9285,13 @@
             <a:prstDash val="solid"/>
           </a:ln>
         </p:spPr>
+        <p:txBody>
+          <a:bodyPr/>
+          <a:lstStyle/>
+          <a:p>
+            <a:endParaRPr lang="en-US"/>
+          </a:p>
+        </p:txBody>
       </p:sp>
       <p:sp>
         <p:nvSpPr>
@@ -8443,11 +9314,11 @@
           <a:bodyPr wrap="square" lIns="0" tIns="0" rIns="0" bIns="0" rtlCol="0" anchor="ctr"/>
           <a:lstStyle/>
           <a:p>
-            <a:pPr algn="ctr" indent="0" marL="0">
-              <a:buNone/>
-            </a:pPr>
-            <a:r>
-              <a:rPr lang="en-US" sz="1900" b="1" dirty="0">
+            <a:pPr marL="0" indent="0" algn="ctr">
+              <a:buNone/>
+            </a:pPr>
+            <a:r>
+              <a:rPr lang="en-US" sz="1900" b="1">
                 <a:solidFill>
                   <a:srgbClr val="FD5000"/>
                 </a:solidFill>
@@ -8457,7 +9328,7 @@
               </a:rPr>
               <a:t>10</a:t>
             </a:r>
-            <a:endParaRPr lang="en-US" sz="1900" dirty="0"/>
+            <a:endParaRPr lang="en-US" sz="1900"/>
           </a:p>
         </p:txBody>
       </p:sp>
@@ -8482,11 +9353,11 @@
           <a:bodyPr wrap="square" lIns="0" tIns="0" rIns="0" bIns="0" rtlCol="0" anchor="ctr"/>
           <a:lstStyle/>
           <a:p>
-            <a:pPr indent="0" marL="0">
-              <a:buNone/>
-            </a:pPr>
-            <a:r>
-              <a:rPr lang="en-US" sz="1100" b="1" dirty="0">
+            <a:pPr marL="0" indent="0">
+              <a:buNone/>
+            </a:pPr>
+            <a:r>
+              <a:rPr lang="en-US" sz="1100" b="1">
                 <a:solidFill>
                   <a:srgbClr val="1D252D"/>
                 </a:solidFill>
@@ -8496,7 +9367,7 @@
               </a:rPr>
               <a:t>Multiple Sources</a:t>
             </a:r>
-            <a:endParaRPr lang="en-US" sz="1100" dirty="0"/>
+            <a:endParaRPr lang="en-US" sz="1100"/>
           </a:p>
         </p:txBody>
       </p:sp>
@@ -8521,11 +9392,11 @@
           <a:bodyPr wrap="square" lIns="0" tIns="0" rIns="0" bIns="0" rtlCol="0" anchor="ctr"/>
           <a:lstStyle/>
           <a:p>
-            <a:pPr indent="0" marL="0">
-              <a:buNone/>
-            </a:pPr>
-            <a:r>
-              <a:rPr lang="en-US" sz="950" dirty="0">
+            <a:pPr marL="0" indent="0">
+              <a:buNone/>
+            </a:pPr>
+            <a:r>
+              <a:rPr lang="en-US" sz="950">
                 <a:solidFill>
                   <a:srgbClr val="46555F"/>
                 </a:solidFill>
@@ -8535,7 +9406,7 @@
               </a:rPr>
               <a:t>16 docs, 3 corpora, + XLSX</a:t>
             </a:r>
-            <a:endParaRPr lang="en-US" sz="950" dirty="0"/>
+            <a:endParaRPr lang="en-US" sz="950"/>
           </a:p>
         </p:txBody>
       </p:sp>
@@ -8565,6 +9436,13 @@
             <a:prstDash val="solid"/>
           </a:ln>
         </p:spPr>
+        <p:txBody>
+          <a:bodyPr/>
+          <a:lstStyle/>
+          <a:p>
+            <a:endParaRPr lang="en-US"/>
+          </a:p>
+        </p:txBody>
       </p:sp>
       <p:sp>
         <p:nvSpPr>
@@ -8587,11 +9465,11 @@
           <a:bodyPr wrap="square" lIns="0" tIns="0" rIns="0" bIns="0" rtlCol="0" anchor="ctr"/>
           <a:lstStyle/>
           <a:p>
-            <a:pPr algn="ctr" indent="0" marL="0">
-              <a:buNone/>
-            </a:pPr>
-            <a:r>
-              <a:rPr lang="en-US" sz="1900" b="1" dirty="0">
+            <a:pPr marL="0" indent="0" algn="ctr">
+              <a:buNone/>
+            </a:pPr>
+            <a:r>
+              <a:rPr lang="en-US" sz="1900" b="1">
                 <a:solidFill>
                   <a:srgbClr val="FD5000"/>
                 </a:solidFill>
@@ -8601,7 +9479,7 @@
               </a:rPr>
               <a:t>12</a:t>
             </a:r>
-            <a:endParaRPr lang="en-US" sz="1900" dirty="0"/>
+            <a:endParaRPr lang="en-US" sz="1900"/>
           </a:p>
         </p:txBody>
       </p:sp>
@@ -8626,11 +9504,11 @@
           <a:bodyPr wrap="square" lIns="0" tIns="0" rIns="0" bIns="0" rtlCol="0" anchor="ctr"/>
           <a:lstStyle/>
           <a:p>
-            <a:pPr indent="0" marL="0">
-              <a:buNone/>
-            </a:pPr>
-            <a:r>
-              <a:rPr lang="en-US" sz="1100" b="1" dirty="0">
+            <a:pPr marL="0" indent="0">
+              <a:buNone/>
+            </a:pPr>
+            <a:r>
+              <a:rPr lang="en-US" sz="1100" b="1">
                 <a:solidFill>
                   <a:srgbClr val="1D252D"/>
                 </a:solidFill>
@@ -8640,7 +9518,7 @@
               </a:rPr>
               <a:t>Evaluation</a:t>
             </a:r>
-            <a:endParaRPr lang="en-US" sz="1100" dirty="0"/>
+            <a:endParaRPr lang="en-US" sz="1100"/>
           </a:p>
         </p:txBody>
       </p:sp>
@@ -8665,11 +9543,11 @@
           <a:bodyPr wrap="square" lIns="0" tIns="0" rIns="0" bIns="0" rtlCol="0" anchor="ctr"/>
           <a:lstStyle/>
           <a:p>
-            <a:pPr indent="0" marL="0">
-              <a:buNone/>
-            </a:pPr>
-            <a:r>
-              <a:rPr lang="en-US" sz="950" dirty="0">
+            <a:pPr marL="0" indent="0">
+              <a:buNone/>
+            </a:pPr>
+            <a:r>
+              <a:rPr lang="en-US" sz="950">
                 <a:solidFill>
                   <a:srgbClr val="46555F"/>
                 </a:solidFill>
@@ -8679,7 +9557,7 @@
               </a:rPr>
               <a:t>17-case golden set, MRR</a:t>
             </a:r>
-            <a:endParaRPr lang="en-US" sz="950" dirty="0"/>
+            <a:endParaRPr lang="en-US" sz="950"/>
           </a:p>
         </p:txBody>
       </p:sp>
@@ -8709,6 +9587,13 @@
             <a:prstDash val="solid"/>
           </a:ln>
         </p:spPr>
+        <p:txBody>
+          <a:bodyPr/>
+          <a:lstStyle/>
+          <a:p>
+            <a:endParaRPr lang="en-US" sz="1400"/>
+          </a:p>
+        </p:txBody>
       </p:sp>
       <p:sp>
         <p:nvSpPr>
@@ -8731,11 +9616,11 @@
           <a:bodyPr wrap="square" lIns="0" tIns="0" rIns="0" bIns="0" rtlCol="0" anchor="ctr"/>
           <a:lstStyle/>
           <a:p>
-            <a:pPr algn="ctr" indent="0" marL="0">
-              <a:buNone/>
-            </a:pPr>
-            <a:r>
-              <a:rPr lang="en-US" sz="1900" b="1" dirty="0">
+            <a:pPr marL="0" indent="0" algn="ctr">
+              <a:buNone/>
+            </a:pPr>
+            <a:r>
+              <a:rPr lang="en-US" sz="1900" b="1">
                 <a:solidFill>
                   <a:srgbClr val="FD5000"/>
                 </a:solidFill>
@@ -8745,7 +9630,7 @@
               </a:rPr>
               <a:t>13</a:t>
             </a:r>
-            <a:endParaRPr lang="en-US" sz="1900" dirty="0"/>
+            <a:endParaRPr lang="en-US" sz="1900"/>
           </a:p>
         </p:txBody>
       </p:sp>
@@ -8770,11 +9655,11 @@
           <a:bodyPr wrap="square" lIns="0" tIns="0" rIns="0" bIns="0" rtlCol="0" anchor="ctr"/>
           <a:lstStyle/>
           <a:p>
-            <a:pPr indent="0" marL="0">
-              <a:buNone/>
-            </a:pPr>
-            <a:r>
-              <a:rPr lang="en-US" sz="1100" b="1" dirty="0">
+            <a:pPr marL="0" indent="0">
+              <a:buNone/>
+            </a:pPr>
+            <a:r>
+              <a:rPr lang="en-US" sz="1100" b="1">
                 <a:solidFill>
                   <a:srgbClr val="1D252D"/>
                 </a:solidFill>
@@ -8784,7 +9669,7 @@
               </a:rPr>
               <a:t>Deployment</a:t>
             </a:r>
-            <a:endParaRPr lang="en-US" sz="1100" dirty="0"/>
+            <a:endParaRPr lang="en-US" sz="1100"/>
           </a:p>
         </p:txBody>
       </p:sp>
@@ -8809,21 +9694,26 @@
           <a:bodyPr wrap="square" lIns="0" tIns="0" rIns="0" bIns="0" rtlCol="0" anchor="ctr"/>
           <a:lstStyle/>
           <a:p>
-            <a:pPr indent="0" marL="0">
-              <a:buNone/>
-            </a:pPr>
-            <a:r>
-              <a:rPr lang="en-US" sz="950" dirty="0">
+            <a:r>
+              <a:rPr lang="en-US" sz="950">
                 <a:solidFill>
                   <a:srgbClr val="46555F"/>
                 </a:solidFill>
-                <a:latin typeface="Arial" pitchFamily="34" charset="0"/>
-                <a:ea typeface="Arial" pitchFamily="34" charset="-122"/>
-                <a:cs typeface="Arial" pitchFamily="34" charset="-120"/>
-              </a:rPr>
-              <a:t>Docker, launchers, GitHub</a:t>
-            </a:r>
-            <a:endParaRPr lang="en-US" sz="950" dirty="0"/>
+                <a:latin typeface="Arial"/>
+                <a:ea typeface="Arial" pitchFamily="34" charset="-122"/>
+                <a:cs typeface="Arial"/>
+                <a:hlinkClick r:id="rId4"/>
+              </a:rPr>
+              <a:t>GitHub</a:t>
+            </a:r>
+            <a:endParaRPr lang="en-US" sz="950">
+              <a:solidFill>
+                <a:srgbClr val="46555F"/>
+              </a:solidFill>
+              <a:latin typeface="Arial"/>
+              <a:ea typeface="Calibri"/>
+              <a:cs typeface="Arial"/>
+            </a:endParaRPr>
           </a:p>
         </p:txBody>
       </p:sp>
@@ -8853,6 +9743,13 @@
             <a:prstDash val="solid"/>
           </a:ln>
         </p:spPr>
+        <p:txBody>
+          <a:bodyPr/>
+          <a:lstStyle/>
+          <a:p>
+            <a:endParaRPr lang="en-US"/>
+          </a:p>
+        </p:txBody>
       </p:sp>
       <p:sp>
         <p:nvSpPr>
@@ -8875,11 +9772,11 @@
           <a:bodyPr wrap="square" lIns="0" tIns="0" rIns="0" bIns="0" rtlCol="0" anchor="ctr"/>
           <a:lstStyle/>
           <a:p>
-            <a:pPr indent="0" marL="0">
-              <a:buNone/>
-            </a:pPr>
-            <a:r>
-              <a:rPr lang="en-US" sz="1200" b="1" dirty="0">
+            <a:pPr marL="0" indent="0">
+              <a:buNone/>
+            </a:pPr>
+            <a:r>
+              <a:rPr lang="en-US" sz="1200" b="1">
                 <a:solidFill>
                   <a:srgbClr val="FD5000"/>
                 </a:solidFill>
@@ -8889,7 +9786,7 @@
               </a:rPr>
               <a:t>Not claimed:  Category 4, Agent / LangGraph</a:t>
             </a:r>
-            <a:endParaRPr lang="en-US" sz="1200" dirty="0"/>
+            <a:endParaRPr lang="en-US" sz="1200"/>
           </a:p>
         </p:txBody>
       </p:sp>
@@ -8914,11 +9811,11 @@
           <a:bodyPr wrap="square" lIns="0" tIns="0" rIns="0" bIns="0" rtlCol="0" anchor="ctr"/>
           <a:lstStyle/>
           <a:p>
-            <a:pPr indent="0" marL="0">
-              <a:buNone/>
-            </a:pPr>
-            <a:r>
-              <a:rPr lang="en-US" sz="1050" dirty="0">
+            <a:pPr marL="0" indent="0">
+              <a:buNone/>
+            </a:pPr>
+            <a:r>
+              <a:rPr lang="en-US" sz="1050">
                 <a:solidFill>
                   <a:srgbClr val="B9C0CA"/>
                 </a:solidFill>
@@ -8928,7 +9825,7 @@
               </a:rPr>
               <a:t>This is a router + RAG + text-to-SQL system. The router picks a persona; it does not plan, loop, or act. We built the grounding properly rather than an agent layer on top of it.</a:t>
             </a:r>
-            <a:endParaRPr lang="en-US" sz="1050" dirty="0"/>
+            <a:endParaRPr lang="en-US" sz="1050"/>
           </a:p>
         </p:txBody>
       </p:sp>
@@ -8978,11 +9875,11 @@
           <a:bodyPr wrap="square" lIns="0" tIns="0" rIns="0" bIns="0" rtlCol="0" anchor="ctr"/>
           <a:lstStyle/>
           <a:p>
-            <a:pPr indent="0" marL="0">
-              <a:buNone/>
-            </a:pPr>
-            <a:r>
-              <a:rPr lang="en-US" sz="1100" b="1" spc="200" kern="0" dirty="0">
+            <a:pPr marL="0" indent="0">
+              <a:buNone/>
+            </a:pPr>
+            <a:r>
+              <a:rPr lang="en-US" sz="1100" b="1" kern="0" spc="200">
                 <a:solidFill>
                   <a:srgbClr val="FD5000"/>
                 </a:solidFill>
@@ -8992,7 +9889,7 @@
               </a:rPr>
               <a:t>TEAM</a:t>
             </a:r>
-            <a:endParaRPr lang="en-US" sz="1100" dirty="0"/>
+            <a:endParaRPr lang="en-US" sz="1100"/>
           </a:p>
         </p:txBody>
       </p:sp>
@@ -9017,11 +9914,11 @@
           <a:bodyPr wrap="square" lIns="0" tIns="0" rIns="0" bIns="0" rtlCol="0" anchor="ctr"/>
           <a:lstStyle/>
           <a:p>
-            <a:pPr indent="0" marL="0">
-              <a:buNone/>
-            </a:pPr>
-            <a:r>
-              <a:rPr lang="en-US" sz="3000" b="1" dirty="0">
+            <a:pPr marL="0" indent="0">
+              <a:buNone/>
+            </a:pPr>
+            <a:r>
+              <a:rPr lang="en-US" sz="3000" b="1">
                 <a:solidFill>
                   <a:srgbClr val="1D252D"/>
                 </a:solidFill>
@@ -9031,7 +9928,7 @@
               </a:rPr>
               <a:t>Who built what</a:t>
             </a:r>
-            <a:endParaRPr lang="en-US" sz="3000" dirty="0"/>
+            <a:endParaRPr lang="en-US" sz="3000"/>
           </a:p>
         </p:txBody>
       </p:sp>
@@ -9061,6 +9958,13 @@
             <a:prstDash val="solid"/>
           </a:ln>
         </p:spPr>
+        <p:txBody>
+          <a:bodyPr/>
+          <a:lstStyle/>
+          <a:p>
+            <a:endParaRPr lang="en-US"/>
+          </a:p>
+        </p:txBody>
       </p:sp>
       <p:sp>
         <p:nvSpPr>
@@ -9081,6 +9985,13 @@
           </a:solidFill>
           <a:ln/>
         </p:spPr>
+        <p:txBody>
+          <a:bodyPr/>
+          <a:lstStyle/>
+          <a:p>
+            <a:endParaRPr lang="en-US"/>
+          </a:p>
+        </p:txBody>
       </p:sp>
       <p:sp>
         <p:nvSpPr>
@@ -9103,11 +10014,11 @@
           <a:bodyPr wrap="square" lIns="0" tIns="0" rIns="0" bIns="0" rtlCol="0" anchor="ctr"/>
           <a:lstStyle/>
           <a:p>
-            <a:pPr algn="ctr" indent="0" marL="0">
-              <a:buNone/>
-            </a:pPr>
-            <a:r>
-              <a:rPr lang="en-US" sz="1300" b="1" dirty="0">
+            <a:pPr marL="0" indent="0" algn="ctr">
+              <a:buNone/>
+            </a:pPr>
+            <a:r>
+              <a:rPr lang="en-US" sz="1300" b="1">
                 <a:solidFill>
                   <a:srgbClr val="FFFFFF"/>
                 </a:solidFill>
@@ -9117,7 +10028,7 @@
               </a:rPr>
               <a:t>1</a:t>
             </a:r>
-            <a:endParaRPr lang="en-US" sz="1300" dirty="0"/>
+            <a:endParaRPr lang="en-US" sz="1300"/>
           </a:p>
         </p:txBody>
       </p:sp>
@@ -9142,11 +10053,11 @@
           <a:bodyPr wrap="square" lIns="0" tIns="0" rIns="0" bIns="0" rtlCol="0" anchor="ctr"/>
           <a:lstStyle/>
           <a:p>
-            <a:pPr indent="0" marL="0">
-              <a:buNone/>
-            </a:pPr>
-            <a:r>
-              <a:rPr lang="en-US" sz="1300" b="1" dirty="0">
+            <a:pPr marL="0" indent="0">
+              <a:buNone/>
+            </a:pPr>
+            <a:r>
+              <a:rPr lang="en-US" sz="1300" b="1">
                 <a:solidFill>
                   <a:srgbClr val="1D252D"/>
                 </a:solidFill>
@@ -9156,7 +10067,7 @@
               </a:rPr>
               <a:t>Sylvia Wong Shiau Ching</a:t>
             </a:r>
-            <a:endParaRPr lang="en-US" sz="1300" dirty="0"/>
+            <a:endParaRPr lang="en-US" sz="1300"/>
           </a:p>
         </p:txBody>
       </p:sp>
@@ -9181,21 +10092,22 @@
           <a:bodyPr wrap="square" lIns="0" tIns="0" rIns="0" bIns="0" rtlCol="0" anchor="ctr"/>
           <a:lstStyle/>
           <a:p>
-            <a:pPr indent="0" marL="0">
-              <a:buNone/>
-            </a:pPr>
-            <a:r>
-              <a:rPr lang="en-US" sz="1200" dirty="0">
+            <a:r>
+              <a:rPr lang="en-US" sz="1200">
                 <a:solidFill>
                   <a:srgbClr val="46555F"/>
                 </a:solidFill>
-                <a:latin typeface="Arial" pitchFamily="34" charset="0"/>
-                <a:ea typeface="Arial" pitchFamily="34" charset="-122"/>
-                <a:cs typeface="Arial" pitchFamily="34" charset="-120"/>
-              </a:rPr>
-              <a:t>(feature)</a:t>
-            </a:r>
-            <a:endParaRPr lang="en-US" sz="1200" dirty="0"/>
+                <a:latin typeface="Arial"/>
+                <a:ea typeface="Arial" pitchFamily="34" charset="-122"/>
+                <a:cs typeface="Arial"/>
+              </a:rPr>
+              <a:t>Working prototype, RAG</a:t>
+            </a:r>
+            <a:endParaRPr lang="en-US" sz="1200">
+              <a:latin typeface="Arial"/>
+              <a:ea typeface="Calibri" panose="020F0502020204030204"/>
+              <a:cs typeface="Calibri" panose="020F0502020204030204"/>
+            </a:endParaRPr>
           </a:p>
         </p:txBody>
       </p:sp>
@@ -9225,6 +10137,13 @@
             <a:prstDash val="solid"/>
           </a:ln>
         </p:spPr>
+        <p:txBody>
+          <a:bodyPr/>
+          <a:lstStyle/>
+          <a:p>
+            <a:endParaRPr lang="en-US"/>
+          </a:p>
+        </p:txBody>
       </p:sp>
       <p:sp>
         <p:nvSpPr>
@@ -9245,6 +10164,13 @@
           </a:solidFill>
           <a:ln/>
         </p:spPr>
+        <p:txBody>
+          <a:bodyPr/>
+          <a:lstStyle/>
+          <a:p>
+            <a:endParaRPr lang="en-US"/>
+          </a:p>
+        </p:txBody>
       </p:sp>
       <p:sp>
         <p:nvSpPr>
@@ -9267,11 +10193,11 @@
           <a:bodyPr wrap="square" lIns="0" tIns="0" rIns="0" bIns="0" rtlCol="0" anchor="ctr"/>
           <a:lstStyle/>
           <a:p>
-            <a:pPr algn="ctr" indent="0" marL="0">
-              <a:buNone/>
-            </a:pPr>
-            <a:r>
-              <a:rPr lang="en-US" sz="1300" b="1" dirty="0">
+            <a:pPr marL="0" indent="0" algn="ctr">
+              <a:buNone/>
+            </a:pPr>
+            <a:r>
+              <a:rPr lang="en-US" sz="1300" b="1">
                 <a:solidFill>
                   <a:srgbClr val="FFFFFF"/>
                 </a:solidFill>
@@ -9281,7 +10207,7 @@
               </a:rPr>
               <a:t>2</a:t>
             </a:r>
-            <a:endParaRPr lang="en-US" sz="1300" dirty="0"/>
+            <a:endParaRPr lang="en-US" sz="1300"/>
           </a:p>
         </p:txBody>
       </p:sp>
@@ -9306,11 +10232,11 @@
           <a:bodyPr wrap="square" lIns="0" tIns="0" rIns="0" bIns="0" rtlCol="0" anchor="ctr"/>
           <a:lstStyle/>
           <a:p>
-            <a:pPr indent="0" marL="0">
-              <a:buNone/>
-            </a:pPr>
-            <a:r>
-              <a:rPr lang="en-US" sz="1300" b="1" dirty="0">
+            <a:pPr marL="0" indent="0">
+              <a:buNone/>
+            </a:pPr>
+            <a:r>
+              <a:rPr lang="en-US" sz="1300" b="1">
                 <a:solidFill>
                   <a:srgbClr val="1D252D"/>
                 </a:solidFill>
@@ -9320,7 +10246,7 @@
               </a:rPr>
               <a:t>Chin Ee Mei</a:t>
             </a:r>
-            <a:endParaRPr lang="en-US" sz="1300" dirty="0"/>
+            <a:endParaRPr lang="en-US" sz="1300"/>
           </a:p>
         </p:txBody>
       </p:sp>
@@ -9345,21 +10271,27 @@
           <a:bodyPr wrap="square" lIns="0" tIns="0" rIns="0" bIns="0" rtlCol="0" anchor="ctr"/>
           <a:lstStyle/>
           <a:p>
-            <a:pPr indent="0" marL="0">
-              <a:buNone/>
-            </a:pPr>
-            <a:r>
-              <a:rPr lang="en-US" sz="1200" dirty="0">
+            <a:pPr marL="0" indent="0">
+              <a:buNone/>
+            </a:pPr>
+            <a:r>
+              <a:rPr lang="en-US" sz="1200">
                 <a:solidFill>
                   <a:srgbClr val="46555F"/>
                 </a:solidFill>
-                <a:latin typeface="Arial" pitchFamily="34" charset="0"/>
-                <a:ea typeface="Arial" pitchFamily="34" charset="-122"/>
-                <a:cs typeface="Arial" pitchFamily="34" charset="-120"/>
-              </a:rPr>
-              <a:t>(feature)</a:t>
-            </a:r>
-            <a:endParaRPr lang="en-US" sz="1200" dirty="0"/>
+                <a:latin typeface="Arial"/>
+                <a:ea typeface="Arial" pitchFamily="34" charset="-122"/>
+                <a:cs typeface="Arial"/>
+              </a:rPr>
+              <a:t>Evaluation</a:t>
+            </a:r>
+            <a:endParaRPr lang="en-US" sz="1200">
+              <a:solidFill>
+                <a:srgbClr val="46555F"/>
+              </a:solidFill>
+              <a:latin typeface="Arial"/>
+              <a:cs typeface="Arial"/>
+            </a:endParaRPr>
           </a:p>
         </p:txBody>
       </p:sp>
@@ -9389,6 +10321,13 @@
             <a:prstDash val="solid"/>
           </a:ln>
         </p:spPr>
+        <p:txBody>
+          <a:bodyPr/>
+          <a:lstStyle/>
+          <a:p>
+            <a:endParaRPr lang="en-US"/>
+          </a:p>
+        </p:txBody>
       </p:sp>
       <p:sp>
         <p:nvSpPr>
@@ -9409,6 +10348,13 @@
           </a:solidFill>
           <a:ln/>
         </p:spPr>
+        <p:txBody>
+          <a:bodyPr/>
+          <a:lstStyle/>
+          <a:p>
+            <a:endParaRPr lang="en-US"/>
+          </a:p>
+        </p:txBody>
       </p:sp>
       <p:sp>
         <p:nvSpPr>
@@ -9431,11 +10377,11 @@
           <a:bodyPr wrap="square" lIns="0" tIns="0" rIns="0" bIns="0" rtlCol="0" anchor="ctr"/>
           <a:lstStyle/>
           <a:p>
-            <a:pPr algn="ctr" indent="0" marL="0">
-              <a:buNone/>
-            </a:pPr>
-            <a:r>
-              <a:rPr lang="en-US" sz="1300" b="1" dirty="0">
+            <a:pPr marL="0" indent="0" algn="ctr">
+              <a:buNone/>
+            </a:pPr>
+            <a:r>
+              <a:rPr lang="en-US" sz="1300" b="1">
                 <a:solidFill>
                   <a:srgbClr val="FFFFFF"/>
                 </a:solidFill>
@@ -9445,7 +10391,7 @@
               </a:rPr>
               <a:t>3</a:t>
             </a:r>
-            <a:endParaRPr lang="en-US" sz="1300" dirty="0"/>
+            <a:endParaRPr lang="en-US" sz="1300"/>
           </a:p>
         </p:txBody>
       </p:sp>
@@ -9470,11 +10416,11 @@
           <a:bodyPr wrap="square" lIns="0" tIns="0" rIns="0" bIns="0" rtlCol="0" anchor="ctr"/>
           <a:lstStyle/>
           <a:p>
-            <a:pPr indent="0" marL="0">
-              <a:buNone/>
-            </a:pPr>
-            <a:r>
-              <a:rPr lang="en-US" sz="1300" b="1" dirty="0">
+            <a:pPr marL="0" indent="0">
+              <a:buNone/>
+            </a:pPr>
+            <a:r>
+              <a:rPr lang="en-US" sz="1300" b="1">
                 <a:solidFill>
                   <a:srgbClr val="1D252D"/>
                 </a:solidFill>
@@ -9484,7 +10430,7 @@
               </a:rPr>
               <a:t>Khoo Yeong Kang</a:t>
             </a:r>
-            <a:endParaRPr lang="en-US" sz="1300" dirty="0"/>
+            <a:endParaRPr lang="en-US" sz="1300"/>
           </a:p>
         </p:txBody>
       </p:sp>
@@ -9509,21 +10455,18 @@
           <a:bodyPr wrap="square" lIns="0" tIns="0" rIns="0" bIns="0" rtlCol="0" anchor="ctr"/>
           <a:lstStyle/>
           <a:p>
-            <a:pPr indent="0" marL="0">
-              <a:buNone/>
-            </a:pPr>
-            <a:r>
-              <a:rPr lang="en-US" sz="1200" dirty="0">
+            <a:r>
+              <a:rPr lang="en-US" sz="1200">
                 <a:solidFill>
                   <a:srgbClr val="46555F"/>
                 </a:solidFill>
-                <a:latin typeface="Arial" pitchFamily="34" charset="0"/>
-                <a:ea typeface="Arial" pitchFamily="34" charset="-122"/>
-                <a:cs typeface="Arial" pitchFamily="34" charset="-120"/>
-              </a:rPr>
-              <a:t>(feature)</a:t>
-            </a:r>
-            <a:endParaRPr lang="en-US" sz="1200" dirty="0"/>
+                <a:latin typeface="Arial"/>
+                <a:ea typeface="Arial" pitchFamily="34" charset="-122"/>
+                <a:cs typeface="Arial"/>
+              </a:rPr>
+              <a:t>Tool Use, Deployment</a:t>
+            </a:r>
+            <a:endParaRPr lang="en-US" sz="1200"/>
           </a:p>
         </p:txBody>
       </p:sp>
@@ -9553,6 +10496,13 @@
             <a:prstDash val="solid"/>
           </a:ln>
         </p:spPr>
+        <p:txBody>
+          <a:bodyPr/>
+          <a:lstStyle/>
+          <a:p>
+            <a:endParaRPr lang="en-US"/>
+          </a:p>
+        </p:txBody>
       </p:sp>
       <p:sp>
         <p:nvSpPr>
@@ -9573,6 +10523,13 @@
           </a:solidFill>
           <a:ln/>
         </p:spPr>
+        <p:txBody>
+          <a:bodyPr/>
+          <a:lstStyle/>
+          <a:p>
+            <a:endParaRPr lang="en-US"/>
+          </a:p>
+        </p:txBody>
       </p:sp>
       <p:sp>
         <p:nvSpPr>
@@ -9595,11 +10552,11 @@
           <a:bodyPr wrap="square" lIns="0" tIns="0" rIns="0" bIns="0" rtlCol="0" anchor="ctr"/>
           <a:lstStyle/>
           <a:p>
-            <a:pPr algn="ctr" indent="0" marL="0">
-              <a:buNone/>
-            </a:pPr>
-            <a:r>
-              <a:rPr lang="en-US" sz="1300" b="1" dirty="0">
+            <a:pPr marL="0" indent="0" algn="ctr">
+              <a:buNone/>
+            </a:pPr>
+            <a:r>
+              <a:rPr lang="en-US" sz="1300" b="1">
                 <a:solidFill>
                   <a:srgbClr val="FFFFFF"/>
                 </a:solidFill>
@@ -9609,7 +10566,7 @@
               </a:rPr>
               <a:t>4</a:t>
             </a:r>
-            <a:endParaRPr lang="en-US" sz="1300" dirty="0"/>
+            <a:endParaRPr lang="en-US" sz="1300"/>
           </a:p>
         </p:txBody>
       </p:sp>
@@ -9634,11 +10591,11 @@
           <a:bodyPr wrap="square" lIns="0" tIns="0" rIns="0" bIns="0" rtlCol="0" anchor="ctr"/>
           <a:lstStyle/>
           <a:p>
-            <a:pPr indent="0" marL="0">
-              <a:buNone/>
-            </a:pPr>
-            <a:r>
-              <a:rPr lang="en-US" sz="1300" b="1" dirty="0">
+            <a:pPr marL="0" indent="0">
+              <a:buNone/>
+            </a:pPr>
+            <a:r>
+              <a:rPr lang="en-US" sz="1300" b="1">
                 <a:solidFill>
                   <a:srgbClr val="1D252D"/>
                 </a:solidFill>
@@ -9648,7 +10605,7 @@
               </a:rPr>
               <a:t>Muhammad Muzzammil Bin Mohd Salahudin</a:t>
             </a:r>
-            <a:endParaRPr lang="en-US" sz="1300" dirty="0"/>
+            <a:endParaRPr lang="en-US" sz="1300"/>
           </a:p>
         </p:txBody>
       </p:sp>
@@ -9673,21 +10630,18 @@
           <a:bodyPr wrap="square" lIns="0" tIns="0" rIns="0" bIns="0" rtlCol="0" anchor="ctr"/>
           <a:lstStyle/>
           <a:p>
-            <a:pPr indent="0" marL="0">
-              <a:buNone/>
-            </a:pPr>
-            <a:r>
-              <a:rPr lang="en-US" sz="1200" dirty="0">
+            <a:r>
+              <a:rPr lang="en-US" sz="1200">
                 <a:solidFill>
                   <a:srgbClr val="46555F"/>
                 </a:solidFill>
-                <a:latin typeface="Arial" pitchFamily="34" charset="0"/>
-                <a:ea typeface="Arial" pitchFamily="34" charset="-122"/>
-                <a:cs typeface="Arial" pitchFamily="34" charset="-120"/>
-              </a:rPr>
-              <a:t>(feature)</a:t>
-            </a:r>
-            <a:endParaRPr lang="en-US" sz="1200" dirty="0"/>
+                <a:latin typeface="Arial"/>
+                <a:ea typeface="Arial" pitchFamily="34" charset="-122"/>
+                <a:cs typeface="Arial"/>
+              </a:rPr>
+              <a:t>Memory, Multiple data sources</a:t>
+            </a:r>
+            <a:endParaRPr lang="en-US" sz="1200"/>
           </a:p>
         </p:txBody>
       </p:sp>
@@ -9717,6 +10671,13 @@
             <a:prstDash val="solid"/>
           </a:ln>
         </p:spPr>
+        <p:txBody>
+          <a:bodyPr/>
+          <a:lstStyle/>
+          <a:p>
+            <a:endParaRPr lang="en-US"/>
+          </a:p>
+        </p:txBody>
       </p:sp>
       <p:sp>
         <p:nvSpPr>
@@ -9737,6 +10698,13 @@
           </a:solidFill>
           <a:ln/>
         </p:spPr>
+        <p:txBody>
+          <a:bodyPr/>
+          <a:lstStyle/>
+          <a:p>
+            <a:endParaRPr lang="en-US"/>
+          </a:p>
+        </p:txBody>
       </p:sp>
       <p:sp>
         <p:nvSpPr>
@@ -9759,11 +10727,11 @@
           <a:bodyPr wrap="square" lIns="0" tIns="0" rIns="0" bIns="0" rtlCol="0" anchor="ctr"/>
           <a:lstStyle/>
           <a:p>
-            <a:pPr algn="ctr" indent="0" marL="0">
-              <a:buNone/>
-            </a:pPr>
-            <a:r>
-              <a:rPr lang="en-US" sz="1300" b="1" dirty="0">
+            <a:pPr marL="0" indent="0" algn="ctr">
+              <a:buNone/>
+            </a:pPr>
+            <a:r>
+              <a:rPr lang="en-US" sz="1300" b="1">
                 <a:solidFill>
                   <a:srgbClr val="FFFFFF"/>
                 </a:solidFill>
@@ -9773,7 +10741,7 @@
               </a:rPr>
               <a:t>5</a:t>
             </a:r>
-            <a:endParaRPr lang="en-US" sz="1300" dirty="0"/>
+            <a:endParaRPr lang="en-US" sz="1300"/>
           </a:p>
         </p:txBody>
       </p:sp>
@@ -9798,11 +10766,11 @@
           <a:bodyPr wrap="square" lIns="0" tIns="0" rIns="0" bIns="0" rtlCol="0" anchor="ctr"/>
           <a:lstStyle/>
           <a:p>
-            <a:pPr indent="0" marL="0">
-              <a:buNone/>
-            </a:pPr>
-            <a:r>
-              <a:rPr lang="en-US" sz="1300" b="1" dirty="0">
+            <a:pPr marL="0" indent="0">
+              <a:buNone/>
+            </a:pPr>
+            <a:r>
+              <a:rPr lang="en-US" sz="1300" b="1">
                 <a:solidFill>
                   <a:srgbClr val="1D252D"/>
                 </a:solidFill>
@@ -9812,7 +10780,7 @@
               </a:rPr>
               <a:t>Phuah Hong</a:t>
             </a:r>
-            <a:endParaRPr lang="en-US" sz="1300" dirty="0"/>
+            <a:endParaRPr lang="en-US" sz="1300"/>
           </a:p>
         </p:txBody>
       </p:sp>
@@ -9837,60 +10805,21 @@
           <a:bodyPr wrap="square" lIns="0" tIns="0" rIns="0" bIns="0" rtlCol="0" anchor="ctr"/>
           <a:lstStyle/>
           <a:p>
-            <a:pPr indent="0" marL="0">
-              <a:buNone/>
-            </a:pPr>
-            <a:r>
-              <a:rPr lang="en-US" sz="1200" dirty="0">
+            <a:r>
+              <a:rPr lang="en-US" sz="1200">
                 <a:solidFill>
                   <a:srgbClr val="46555F"/>
                 </a:solidFill>
-                <a:latin typeface="Arial" pitchFamily="34" charset="0"/>
-                <a:ea typeface="Arial" pitchFamily="34" charset="-122"/>
-                <a:cs typeface="Arial" pitchFamily="34" charset="-120"/>
-              </a:rPr>
-              <a:t>(feature)</a:t>
-            </a:r>
-            <a:endParaRPr lang="en-US" sz="1200" dirty="0"/>
-          </a:p>
-        </p:txBody>
-      </p:sp>
-      <p:sp>
-        <p:nvSpPr>
-          <p:cNvPr id="29" name="Text 27"/>
-          <p:cNvSpPr/>
-          <p:nvPr/>
-        </p:nvSpPr>
-        <p:spPr>
-          <a:xfrm>
-            <a:off x="502920" y="4434840"/>
-            <a:ext cx="8138160" cy="274320"/>
-          </a:xfrm>
-          <a:prstGeom prst="rect">
-            <a:avLst/>
-          </a:prstGeom>
-          <a:noFill/>
-          <a:ln/>
-        </p:spPr>
-        <p:txBody>
-          <a:bodyPr wrap="square" lIns="0" tIns="0" rIns="0" bIns="0" rtlCol="0" anchor="ctr"/>
-          <a:lstStyle/>
-          <a:p>
-            <a:pPr indent="0" marL="0">
-              <a:buNone/>
-            </a:pPr>
-            <a:r>
-              <a:rPr lang="en-US" sz="1150" i="1" dirty="0">
-                <a:solidFill>
-                  <a:srgbClr val="46555F"/>
-                </a:solidFill>
-                <a:latin typeface="Arial" pitchFamily="34" charset="0"/>
-                <a:ea typeface="Arial" pitchFamily="34" charset="-122"/>
-                <a:cs typeface="Arial" pitchFamily="34" charset="-120"/>
-              </a:rPr>
-              <a:t>Each member owns their area end to end and can walk through the code on request.</a:t>
-            </a:r>
-            <a:endParaRPr lang="en-US" sz="1150" dirty="0"/>
+                <a:latin typeface="Arial"/>
+                <a:ea typeface="Arial" pitchFamily="34" charset="-122"/>
+                <a:cs typeface="Arial"/>
+              </a:rPr>
+              <a:t>Advanced Chunking, Local LLM</a:t>
+            </a:r>
+            <a:endParaRPr lang="en-US" sz="1200">
+              <a:latin typeface="Arial"/>
+              <a:cs typeface="Arial"/>
+            </a:endParaRPr>
           </a:p>
         </p:txBody>
       </p:sp>
@@ -10195,4 +11124,305 @@
     </a:ext>
   </a:extLst>
 </a:theme>
+</file>
+
+<file path=ppt/theme/theme2.xml><?xml version="1.0" encoding="utf-8"?>
+<a:theme xmlns:a="http://schemas.openxmlformats.org/drawingml/2006/main" name="Office Theme">
+  <a:themeElements>
+    <a:clrScheme name="Office">
+      <a:dk1>
+        <a:sysClr val="windowText" lastClr="000000"/>
+      </a:dk1>
+      <a:lt1>
+        <a:sysClr val="window" lastClr="FFFFFF"/>
+      </a:lt1>
+      <a:dk2>
+        <a:srgbClr val="44546A"/>
+      </a:dk2>
+      <a:lt2>
+        <a:srgbClr val="E7E6E6"/>
+      </a:lt2>
+      <a:accent1>
+        <a:srgbClr val="4472C4"/>
+      </a:accent1>
+      <a:accent2>
+        <a:srgbClr val="ED7D31"/>
+      </a:accent2>
+      <a:accent3>
+        <a:srgbClr val="A5A5A5"/>
+      </a:accent3>
+      <a:accent4>
+        <a:srgbClr val="FFC000"/>
+      </a:accent4>
+      <a:accent5>
+        <a:srgbClr val="5B9BD5"/>
+      </a:accent5>
+      <a:accent6>
+        <a:srgbClr val="70AD47"/>
+      </a:accent6>
+      <a:hlink>
+        <a:srgbClr val="0563C1"/>
+      </a:hlink>
+      <a:folHlink>
+        <a:srgbClr val="954F72"/>
+      </a:folHlink>
+    </a:clrScheme>
+    <a:fontScheme name="Office">
+      <a:majorFont>
+        <a:latin typeface="Calibri Light" panose="020F0302020204030204"/>
+        <a:ea typeface=""/>
+        <a:cs typeface=""/>
+        <a:font script="Jpan" typeface="游ゴシック Light"/>
+        <a:font script="Hang" typeface="맑은 고딕"/>
+        <a:font script="Hans" typeface="等线 Light"/>
+        <a:font script="Hant" typeface="新細明體"/>
+        <a:font script="Arab" typeface="Times New Roman"/>
+        <a:font script="Hebr" typeface="Times New Roman"/>
+        <a:font script="Thai" typeface="Angsana New"/>
+        <a:font script="Ethi" typeface="Nyala"/>
+        <a:font script="Beng" typeface="Vrinda"/>
+        <a:font script="Gujr" typeface="Shruti"/>
+        <a:font script="Khmr" typeface="MoolBoran"/>
+        <a:font script="Knda" typeface="Tunga"/>
+        <a:font script="Guru" typeface="Raavi"/>
+        <a:font script="Cans" typeface="Euphemia"/>
+        <a:font script="Cher" typeface="Plantagenet Cherokee"/>
+        <a:font script="Yiii" typeface="Microsoft Yi Baiti"/>
+        <a:font script="Tibt" typeface="Microsoft Himalaya"/>
+        <a:font script="Thaa" typeface="MV Boli"/>
+        <a:font script="Deva" typeface="Mangal"/>
+        <a:font script="Telu" typeface="Gautami"/>
+        <a:font script="Taml" typeface="Latha"/>
+        <a:font script="Syrc" typeface="Estrangelo Edessa"/>
+        <a:font script="Orya" typeface="Kalinga"/>
+        <a:font script="Mlym" typeface="Kartika"/>
+        <a:font script="Laoo" typeface="DokChampa"/>
+        <a:font script="Sinh" typeface="Iskoola Pota"/>
+        <a:font script="Mong" typeface="Mongolian Baiti"/>
+        <a:font script="Viet" typeface="Times New Roman"/>
+        <a:font script="Uigh" typeface="Microsoft Uighur"/>
+        <a:font script="Geor" typeface="Sylfaen"/>
+        <a:font script="Armn" typeface="Arial"/>
+        <a:font script="Bugi" typeface="Leelawadee UI"/>
+        <a:font script="Bopo" typeface="Microsoft JhengHei"/>
+        <a:font script="Java" typeface="Javanese Text"/>
+        <a:font script="Lisu" typeface="Segoe UI"/>
+        <a:font script="Mymr" typeface="Myanmar Text"/>
+        <a:font script="Nkoo" typeface="Ebrima"/>
+        <a:font script="Olck" typeface="Nirmala UI"/>
+        <a:font script="Osma" typeface="Ebrima"/>
+        <a:font script="Phag" typeface="Phagspa"/>
+        <a:font script="Syrn" typeface="Estrangelo Edessa"/>
+        <a:font script="Syrj" typeface="Estrangelo Edessa"/>
+        <a:font script="Syre" typeface="Estrangelo Edessa"/>
+        <a:font script="Sora" typeface="Nirmala UI"/>
+        <a:font script="Tale" typeface="Microsoft Tai Le"/>
+        <a:font script="Talu" typeface="Microsoft New Tai Lue"/>
+        <a:font script="Tfng" typeface="Ebrima"/>
+      </a:majorFont>
+      <a:minorFont>
+        <a:latin typeface="Calibri" panose="020F0502020204030204"/>
+        <a:ea typeface=""/>
+        <a:cs typeface=""/>
+        <a:font script="Jpan" typeface="游ゴシック"/>
+        <a:font script="Hang" typeface="맑은 고딕"/>
+        <a:font script="Hans" typeface="等线"/>
+        <a:font script="Hant" typeface="新細明體"/>
+        <a:font script="Arab" typeface="Arial"/>
+        <a:font script="Hebr" typeface="Arial"/>
+        <a:font script="Thai" typeface="Cordia New"/>
+        <a:font script="Ethi" typeface="Nyala"/>
+        <a:font script="Beng" typeface="Vrinda"/>
+        <a:font script="Gujr" typeface="Shruti"/>
+        <a:font script="Khmr" typeface="DaunPenh"/>
+        <a:font script="Knda" typeface="Tunga"/>
+        <a:font script="Guru" typeface="Raavi"/>
+        <a:font script="Cans" typeface="Euphemia"/>
+        <a:font script="Cher" typeface="Plantagenet Cherokee"/>
+        <a:font script="Yiii" typeface="Microsoft Yi Baiti"/>
+        <a:font script="Tibt" typeface="Microsoft Himalaya"/>
+        <a:font script="Thaa" typeface="MV Boli"/>
+        <a:font script="Deva" typeface="Mangal"/>
+        <a:font script="Telu" typeface="Gautami"/>
+        <a:font script="Taml" typeface="Latha"/>
+        <a:font script="Syrc" typeface="Estrangelo Edessa"/>
+        <a:font script="Orya" typeface="Kalinga"/>
+        <a:font script="Mlym" typeface="Kartika"/>
+        <a:font script="Laoo" typeface="DokChampa"/>
+        <a:font script="Sinh" typeface="Iskoola Pota"/>
+        <a:font script="Mong" typeface="Mongolian Baiti"/>
+        <a:font script="Viet" typeface="Arial"/>
+        <a:font script="Uigh" typeface="Microsoft Uighur"/>
+        <a:font script="Geor" typeface="Sylfaen"/>
+        <a:font script="Armn" typeface="Arial"/>
+        <a:font script="Bugi" typeface="Leelawadee UI"/>
+        <a:font script="Bopo" typeface="Microsoft JhengHei"/>
+        <a:font script="Java" typeface="Javanese Text"/>
+        <a:font script="Lisu" typeface="Segoe UI"/>
+        <a:font script="Mymr" typeface="Myanmar Text"/>
+        <a:font script="Nkoo" typeface="Ebrima"/>
+        <a:font script="Olck" typeface="Nirmala UI"/>
+        <a:font script="Osma" typeface="Ebrima"/>
+        <a:font script="Phag" typeface="Phagspa"/>
+        <a:font script="Syrn" typeface="Estrangelo Edessa"/>
+        <a:font script="Syrj" typeface="Estrangelo Edessa"/>
+        <a:font script="Syre" typeface="Estrangelo Edessa"/>
+        <a:font script="Sora" typeface="Nirmala UI"/>
+        <a:font script="Tale" typeface="Microsoft Tai Le"/>
+        <a:font script="Talu" typeface="Microsoft New Tai Lue"/>
+        <a:font script="Tfng" typeface="Ebrima"/>
+      </a:minorFont>
+    </a:fontScheme>
+    <a:fmtScheme name="Office">
+      <a:fillStyleLst>
+        <a:solidFill>
+          <a:schemeClr val="phClr"/>
+        </a:solidFill>
+        <a:gradFill rotWithShape="1">
+          <a:gsLst>
+            <a:gs pos="0">
+              <a:schemeClr val="phClr">
+                <a:lumMod val="110000"/>
+                <a:satMod val="105000"/>
+                <a:tint val="67000"/>
+              </a:schemeClr>
+            </a:gs>
+            <a:gs pos="50000">
+              <a:schemeClr val="phClr">
+                <a:lumMod val="105000"/>
+                <a:satMod val="103000"/>
+                <a:tint val="73000"/>
+              </a:schemeClr>
+            </a:gs>
+            <a:gs pos="100000">
+              <a:schemeClr val="phClr">
+                <a:lumMod val="105000"/>
+                <a:satMod val="109000"/>
+                <a:tint val="81000"/>
+              </a:schemeClr>
+            </a:gs>
+          </a:gsLst>
+          <a:lin ang="5400000" scaled="0"/>
+        </a:gradFill>
+        <a:gradFill rotWithShape="1">
+          <a:gsLst>
+            <a:gs pos="0">
+              <a:schemeClr val="phClr">
+                <a:satMod val="103000"/>
+                <a:lumMod val="102000"/>
+                <a:tint val="94000"/>
+              </a:schemeClr>
+            </a:gs>
+            <a:gs pos="50000">
+              <a:schemeClr val="phClr">
+                <a:satMod val="110000"/>
+                <a:lumMod val="100000"/>
+                <a:shade val="100000"/>
+              </a:schemeClr>
+            </a:gs>
+            <a:gs pos="100000">
+              <a:schemeClr val="phClr">
+                <a:lumMod val="99000"/>
+                <a:satMod val="120000"/>
+                <a:shade val="78000"/>
+              </a:schemeClr>
+            </a:gs>
+          </a:gsLst>
+          <a:lin ang="5400000" scaled="0"/>
+        </a:gradFill>
+      </a:fillStyleLst>
+      <a:lnStyleLst>
+        <a:ln w="6350" cap="flat" cmpd="sng" algn="ctr">
+          <a:solidFill>
+            <a:schemeClr val="phClr"/>
+          </a:solidFill>
+          <a:prstDash val="solid"/>
+          <a:miter lim="800000"/>
+        </a:ln>
+        <a:ln w="12700" cap="flat" cmpd="sng" algn="ctr">
+          <a:solidFill>
+            <a:schemeClr val="phClr"/>
+          </a:solidFill>
+          <a:prstDash val="solid"/>
+          <a:miter lim="800000"/>
+        </a:ln>
+        <a:ln w="19050" cap="flat" cmpd="sng" algn="ctr">
+          <a:solidFill>
+            <a:schemeClr val="phClr"/>
+          </a:solidFill>
+          <a:prstDash val="solid"/>
+          <a:miter lim="800000"/>
+        </a:ln>
+      </a:lnStyleLst>
+      <a:effectStyleLst>
+        <a:effectStyle>
+          <a:effectLst/>
+        </a:effectStyle>
+        <a:effectStyle>
+          <a:effectLst/>
+        </a:effectStyle>
+        <a:effectStyle>
+          <a:effectLst>
+            <a:outerShdw blurRad="57150" dist="19050" dir="5400000" algn="ctr" rotWithShape="0">
+              <a:srgbClr val="000000">
+                <a:alpha val="63000"/>
+              </a:srgbClr>
+            </a:outerShdw>
+          </a:effectLst>
+        </a:effectStyle>
+      </a:effectStyleLst>
+      <a:bgFillStyleLst>
+        <a:solidFill>
+          <a:schemeClr val="phClr"/>
+        </a:solidFill>
+        <a:solidFill>
+          <a:schemeClr val="phClr">
+            <a:tint val="95000"/>
+            <a:satMod val="170000"/>
+          </a:schemeClr>
+        </a:solidFill>
+        <a:gradFill rotWithShape="1">
+          <a:gsLst>
+            <a:gs pos="0">
+              <a:schemeClr val="phClr">
+                <a:tint val="93000"/>
+                <a:satMod val="150000"/>
+                <a:shade val="98000"/>
+                <a:lumMod val="102000"/>
+              </a:schemeClr>
+            </a:gs>
+            <a:gs pos="50000">
+              <a:schemeClr val="phClr">
+                <a:tint val="98000"/>
+                <a:satMod val="130000"/>
+                <a:shade val="90000"/>
+                <a:lumMod val="103000"/>
+              </a:schemeClr>
+            </a:gs>
+            <a:gs pos="100000">
+              <a:schemeClr val="phClr">
+                <a:shade val="63000"/>
+                <a:satMod val="120000"/>
+              </a:schemeClr>
+            </a:gs>
+          </a:gsLst>
+          <a:lin ang="5400000" scaled="0"/>
+        </a:gradFill>
+      </a:bgFillStyleLst>
+    </a:fmtScheme>
+  </a:themeElements>
+  <a:objectDefaults/>
+  <a:extraClrSchemeLst/>
+  <a:extLst>
+    <a:ext uri="{05A4C25C-085E-4340-85A3-A5531E510DB2}">
+      <thm15:themeFamily xmlns:thm15="http://schemas.microsoft.com/office/thememl/2012/main" name="Office Theme" id="{62F939B6-93AF-4DB8-9C6B-D6C7DFDC589F}" vid="{4A3C46E8-61CC-4603-A589-7422A47A8E4A}"/>
+    </a:ext>
+  </a:extLst>
+</a:theme>
+</file>
+
+<file path=docMetadata/LabelInfo.xml><?xml version="1.0" encoding="utf-8"?>
+<clbl:labelList xmlns:clbl="http://schemas.microsoft.com/office/2020/mipLabelMetadata">
+  <clbl:label id="{f9dda1df-3fca-45c7-91be-5629a3733338}" enabled="1" method="Standard" siteId="{ec1ca250-c234-4d56-a76b-7dfb9eee0c46}" removed="0"/>
+</clbl:labelList>
 </file>